--- a/TP1/ Introduccion a Matlab.pptx
+++ b/TP1/ Introduccion a Matlab.pptx
@@ -14,12 +14,13 @@
     <p:sldId id="263" r:id="rId8"/>
     <p:sldId id="264" r:id="rId9"/>
     <p:sldId id="265" r:id="rId10"/>
-    <p:sldId id="266" r:id="rId11"/>
-    <p:sldId id="267" r:id="rId12"/>
-    <p:sldId id="268" r:id="rId13"/>
-    <p:sldId id="269" r:id="rId14"/>
-    <p:sldId id="270" r:id="rId15"/>
-    <p:sldId id="271" r:id="rId16"/>
+    <p:sldId id="272" r:id="rId11"/>
+    <p:sldId id="266" r:id="rId12"/>
+    <p:sldId id="267" r:id="rId13"/>
+    <p:sldId id="268" r:id="rId14"/>
+    <p:sldId id="269" r:id="rId15"/>
+    <p:sldId id="270" r:id="rId16"/>
+    <p:sldId id="271" r:id="rId17"/>
   </p:sldIdLst>
   <p:sldSz cx="12192000" cy="6858000"/>
   <p:notesSz cx="6858000" cy="9144000"/>
@@ -168,7 +169,7 @@
           </a:lstStyle>
           <a:p>
             <a:r>
-              <a:rPr lang="es-ES" smtClean="0"/>
+              <a:rPr lang="es-ES"/>
               <a:t>Haga clic para modificar el estilo de título del patrón</a:t>
             </a:r>
             <a:endParaRPr lang="es-AR"/>
@@ -233,7 +234,7 @@
           </a:lstStyle>
           <a:p>
             <a:r>
-              <a:rPr lang="es-ES" smtClean="0"/>
+              <a:rPr lang="es-ES"/>
               <a:t>Haga clic para editar el estilo de subtítulo del patrón</a:t>
             </a:r>
             <a:endParaRPr lang="es-AR"/>
@@ -257,7 +258,7 @@
           <a:p>
             <a:fld id="{122C414C-D702-4E3C-BC2D-24602C7F376F}" type="datetimeFigureOut">
               <a:rPr lang="es-AR" smtClean="0"/>
-              <a:t>13/8/2023</a:t>
+              <a:t>6/7/2026</a:t>
             </a:fld>
             <a:endParaRPr lang="es-AR"/>
           </a:p>
@@ -351,7 +352,7 @@
           <a:lstStyle/>
           <a:p>
             <a:r>
-              <a:rPr lang="es-ES" smtClean="0"/>
+              <a:rPr lang="es-ES"/>
               <a:t>Haga clic para modificar el estilo de título del patrón</a:t>
             </a:r>
             <a:endParaRPr lang="es-AR"/>
@@ -375,35 +376,35 @@
           <a:p>
             <a:pPr lvl="0"/>
             <a:r>
-              <a:rPr lang="es-ES" smtClean="0"/>
+              <a:rPr lang="es-ES"/>
               <a:t>Editar el estilo de texto del patrón</a:t>
             </a:r>
           </a:p>
           <a:p>
             <a:pPr lvl="1"/>
             <a:r>
-              <a:rPr lang="es-ES" smtClean="0"/>
+              <a:rPr lang="es-ES"/>
               <a:t>Segundo nivel</a:t>
             </a:r>
           </a:p>
           <a:p>
             <a:pPr lvl="2"/>
             <a:r>
-              <a:rPr lang="es-ES" smtClean="0"/>
+              <a:rPr lang="es-ES"/>
               <a:t>Tercer nivel</a:t>
             </a:r>
           </a:p>
           <a:p>
             <a:pPr lvl="3"/>
             <a:r>
-              <a:rPr lang="es-ES" smtClean="0"/>
+              <a:rPr lang="es-ES"/>
               <a:t>Cuarto nivel</a:t>
             </a:r>
           </a:p>
           <a:p>
             <a:pPr lvl="4"/>
             <a:r>
-              <a:rPr lang="es-ES" smtClean="0"/>
+              <a:rPr lang="es-ES"/>
               <a:t>Quinto nivel</a:t>
             </a:r>
             <a:endParaRPr lang="es-AR"/>
@@ -427,7 +428,7 @@
           <a:p>
             <a:fld id="{122C414C-D702-4E3C-BC2D-24602C7F376F}" type="datetimeFigureOut">
               <a:rPr lang="es-AR" smtClean="0"/>
-              <a:t>13/8/2023</a:t>
+              <a:t>6/7/2026</a:t>
             </a:fld>
             <a:endParaRPr lang="es-AR"/>
           </a:p>
@@ -526,7 +527,7 @@
           <a:lstStyle/>
           <a:p>
             <a:r>
-              <a:rPr lang="es-ES" smtClean="0"/>
+              <a:rPr lang="es-ES"/>
               <a:t>Haga clic para modificar el estilo de título del patrón</a:t>
             </a:r>
             <a:endParaRPr lang="es-AR"/>
@@ -555,35 +556,35 @@
           <a:p>
             <a:pPr lvl="0"/>
             <a:r>
-              <a:rPr lang="es-ES" smtClean="0"/>
+              <a:rPr lang="es-ES"/>
               <a:t>Editar el estilo de texto del patrón</a:t>
             </a:r>
           </a:p>
           <a:p>
             <a:pPr lvl="1"/>
             <a:r>
-              <a:rPr lang="es-ES" smtClean="0"/>
+              <a:rPr lang="es-ES"/>
               <a:t>Segundo nivel</a:t>
             </a:r>
           </a:p>
           <a:p>
             <a:pPr lvl="2"/>
             <a:r>
-              <a:rPr lang="es-ES" smtClean="0"/>
+              <a:rPr lang="es-ES"/>
               <a:t>Tercer nivel</a:t>
             </a:r>
           </a:p>
           <a:p>
             <a:pPr lvl="3"/>
             <a:r>
-              <a:rPr lang="es-ES" smtClean="0"/>
+              <a:rPr lang="es-ES"/>
               <a:t>Cuarto nivel</a:t>
             </a:r>
           </a:p>
           <a:p>
             <a:pPr lvl="4"/>
             <a:r>
-              <a:rPr lang="es-ES" smtClean="0"/>
+              <a:rPr lang="es-ES"/>
               <a:t>Quinto nivel</a:t>
             </a:r>
             <a:endParaRPr lang="es-AR"/>
@@ -607,7 +608,7 @@
           <a:p>
             <a:fld id="{122C414C-D702-4E3C-BC2D-24602C7F376F}" type="datetimeFigureOut">
               <a:rPr lang="es-AR" smtClean="0"/>
-              <a:t>13/8/2023</a:t>
+              <a:t>6/7/2026</a:t>
             </a:fld>
             <a:endParaRPr lang="es-AR"/>
           </a:p>
@@ -701,7 +702,7 @@
           <a:lstStyle/>
           <a:p>
             <a:r>
-              <a:rPr lang="es-ES" smtClean="0"/>
+              <a:rPr lang="es-ES"/>
               <a:t>Haga clic para modificar el estilo de título del patrón</a:t>
             </a:r>
             <a:endParaRPr lang="es-AR"/>
@@ -725,35 +726,35 @@
           <a:p>
             <a:pPr lvl="0"/>
             <a:r>
-              <a:rPr lang="es-ES" smtClean="0"/>
+              <a:rPr lang="es-ES"/>
               <a:t>Editar el estilo de texto del patrón</a:t>
             </a:r>
           </a:p>
           <a:p>
             <a:pPr lvl="1"/>
             <a:r>
-              <a:rPr lang="es-ES" smtClean="0"/>
+              <a:rPr lang="es-ES"/>
               <a:t>Segundo nivel</a:t>
             </a:r>
           </a:p>
           <a:p>
             <a:pPr lvl="2"/>
             <a:r>
-              <a:rPr lang="es-ES" smtClean="0"/>
+              <a:rPr lang="es-ES"/>
               <a:t>Tercer nivel</a:t>
             </a:r>
           </a:p>
           <a:p>
             <a:pPr lvl="3"/>
             <a:r>
-              <a:rPr lang="es-ES" smtClean="0"/>
+              <a:rPr lang="es-ES"/>
               <a:t>Cuarto nivel</a:t>
             </a:r>
           </a:p>
           <a:p>
             <a:pPr lvl="4"/>
             <a:r>
-              <a:rPr lang="es-ES" smtClean="0"/>
+              <a:rPr lang="es-ES"/>
               <a:t>Quinto nivel</a:t>
             </a:r>
             <a:endParaRPr lang="es-AR"/>
@@ -777,7 +778,7 @@
           <a:p>
             <a:fld id="{122C414C-D702-4E3C-BC2D-24602C7F376F}" type="datetimeFigureOut">
               <a:rPr lang="es-AR" smtClean="0"/>
-              <a:t>13/8/2023</a:t>
+              <a:t>6/7/2026</a:t>
             </a:fld>
             <a:endParaRPr lang="es-AR"/>
           </a:p>
@@ -880,7 +881,7 @@
           </a:lstStyle>
           <a:p>
             <a:r>
-              <a:rPr lang="es-ES" smtClean="0"/>
+              <a:rPr lang="es-ES"/>
               <a:t>Haga clic para modificar el estilo de título del patrón</a:t>
             </a:r>
             <a:endParaRPr lang="es-AR"/>
@@ -1000,7 +1001,7 @@
           <a:p>
             <a:pPr lvl="0"/>
             <a:r>
-              <a:rPr lang="es-ES" smtClean="0"/>
+              <a:rPr lang="es-ES"/>
               <a:t>Editar el estilo de texto del patrón</a:t>
             </a:r>
           </a:p>
@@ -1023,7 +1024,7 @@
           <a:p>
             <a:fld id="{122C414C-D702-4E3C-BC2D-24602C7F376F}" type="datetimeFigureOut">
               <a:rPr lang="es-AR" smtClean="0"/>
-              <a:t>13/8/2023</a:t>
+              <a:t>6/7/2026</a:t>
             </a:fld>
             <a:endParaRPr lang="es-AR"/>
           </a:p>
@@ -1117,7 +1118,7 @@
           <a:lstStyle/>
           <a:p>
             <a:r>
-              <a:rPr lang="es-ES" smtClean="0"/>
+              <a:rPr lang="es-ES"/>
               <a:t>Haga clic para modificar el estilo de título del patrón</a:t>
             </a:r>
             <a:endParaRPr lang="es-AR"/>
@@ -1146,35 +1147,35 @@
           <a:p>
             <a:pPr lvl="0"/>
             <a:r>
-              <a:rPr lang="es-ES" smtClean="0"/>
+              <a:rPr lang="es-ES"/>
               <a:t>Editar el estilo de texto del patrón</a:t>
             </a:r>
           </a:p>
           <a:p>
             <a:pPr lvl="1"/>
             <a:r>
-              <a:rPr lang="es-ES" smtClean="0"/>
+              <a:rPr lang="es-ES"/>
               <a:t>Segundo nivel</a:t>
             </a:r>
           </a:p>
           <a:p>
             <a:pPr lvl="2"/>
             <a:r>
-              <a:rPr lang="es-ES" smtClean="0"/>
+              <a:rPr lang="es-ES"/>
               <a:t>Tercer nivel</a:t>
             </a:r>
           </a:p>
           <a:p>
             <a:pPr lvl="3"/>
             <a:r>
-              <a:rPr lang="es-ES" smtClean="0"/>
+              <a:rPr lang="es-ES"/>
               <a:t>Cuarto nivel</a:t>
             </a:r>
           </a:p>
           <a:p>
             <a:pPr lvl="4"/>
             <a:r>
-              <a:rPr lang="es-ES" smtClean="0"/>
+              <a:rPr lang="es-ES"/>
               <a:t>Quinto nivel</a:t>
             </a:r>
             <a:endParaRPr lang="es-AR"/>
@@ -1203,35 +1204,35 @@
           <a:p>
             <a:pPr lvl="0"/>
             <a:r>
-              <a:rPr lang="es-ES" smtClean="0"/>
+              <a:rPr lang="es-ES"/>
               <a:t>Editar el estilo de texto del patrón</a:t>
             </a:r>
           </a:p>
           <a:p>
             <a:pPr lvl="1"/>
             <a:r>
-              <a:rPr lang="es-ES" smtClean="0"/>
+              <a:rPr lang="es-ES"/>
               <a:t>Segundo nivel</a:t>
             </a:r>
           </a:p>
           <a:p>
             <a:pPr lvl="2"/>
             <a:r>
-              <a:rPr lang="es-ES" smtClean="0"/>
+              <a:rPr lang="es-ES"/>
               <a:t>Tercer nivel</a:t>
             </a:r>
           </a:p>
           <a:p>
             <a:pPr lvl="3"/>
             <a:r>
-              <a:rPr lang="es-ES" smtClean="0"/>
+              <a:rPr lang="es-ES"/>
               <a:t>Cuarto nivel</a:t>
             </a:r>
           </a:p>
           <a:p>
             <a:pPr lvl="4"/>
             <a:r>
-              <a:rPr lang="es-ES" smtClean="0"/>
+              <a:rPr lang="es-ES"/>
               <a:t>Quinto nivel</a:t>
             </a:r>
             <a:endParaRPr lang="es-AR"/>
@@ -1255,7 +1256,7 @@
           <a:p>
             <a:fld id="{122C414C-D702-4E3C-BC2D-24602C7F376F}" type="datetimeFigureOut">
               <a:rPr lang="es-AR" smtClean="0"/>
-              <a:t>13/8/2023</a:t>
+              <a:t>6/7/2026</a:t>
             </a:fld>
             <a:endParaRPr lang="es-AR"/>
           </a:p>
@@ -1354,7 +1355,7 @@
           <a:lstStyle/>
           <a:p>
             <a:r>
-              <a:rPr lang="es-ES" smtClean="0"/>
+              <a:rPr lang="es-ES"/>
               <a:t>Haga clic para modificar el estilo de título del patrón</a:t>
             </a:r>
             <a:endParaRPr lang="es-AR"/>
@@ -1420,7 +1421,7 @@
           <a:p>
             <a:pPr lvl="0"/>
             <a:r>
-              <a:rPr lang="es-ES" smtClean="0"/>
+              <a:rPr lang="es-ES"/>
               <a:t>Editar el estilo de texto del patrón</a:t>
             </a:r>
           </a:p>
@@ -1448,35 +1449,35 @@
           <a:p>
             <a:pPr lvl="0"/>
             <a:r>
-              <a:rPr lang="es-ES" smtClean="0"/>
+              <a:rPr lang="es-ES"/>
               <a:t>Editar el estilo de texto del patrón</a:t>
             </a:r>
           </a:p>
           <a:p>
             <a:pPr lvl="1"/>
             <a:r>
-              <a:rPr lang="es-ES" smtClean="0"/>
+              <a:rPr lang="es-ES"/>
               <a:t>Segundo nivel</a:t>
             </a:r>
           </a:p>
           <a:p>
             <a:pPr lvl="2"/>
             <a:r>
-              <a:rPr lang="es-ES" smtClean="0"/>
+              <a:rPr lang="es-ES"/>
               <a:t>Tercer nivel</a:t>
             </a:r>
           </a:p>
           <a:p>
             <a:pPr lvl="3"/>
             <a:r>
-              <a:rPr lang="es-ES" smtClean="0"/>
+              <a:rPr lang="es-ES"/>
               <a:t>Cuarto nivel</a:t>
             </a:r>
           </a:p>
           <a:p>
             <a:pPr lvl="4"/>
             <a:r>
-              <a:rPr lang="es-ES" smtClean="0"/>
+              <a:rPr lang="es-ES"/>
               <a:t>Quinto nivel</a:t>
             </a:r>
             <a:endParaRPr lang="es-AR"/>
@@ -1542,7 +1543,7 @@
           <a:p>
             <a:pPr lvl="0"/>
             <a:r>
-              <a:rPr lang="es-ES" smtClean="0"/>
+              <a:rPr lang="es-ES"/>
               <a:t>Editar el estilo de texto del patrón</a:t>
             </a:r>
           </a:p>
@@ -1570,35 +1571,35 @@
           <a:p>
             <a:pPr lvl="0"/>
             <a:r>
-              <a:rPr lang="es-ES" smtClean="0"/>
+              <a:rPr lang="es-ES"/>
               <a:t>Editar el estilo de texto del patrón</a:t>
             </a:r>
           </a:p>
           <a:p>
             <a:pPr lvl="1"/>
             <a:r>
-              <a:rPr lang="es-ES" smtClean="0"/>
+              <a:rPr lang="es-ES"/>
               <a:t>Segundo nivel</a:t>
             </a:r>
           </a:p>
           <a:p>
             <a:pPr lvl="2"/>
             <a:r>
-              <a:rPr lang="es-ES" smtClean="0"/>
+              <a:rPr lang="es-ES"/>
               <a:t>Tercer nivel</a:t>
             </a:r>
           </a:p>
           <a:p>
             <a:pPr lvl="3"/>
             <a:r>
-              <a:rPr lang="es-ES" smtClean="0"/>
+              <a:rPr lang="es-ES"/>
               <a:t>Cuarto nivel</a:t>
             </a:r>
           </a:p>
           <a:p>
             <a:pPr lvl="4"/>
             <a:r>
-              <a:rPr lang="es-ES" smtClean="0"/>
+              <a:rPr lang="es-ES"/>
               <a:t>Quinto nivel</a:t>
             </a:r>
             <a:endParaRPr lang="es-AR"/>
@@ -1622,7 +1623,7 @@
           <a:p>
             <a:fld id="{122C414C-D702-4E3C-BC2D-24602C7F376F}" type="datetimeFigureOut">
               <a:rPr lang="es-AR" smtClean="0"/>
-              <a:t>13/8/2023</a:t>
+              <a:t>6/7/2026</a:t>
             </a:fld>
             <a:endParaRPr lang="es-AR"/>
           </a:p>
@@ -1716,7 +1717,7 @@
           <a:lstStyle/>
           <a:p>
             <a:r>
-              <a:rPr lang="es-ES" smtClean="0"/>
+              <a:rPr lang="es-ES"/>
               <a:t>Haga clic para modificar el estilo de título del patrón</a:t>
             </a:r>
             <a:endParaRPr lang="es-AR"/>
@@ -1740,7 +1741,7 @@
           <a:p>
             <a:fld id="{122C414C-D702-4E3C-BC2D-24602C7F376F}" type="datetimeFigureOut">
               <a:rPr lang="es-AR" smtClean="0"/>
-              <a:t>13/8/2023</a:t>
+              <a:t>6/7/2026</a:t>
             </a:fld>
             <a:endParaRPr lang="es-AR"/>
           </a:p>
@@ -1835,7 +1836,7 @@
           <a:p>
             <a:fld id="{122C414C-D702-4E3C-BC2D-24602C7F376F}" type="datetimeFigureOut">
               <a:rPr lang="es-AR" smtClean="0"/>
-              <a:t>13/8/2023</a:t>
+              <a:t>6/7/2026</a:t>
             </a:fld>
             <a:endParaRPr lang="es-AR"/>
           </a:p>
@@ -1938,7 +1939,7 @@
           </a:lstStyle>
           <a:p>
             <a:r>
-              <a:rPr lang="es-ES" smtClean="0"/>
+              <a:rPr lang="es-ES"/>
               <a:t>Haga clic para modificar el estilo de título del patrón</a:t>
             </a:r>
             <a:endParaRPr lang="es-AR"/>
@@ -1995,35 +1996,35 @@
           <a:p>
             <a:pPr lvl="0"/>
             <a:r>
-              <a:rPr lang="es-ES" smtClean="0"/>
+              <a:rPr lang="es-ES"/>
               <a:t>Editar el estilo de texto del patrón</a:t>
             </a:r>
           </a:p>
           <a:p>
             <a:pPr lvl="1"/>
             <a:r>
-              <a:rPr lang="es-ES" smtClean="0"/>
+              <a:rPr lang="es-ES"/>
               <a:t>Segundo nivel</a:t>
             </a:r>
           </a:p>
           <a:p>
             <a:pPr lvl="2"/>
             <a:r>
-              <a:rPr lang="es-ES" smtClean="0"/>
+              <a:rPr lang="es-ES"/>
               <a:t>Tercer nivel</a:t>
             </a:r>
           </a:p>
           <a:p>
             <a:pPr lvl="3"/>
             <a:r>
-              <a:rPr lang="es-ES" smtClean="0"/>
+              <a:rPr lang="es-ES"/>
               <a:t>Cuarto nivel</a:t>
             </a:r>
           </a:p>
           <a:p>
             <a:pPr lvl="4"/>
             <a:r>
-              <a:rPr lang="es-ES" smtClean="0"/>
+              <a:rPr lang="es-ES"/>
               <a:t>Quinto nivel</a:t>
             </a:r>
             <a:endParaRPr lang="es-AR"/>
@@ -2089,7 +2090,7 @@
           <a:p>
             <a:pPr lvl="0"/>
             <a:r>
-              <a:rPr lang="es-ES" smtClean="0"/>
+              <a:rPr lang="es-ES"/>
               <a:t>Editar el estilo de texto del patrón</a:t>
             </a:r>
           </a:p>
@@ -2112,7 +2113,7 @@
           <a:p>
             <a:fld id="{122C414C-D702-4E3C-BC2D-24602C7F376F}" type="datetimeFigureOut">
               <a:rPr lang="es-AR" smtClean="0"/>
-              <a:t>13/8/2023</a:t>
+              <a:t>6/7/2026</a:t>
             </a:fld>
             <a:endParaRPr lang="es-AR"/>
           </a:p>
@@ -2215,7 +2216,7 @@
           </a:lstStyle>
           <a:p>
             <a:r>
-              <a:rPr lang="es-ES" smtClean="0"/>
+              <a:rPr lang="es-ES"/>
               <a:t>Haga clic para modificar el estilo de título del patrón</a:t>
             </a:r>
             <a:endParaRPr lang="es-AR"/>
@@ -2342,7 +2343,7 @@
           <a:p>
             <a:pPr lvl="0"/>
             <a:r>
-              <a:rPr lang="es-ES" smtClean="0"/>
+              <a:rPr lang="es-ES"/>
               <a:t>Editar el estilo de texto del patrón</a:t>
             </a:r>
           </a:p>
@@ -2365,7 +2366,7 @@
           <a:p>
             <a:fld id="{122C414C-D702-4E3C-BC2D-24602C7F376F}" type="datetimeFigureOut">
               <a:rPr lang="es-AR" smtClean="0"/>
-              <a:t>13/8/2023</a:t>
+              <a:t>6/7/2026</a:t>
             </a:fld>
             <a:endParaRPr lang="es-AR"/>
           </a:p>
@@ -2474,7 +2475,7 @@
           <a:lstStyle/>
           <a:p>
             <a:r>
-              <a:rPr lang="es-ES" smtClean="0"/>
+              <a:rPr lang="es-ES"/>
               <a:t>Haga clic para modificar el estilo de título del patrón</a:t>
             </a:r>
             <a:endParaRPr lang="es-AR"/>
@@ -2508,35 +2509,35 @@
           <a:p>
             <a:pPr lvl="0"/>
             <a:r>
-              <a:rPr lang="es-ES" smtClean="0"/>
+              <a:rPr lang="es-ES"/>
               <a:t>Editar el estilo de texto del patrón</a:t>
             </a:r>
           </a:p>
           <a:p>
             <a:pPr lvl="1"/>
             <a:r>
-              <a:rPr lang="es-ES" smtClean="0"/>
+              <a:rPr lang="es-ES"/>
               <a:t>Segundo nivel</a:t>
             </a:r>
           </a:p>
           <a:p>
             <a:pPr lvl="2"/>
             <a:r>
-              <a:rPr lang="es-ES" smtClean="0"/>
+              <a:rPr lang="es-ES"/>
               <a:t>Tercer nivel</a:t>
             </a:r>
           </a:p>
           <a:p>
             <a:pPr lvl="3"/>
             <a:r>
-              <a:rPr lang="es-ES" smtClean="0"/>
+              <a:rPr lang="es-ES"/>
               <a:t>Cuarto nivel</a:t>
             </a:r>
           </a:p>
           <a:p>
             <a:pPr lvl="4"/>
             <a:r>
-              <a:rPr lang="es-ES" smtClean="0"/>
+              <a:rPr lang="es-ES"/>
               <a:t>Quinto nivel</a:t>
             </a:r>
             <a:endParaRPr lang="es-AR"/>
@@ -2578,7 +2579,7 @@
           <a:p>
             <a:fld id="{122C414C-D702-4E3C-BC2D-24602C7F376F}" type="datetimeFigureOut">
               <a:rPr lang="es-AR" smtClean="0"/>
-              <a:t>13/8/2023</a:t>
+              <a:t>6/7/2026</a:t>
             </a:fld>
             <a:endParaRPr lang="es-AR"/>
           </a:p>
@@ -3006,10 +3007,9 @@
           <a:lstStyle/>
           <a:p>
             <a:r>
-              <a:rPr lang="es-AR" sz="4000" b="1" dirty="0" smtClean="0"/>
+              <a:rPr lang="es-AR" sz="4000" b="1" dirty="0"/>
               <a:t>Introducción a Matlab</a:t>
             </a:r>
-            <a:endParaRPr lang="es-AR" sz="4000" b="1" dirty="0"/>
           </a:p>
         </p:txBody>
       </p:sp>
@@ -3036,209 +3036,209 @@
           <a:lstStyle/>
           <a:p>
             <a:r>
-              <a:rPr lang="es-AR" sz="2200" dirty="0" smtClean="0"/>
+              <a:rPr lang="es-AR" sz="2200" dirty="0"/>
               <a:t>Primero pueden usar el </a:t>
             </a:r>
             <a:r>
-              <a:rPr lang="es-AR" sz="2200" dirty="0" err="1" smtClean="0"/>
+              <a:rPr lang="es-AR" sz="2200" dirty="0" err="1"/>
               <a:t>prompt</a:t>
             </a:r>
             <a:r>
-              <a:rPr lang="es-AR" sz="2200" dirty="0" smtClean="0"/>
+              <a:rPr lang="es-AR" sz="2200" dirty="0"/>
               <a:t> como una calculadora:</a:t>
             </a:r>
           </a:p>
           <a:p>
             <a:r>
-              <a:rPr lang="es-AR" sz="2200" dirty="0" smtClean="0"/>
+              <a:rPr lang="es-AR" sz="2200" dirty="0"/>
               <a:t>7+2 </a:t>
             </a:r>
             <a:r>
-              <a:rPr lang="es-AR" sz="2200" dirty="0" err="1" smtClean="0"/>
+              <a:rPr lang="es-AR" sz="2200" dirty="0" err="1"/>
               <a:t>ans</a:t>
             </a:r>
             <a:r>
-              <a:rPr lang="es-AR" sz="2200" dirty="0" smtClean="0"/>
+              <a:rPr lang="es-AR" sz="2200" dirty="0"/>
               <a:t> = 9 la respuesta se almacena en una variable llamada “</a:t>
             </a:r>
             <a:r>
-              <a:rPr lang="es-AR" sz="2200" dirty="0" err="1" smtClean="0"/>
+              <a:rPr lang="es-AR" sz="2200" dirty="0" err="1"/>
               <a:t>ans</a:t>
             </a:r>
             <a:r>
-              <a:rPr lang="es-AR" sz="2200" dirty="0" smtClean="0"/>
+              <a:rPr lang="es-AR" sz="2200" dirty="0"/>
               <a:t>”, que puede ser usada por ejemplo:</a:t>
             </a:r>
           </a:p>
           <a:p>
             <a:r>
-              <a:rPr lang="es-AR" sz="2200" dirty="0" err="1" smtClean="0"/>
+              <a:rPr lang="es-AR" sz="2200" dirty="0" err="1"/>
               <a:t>ans</a:t>
             </a:r>
             <a:r>
-              <a:rPr lang="es-AR" sz="2200" dirty="0" smtClean="0"/>
+              <a:rPr lang="es-AR" sz="2200" dirty="0"/>
               <a:t>*</a:t>
             </a:r>
             <a:r>
-              <a:rPr lang="es-AR" sz="2200" dirty="0" err="1" smtClean="0"/>
+              <a:rPr lang="es-AR" sz="2200" dirty="0" err="1"/>
               <a:t>ans</a:t>
             </a:r>
             <a:r>
-              <a:rPr lang="es-AR" sz="2200" dirty="0" smtClean="0"/>
+              <a:rPr lang="es-AR" sz="2200" dirty="0"/>
               <a:t> </a:t>
             </a:r>
             <a:r>
-              <a:rPr lang="es-AR" sz="2200" dirty="0" err="1" smtClean="0"/>
+              <a:rPr lang="es-AR" sz="2200" dirty="0" err="1"/>
               <a:t>ans</a:t>
             </a:r>
             <a:r>
-              <a:rPr lang="es-AR" sz="2200" dirty="0" smtClean="0"/>
+              <a:rPr lang="es-AR" sz="2200" dirty="0"/>
               <a:t> = 81</a:t>
             </a:r>
           </a:p>
           <a:p>
             <a:r>
-              <a:rPr lang="es-AR" sz="2200" dirty="0" smtClean="0"/>
+              <a:rPr lang="es-AR" sz="2200" dirty="0"/>
               <a:t>Otro ejemplo: 1 + 3*2 - (1/2)*4</a:t>
             </a:r>
           </a:p>
           <a:p>
             <a:r>
-              <a:rPr lang="es-AR" sz="2200" dirty="0" smtClean="0"/>
+              <a:rPr lang="es-AR" sz="2200" dirty="0"/>
               <a:t>Se puede crear una función para su uso posterior: </a:t>
             </a:r>
           </a:p>
           <a:p>
             <a:r>
-              <a:rPr lang="es-AR" sz="2200" dirty="0" err="1" smtClean="0"/>
+              <a:rPr lang="es-AR" sz="2200" dirty="0" err="1"/>
               <a:t>sqr</a:t>
             </a:r>
             <a:r>
-              <a:rPr lang="es-AR" sz="2200" dirty="0" smtClean="0"/>
+              <a:rPr lang="es-AR" sz="2200" dirty="0"/>
               <a:t> = @(x) x.^2;</a:t>
             </a:r>
           </a:p>
           <a:p>
             <a:r>
-              <a:rPr lang="es-AR" sz="2200" dirty="0" smtClean="0"/>
+              <a:rPr lang="es-AR" sz="2200" dirty="0"/>
               <a:t>z=@(</a:t>
             </a:r>
             <a:r>
-              <a:rPr lang="es-AR" sz="2200" dirty="0" err="1" smtClean="0"/>
+              <a:rPr lang="es-AR" sz="2200" dirty="0" err="1"/>
               <a:t>x,y</a:t>
             </a:r>
             <a:r>
-              <a:rPr lang="es-AR" sz="2200" dirty="0" smtClean="0"/>
+              <a:rPr lang="es-AR" sz="2200" dirty="0"/>
               <a:t>) sin(x)+</a:t>
             </a:r>
             <a:r>
-              <a:rPr lang="es-AR" sz="2200" dirty="0" err="1" smtClean="0"/>
+              <a:rPr lang="es-AR" sz="2200" dirty="0" err="1"/>
               <a:t>cos</a:t>
             </a:r>
             <a:r>
-              <a:rPr lang="es-AR" sz="2200" dirty="0" smtClean="0"/>
+              <a:rPr lang="es-AR" sz="2200" dirty="0"/>
               <a:t>(y);</a:t>
             </a:r>
           </a:p>
           <a:p>
             <a:r>
-              <a:rPr lang="es-AR" sz="2200" dirty="0" smtClean="0"/>
+              <a:rPr lang="es-AR" sz="2200" dirty="0"/>
               <a:t>Para ejecutar las funciones escriba, por ejemplo</a:t>
             </a:r>
           </a:p>
           <a:p>
             <a:r>
-              <a:rPr lang="es-AR" sz="2200" dirty="0" smtClean="0"/>
+              <a:rPr lang="es-AR" sz="2200" dirty="0"/>
               <a:t>a = </a:t>
             </a:r>
             <a:r>
-              <a:rPr lang="es-AR" sz="2200" dirty="0" err="1" smtClean="0"/>
+              <a:rPr lang="es-AR" sz="2200" dirty="0" err="1"/>
               <a:t>sqr</a:t>
             </a:r>
             <a:r>
-              <a:rPr lang="es-AR" sz="2200" dirty="0" smtClean="0"/>
+              <a:rPr lang="es-AR" sz="2200" dirty="0"/>
               <a:t>(5) a=25</a:t>
             </a:r>
           </a:p>
           <a:p>
             <a:r>
-              <a:rPr lang="es-AR" sz="2200" dirty="0" smtClean="0"/>
+              <a:rPr lang="es-AR" sz="2200" dirty="0"/>
               <a:t>z(0.2,0.3) </a:t>
             </a:r>
             <a:r>
-              <a:rPr lang="es-AR" sz="2200" dirty="0" err="1" smtClean="0"/>
+              <a:rPr lang="es-AR" sz="2200" dirty="0" err="1"/>
               <a:t>ans</a:t>
             </a:r>
             <a:r>
-              <a:rPr lang="es-AR" sz="2200" dirty="0" smtClean="0"/>
+              <a:rPr lang="es-AR" sz="2200" dirty="0"/>
               <a:t>=1.154</a:t>
             </a:r>
           </a:p>
           <a:p>
             <a:r>
-              <a:rPr lang="es-AR" sz="2200" dirty="0" smtClean="0"/>
+              <a:rPr lang="es-AR" sz="2200" dirty="0"/>
               <a:t>Se pueden generar </a:t>
             </a:r>
             <a:r>
-              <a:rPr lang="es-AR" sz="2200" b="1" dirty="0" smtClean="0"/>
+              <a:rPr lang="es-AR" sz="2200" b="1" dirty="0"/>
               <a:t>vectores</a:t>
             </a:r>
             <a:r>
-              <a:rPr lang="es-AR" sz="2200" dirty="0" smtClean="0"/>
+              <a:rPr lang="es-AR" sz="2200" dirty="0"/>
               <a:t> con igual espaciado de la siguiente forma:</a:t>
             </a:r>
           </a:p>
           <a:p>
             <a:r>
-              <a:rPr lang="es-AR" sz="2000" dirty="0" smtClean="0"/>
+              <a:rPr lang="es-AR" sz="2000" dirty="0"/>
               <a:t>1:5 </a:t>
             </a:r>
           </a:p>
           <a:p>
             <a:r>
-              <a:rPr lang="es-AR" sz="2000" dirty="0" smtClean="0"/>
+              <a:rPr lang="es-AR" sz="2000" dirty="0"/>
               <a:t>0:2:10 </a:t>
             </a:r>
           </a:p>
           <a:p>
             <a:r>
-              <a:rPr lang="es-AR" sz="2000" dirty="0" smtClean="0"/>
+              <a:rPr lang="es-AR" sz="2000" dirty="0"/>
               <a:t>0:.1:2*pi</a:t>
             </a:r>
           </a:p>
           <a:p>
             <a:r>
-              <a:rPr lang="es-AR" sz="2000" dirty="0" smtClean="0"/>
+              <a:rPr lang="es-AR" sz="2000" dirty="0"/>
               <a:t>Otra opción es usar </a:t>
             </a:r>
             <a:r>
-              <a:rPr lang="es-AR" sz="2000" dirty="0" err="1" smtClean="0"/>
+              <a:rPr lang="es-AR" sz="2000" dirty="0" err="1"/>
               <a:t>linspace</a:t>
             </a:r>
             <a:r>
-              <a:rPr lang="es-AR" sz="2000" dirty="0" smtClean="0"/>
+              <a:rPr lang="es-AR" sz="2000" dirty="0"/>
               <a:t>(</a:t>
             </a:r>
             <a:r>
-              <a:rPr lang="es-AR" sz="2000" dirty="0" err="1" smtClean="0"/>
+              <a:rPr lang="es-AR" sz="2000" dirty="0" err="1"/>
               <a:t>start,stop,npoints</a:t>
             </a:r>
             <a:r>
-              <a:rPr lang="es-AR" sz="2000" dirty="0" smtClean="0"/>
+              <a:rPr lang="es-AR" sz="2000" dirty="0"/>
               <a:t> ):</a:t>
             </a:r>
           </a:p>
           <a:p>
             <a:r>
-              <a:rPr lang="es-AR" sz="2000" dirty="0" smtClean="0"/>
+              <a:rPr lang="es-AR" sz="2000" dirty="0"/>
               <a:t>x = </a:t>
             </a:r>
             <a:r>
-              <a:rPr lang="es-AR" sz="2000" dirty="0" err="1" smtClean="0"/>
+              <a:rPr lang="es-AR" sz="2000" dirty="0" err="1"/>
               <a:t>linspace</a:t>
             </a:r>
             <a:r>
-              <a:rPr lang="es-AR" sz="2000" dirty="0" smtClean="0"/>
+              <a:rPr lang="es-AR" sz="2000" dirty="0"/>
               <a:t>(0,1,10)</a:t>
             </a:r>
           </a:p>
@@ -3276,6 +3276,716 @@
       </p:grpSpPr>
       <p:sp>
         <p:nvSpPr>
+          <p:cNvPr id="5" name="CuadroTexto 4">
+            <a:extLst>
+              <a:ext uri="{FF2B5EF4-FFF2-40B4-BE49-F238E27FC236}">
+                <a16:creationId xmlns:a16="http://schemas.microsoft.com/office/drawing/2014/main" id="{79A74460-9E36-3136-74E9-75B1D6DC1DA7}"/>
+              </a:ext>
+            </a:extLst>
+          </p:cNvPr>
+          <p:cNvSpPr txBox="1"/>
+          <p:nvPr/>
+        </p:nvSpPr>
+        <p:spPr>
+          <a:xfrm>
+            <a:off x="194387" y="0"/>
+            <a:ext cx="11318033" cy="6740307"/>
+          </a:xfrm>
+          <a:prstGeom prst="rect">
+            <a:avLst/>
+          </a:prstGeom>
+          <a:noFill/>
+        </p:spPr>
+        <p:txBody>
+          <a:bodyPr wrap="square">
+            <a:spAutoFit/>
+          </a:bodyPr>
+          <a:lstStyle/>
+          <a:p>
+            <a:r>
+              <a:rPr lang="es-AR" sz="1800" b="0" i="0" u="none" strike="noStrike" baseline="0" dirty="0">
+                <a:solidFill>
+                  <a:srgbClr val="228B22"/>
+                </a:solidFill>
+                <a:latin typeface="Courier New" panose="02070309020205020404" pitchFamily="49" charset="0"/>
+              </a:rPr>
+              <a:t>% Vector de valores de x</a:t>
+            </a:r>
+          </a:p>
+          <a:p>
+            <a:r>
+              <a:rPr lang="es-AR" sz="1800" b="0" i="0" u="none" strike="noStrike" baseline="0" dirty="0">
+                <a:solidFill>
+                  <a:srgbClr val="000000"/>
+                </a:solidFill>
+                <a:latin typeface="Courier New" panose="02070309020205020404" pitchFamily="49" charset="0"/>
+              </a:rPr>
+              <a:t>x = </a:t>
+            </a:r>
+            <a:r>
+              <a:rPr lang="es-AR" sz="1800" b="0" i="0" u="none" strike="noStrike" baseline="0" dirty="0" err="1">
+                <a:solidFill>
+                  <a:srgbClr val="000000"/>
+                </a:solidFill>
+                <a:latin typeface="Courier New" panose="02070309020205020404" pitchFamily="49" charset="0"/>
+              </a:rPr>
+              <a:t>logspace</a:t>
+            </a:r>
+            <a:r>
+              <a:rPr lang="es-AR" sz="1800" b="0" i="0" u="none" strike="noStrike" baseline="0" dirty="0">
+                <a:solidFill>
+                  <a:srgbClr val="000000"/>
+                </a:solidFill>
+                <a:latin typeface="Courier New" panose="02070309020205020404" pitchFamily="49" charset="0"/>
+              </a:rPr>
+              <a:t>(-1, 2);</a:t>
+            </a:r>
+          </a:p>
+          <a:p>
+            <a:r>
+              <a:rPr lang="es-AR" sz="1800" b="0" i="0" u="none" strike="noStrike" baseline="0" dirty="0">
+                <a:solidFill>
+                  <a:srgbClr val="000000"/>
+                </a:solidFill>
+                <a:latin typeface="Courier New" panose="02070309020205020404" pitchFamily="49" charset="0"/>
+              </a:rPr>
+              <a:t> </a:t>
+            </a:r>
+          </a:p>
+          <a:p>
+            <a:r>
+              <a:rPr lang="es-AR" sz="1800" b="0" i="0" u="none" strike="noStrike" baseline="0" dirty="0">
+                <a:solidFill>
+                  <a:srgbClr val="228B22"/>
+                </a:solidFill>
+                <a:latin typeface="Courier New" panose="02070309020205020404" pitchFamily="49" charset="0"/>
+              </a:rPr>
+              <a:t>% Cálculo de la función</a:t>
+            </a:r>
+          </a:p>
+          <a:p>
+            <a:r>
+              <a:rPr lang="es-AR" sz="1800" b="0" i="0" u="none" strike="noStrike" baseline="0" dirty="0">
+                <a:solidFill>
+                  <a:srgbClr val="000000"/>
+                </a:solidFill>
+                <a:latin typeface="Courier New" panose="02070309020205020404" pitchFamily="49" charset="0"/>
+              </a:rPr>
+              <a:t>y = </a:t>
+            </a:r>
+            <a:r>
+              <a:rPr lang="es-AR" sz="1800" b="0" i="0" u="none" strike="noStrike" baseline="0" dirty="0" err="1">
+                <a:solidFill>
+                  <a:srgbClr val="000000"/>
+                </a:solidFill>
+                <a:latin typeface="Courier New" panose="02070309020205020404" pitchFamily="49" charset="0"/>
+              </a:rPr>
+              <a:t>exp</a:t>
+            </a:r>
+            <a:r>
+              <a:rPr lang="es-AR" sz="1800" b="0" i="0" u="none" strike="noStrike" baseline="0" dirty="0">
+                <a:solidFill>
+                  <a:srgbClr val="000000"/>
+                </a:solidFill>
+                <a:latin typeface="Courier New" panose="02070309020205020404" pitchFamily="49" charset="0"/>
+              </a:rPr>
+              <a:t>(x);</a:t>
+            </a:r>
+          </a:p>
+          <a:p>
+            <a:r>
+              <a:rPr lang="es-AR" sz="1800" b="0" i="0" u="none" strike="noStrike" baseline="0" dirty="0">
+                <a:solidFill>
+                  <a:srgbClr val="000000"/>
+                </a:solidFill>
+                <a:latin typeface="Courier New" panose="02070309020205020404" pitchFamily="49" charset="0"/>
+              </a:rPr>
+              <a:t> </a:t>
+            </a:r>
+          </a:p>
+          <a:p>
+            <a:r>
+              <a:rPr lang="es-AR" sz="1800" b="0" i="0" u="none" strike="noStrike" baseline="0" dirty="0">
+                <a:solidFill>
+                  <a:srgbClr val="228B22"/>
+                </a:solidFill>
+                <a:latin typeface="Courier New" panose="02070309020205020404" pitchFamily="49" charset="0"/>
+              </a:rPr>
+              <a:t>% Crear la figura</a:t>
+            </a:r>
+          </a:p>
+          <a:p>
+            <a:r>
+              <a:rPr lang="es-AR" sz="1800" b="0" i="0" u="none" strike="noStrike" baseline="0" dirty="0">
+                <a:solidFill>
+                  <a:srgbClr val="000000"/>
+                </a:solidFill>
+                <a:latin typeface="Courier New" panose="02070309020205020404" pitchFamily="49" charset="0"/>
+              </a:rPr>
+              <a:t>figure;</a:t>
+            </a:r>
+          </a:p>
+          <a:p>
+            <a:r>
+              <a:rPr lang="es-AR" sz="1800" b="0" i="0" u="none" strike="noStrike" baseline="0" dirty="0">
+                <a:solidFill>
+                  <a:srgbClr val="000000"/>
+                </a:solidFill>
+                <a:latin typeface="Courier New" panose="02070309020205020404" pitchFamily="49" charset="0"/>
+              </a:rPr>
+              <a:t> </a:t>
+            </a:r>
+          </a:p>
+          <a:p>
+            <a:r>
+              <a:rPr lang="es-AR" sz="1800" b="0" i="0" u="none" strike="noStrike" baseline="0" dirty="0">
+                <a:solidFill>
+                  <a:srgbClr val="228B22"/>
+                </a:solidFill>
+                <a:latin typeface="Courier New" panose="02070309020205020404" pitchFamily="49" charset="0"/>
+              </a:rPr>
+              <a:t>% Graficar en escala logarítmica</a:t>
+            </a:r>
+          </a:p>
+          <a:p>
+            <a:r>
+              <a:rPr lang="es-AR" sz="1800" b="0" i="0" u="none" strike="noStrike" baseline="0" dirty="0" err="1">
+                <a:solidFill>
+                  <a:srgbClr val="000000"/>
+                </a:solidFill>
+                <a:latin typeface="Courier New" panose="02070309020205020404" pitchFamily="49" charset="0"/>
+              </a:rPr>
+              <a:t>loglog</a:t>
+            </a:r>
+            <a:r>
+              <a:rPr lang="es-AR" sz="1800" b="0" i="0" u="none" strike="noStrike" baseline="0" dirty="0">
+                <a:solidFill>
+                  <a:srgbClr val="000000"/>
+                </a:solidFill>
+                <a:latin typeface="Courier New" panose="02070309020205020404" pitchFamily="49" charset="0"/>
+              </a:rPr>
+              <a:t>(x, y, </a:t>
+            </a:r>
+            <a:r>
+              <a:rPr lang="es-AR" sz="1800" b="0" i="0" u="none" strike="noStrike" baseline="0" dirty="0">
+                <a:solidFill>
+                  <a:srgbClr val="A020F0"/>
+                </a:solidFill>
+                <a:latin typeface="Courier New" panose="02070309020205020404" pitchFamily="49" charset="0"/>
+              </a:rPr>
+              <a:t>'-s'</a:t>
+            </a:r>
+            <a:r>
+              <a:rPr lang="es-AR" sz="1800" b="0" i="0" u="none" strike="noStrike" baseline="0" dirty="0">
+                <a:solidFill>
+                  <a:srgbClr val="000000"/>
+                </a:solidFill>
+                <a:latin typeface="Courier New" panose="02070309020205020404" pitchFamily="49" charset="0"/>
+              </a:rPr>
+              <a:t>, </a:t>
+            </a:r>
+            <a:r>
+              <a:rPr lang="es-AR" sz="1800" b="0" i="0" u="none" strike="noStrike" baseline="0" dirty="0">
+                <a:solidFill>
+                  <a:srgbClr val="0000FF"/>
+                </a:solidFill>
+                <a:latin typeface="Courier New" panose="02070309020205020404" pitchFamily="49" charset="0"/>
+              </a:rPr>
+              <a:t>...</a:t>
+            </a:r>
+          </a:p>
+          <a:p>
+            <a:r>
+              <a:rPr lang="es-AR" sz="1800" b="0" i="0" u="none" strike="noStrike" baseline="0" dirty="0">
+                <a:solidFill>
+                  <a:srgbClr val="000000"/>
+                </a:solidFill>
+                <a:latin typeface="Courier New" panose="02070309020205020404" pitchFamily="49" charset="0"/>
+              </a:rPr>
+              <a:t>    </a:t>
+            </a:r>
+            <a:r>
+              <a:rPr lang="es-AR" sz="1800" b="0" i="0" u="none" strike="noStrike" baseline="0" dirty="0">
+                <a:solidFill>
+                  <a:srgbClr val="A020F0"/>
+                </a:solidFill>
+                <a:latin typeface="Courier New" panose="02070309020205020404" pitchFamily="49" charset="0"/>
+              </a:rPr>
+              <a:t>'</a:t>
+            </a:r>
+            <a:r>
+              <a:rPr lang="es-AR" sz="1800" b="0" i="0" u="none" strike="noStrike" baseline="0" dirty="0" err="1">
+                <a:solidFill>
+                  <a:srgbClr val="A020F0"/>
+                </a:solidFill>
+                <a:latin typeface="Courier New" panose="02070309020205020404" pitchFamily="49" charset="0"/>
+              </a:rPr>
+              <a:t>LineWidth</a:t>
+            </a:r>
+            <a:r>
+              <a:rPr lang="es-AR" sz="1800" b="0" i="0" u="none" strike="noStrike" baseline="0" dirty="0">
+                <a:solidFill>
+                  <a:srgbClr val="A020F0"/>
+                </a:solidFill>
+                <a:latin typeface="Courier New" panose="02070309020205020404" pitchFamily="49" charset="0"/>
+              </a:rPr>
+              <a:t>'</a:t>
+            </a:r>
+            <a:r>
+              <a:rPr lang="es-AR" sz="1800" b="0" i="0" u="none" strike="noStrike" baseline="0" dirty="0">
+                <a:solidFill>
+                  <a:srgbClr val="000000"/>
+                </a:solidFill>
+                <a:latin typeface="Courier New" panose="02070309020205020404" pitchFamily="49" charset="0"/>
+              </a:rPr>
+              <a:t>, 1.5, </a:t>
+            </a:r>
+            <a:r>
+              <a:rPr lang="es-AR" sz="1800" b="0" i="0" u="none" strike="noStrike" baseline="0" dirty="0">
+                <a:solidFill>
+                  <a:srgbClr val="0000FF"/>
+                </a:solidFill>
+                <a:latin typeface="Courier New" panose="02070309020205020404" pitchFamily="49" charset="0"/>
+              </a:rPr>
+              <a:t>...</a:t>
+            </a:r>
+          </a:p>
+          <a:p>
+            <a:r>
+              <a:rPr lang="es-AR" sz="1800" b="0" i="0" u="none" strike="noStrike" baseline="0" dirty="0">
+                <a:solidFill>
+                  <a:srgbClr val="000000"/>
+                </a:solidFill>
+                <a:latin typeface="Courier New" panose="02070309020205020404" pitchFamily="49" charset="0"/>
+              </a:rPr>
+              <a:t>    </a:t>
+            </a:r>
+            <a:r>
+              <a:rPr lang="es-AR" sz="1800" b="0" i="0" u="none" strike="noStrike" baseline="0" dirty="0">
+                <a:solidFill>
+                  <a:srgbClr val="A020F0"/>
+                </a:solidFill>
+                <a:latin typeface="Courier New" panose="02070309020205020404" pitchFamily="49" charset="0"/>
+              </a:rPr>
+              <a:t>'</a:t>
+            </a:r>
+            <a:r>
+              <a:rPr lang="es-AR" sz="1800" b="0" i="0" u="none" strike="noStrike" baseline="0" dirty="0" err="1">
+                <a:solidFill>
+                  <a:srgbClr val="A020F0"/>
+                </a:solidFill>
+                <a:latin typeface="Courier New" panose="02070309020205020404" pitchFamily="49" charset="0"/>
+              </a:rPr>
+              <a:t>MarkerSize</a:t>
+            </a:r>
+            <a:r>
+              <a:rPr lang="es-AR" sz="1800" b="0" i="0" u="none" strike="noStrike" baseline="0" dirty="0">
+                <a:solidFill>
+                  <a:srgbClr val="A020F0"/>
+                </a:solidFill>
+                <a:latin typeface="Courier New" panose="02070309020205020404" pitchFamily="49" charset="0"/>
+              </a:rPr>
+              <a:t>'</a:t>
+            </a:r>
+            <a:r>
+              <a:rPr lang="es-AR" sz="1800" b="0" i="0" u="none" strike="noStrike" baseline="0" dirty="0">
+                <a:solidFill>
+                  <a:srgbClr val="000000"/>
+                </a:solidFill>
+                <a:latin typeface="Courier New" panose="02070309020205020404" pitchFamily="49" charset="0"/>
+              </a:rPr>
+              <a:t>, 6);</a:t>
+            </a:r>
+          </a:p>
+          <a:p>
+            <a:r>
+              <a:rPr lang="es-AR" sz="1800" b="0" i="0" u="none" strike="noStrike" baseline="0" dirty="0">
+                <a:solidFill>
+                  <a:srgbClr val="000000"/>
+                </a:solidFill>
+                <a:latin typeface="Courier New" panose="02070309020205020404" pitchFamily="49" charset="0"/>
+              </a:rPr>
+              <a:t> </a:t>
+            </a:r>
+          </a:p>
+          <a:p>
+            <a:r>
+              <a:rPr lang="es-AR" sz="1800" b="0" i="0" u="none" strike="noStrike" baseline="0" dirty="0">
+                <a:solidFill>
+                  <a:srgbClr val="228B22"/>
+                </a:solidFill>
+                <a:latin typeface="Courier New" panose="02070309020205020404" pitchFamily="49" charset="0"/>
+              </a:rPr>
+              <a:t>% Título y etiquetas</a:t>
+            </a:r>
+          </a:p>
+          <a:p>
+            <a:r>
+              <a:rPr lang="es-AR" sz="1800" b="0" i="0" u="none" strike="noStrike" baseline="0" dirty="0" err="1">
+                <a:solidFill>
+                  <a:srgbClr val="000000"/>
+                </a:solidFill>
+                <a:latin typeface="Courier New" panose="02070309020205020404" pitchFamily="49" charset="0"/>
+              </a:rPr>
+              <a:t>title</a:t>
+            </a:r>
+            <a:r>
+              <a:rPr lang="es-AR" sz="1800" b="0" i="0" u="none" strike="noStrike" baseline="0" dirty="0">
+                <a:solidFill>
+                  <a:srgbClr val="000000"/>
+                </a:solidFill>
+                <a:latin typeface="Courier New" panose="02070309020205020404" pitchFamily="49" charset="0"/>
+              </a:rPr>
+              <a:t>(</a:t>
+            </a:r>
+            <a:r>
+              <a:rPr lang="es-AR" sz="1800" b="0" i="0" u="none" strike="noStrike" baseline="0" dirty="0">
+                <a:solidFill>
+                  <a:srgbClr val="A020F0"/>
+                </a:solidFill>
+                <a:latin typeface="Courier New" panose="02070309020205020404" pitchFamily="49" charset="0"/>
+              </a:rPr>
+              <a:t>'Gráfica de la función y = </a:t>
+            </a:r>
+            <a:r>
+              <a:rPr lang="es-AR" sz="1800" b="0" i="0" u="none" strike="noStrike" baseline="0" dirty="0" err="1">
+                <a:solidFill>
+                  <a:srgbClr val="A020F0"/>
+                </a:solidFill>
+                <a:latin typeface="Courier New" panose="02070309020205020404" pitchFamily="49" charset="0"/>
+              </a:rPr>
+              <a:t>e^x</a:t>
+            </a:r>
+            <a:r>
+              <a:rPr lang="es-AR" sz="1800" b="0" i="0" u="none" strike="noStrike" baseline="0" dirty="0">
+                <a:solidFill>
+                  <a:srgbClr val="A020F0"/>
+                </a:solidFill>
+                <a:latin typeface="Courier New" panose="02070309020205020404" pitchFamily="49" charset="0"/>
+              </a:rPr>
+              <a:t> en escala logarítmica'</a:t>
+            </a:r>
+            <a:r>
+              <a:rPr lang="es-AR" sz="1800" b="0" i="0" u="none" strike="noStrike" baseline="0" dirty="0">
+                <a:solidFill>
+                  <a:srgbClr val="000000"/>
+                </a:solidFill>
+                <a:latin typeface="Courier New" panose="02070309020205020404" pitchFamily="49" charset="0"/>
+              </a:rPr>
+              <a:t>);</a:t>
+            </a:r>
+          </a:p>
+          <a:p>
+            <a:r>
+              <a:rPr lang="es-AR" sz="1800" b="0" i="0" u="none" strike="noStrike" baseline="0" dirty="0" err="1">
+                <a:solidFill>
+                  <a:srgbClr val="000000"/>
+                </a:solidFill>
+                <a:latin typeface="Courier New" panose="02070309020205020404" pitchFamily="49" charset="0"/>
+              </a:rPr>
+              <a:t>xlabel</a:t>
+            </a:r>
+            <a:r>
+              <a:rPr lang="es-AR" sz="1800" b="0" i="0" u="none" strike="noStrike" baseline="0" dirty="0">
+                <a:solidFill>
+                  <a:srgbClr val="000000"/>
+                </a:solidFill>
+                <a:latin typeface="Courier New" panose="02070309020205020404" pitchFamily="49" charset="0"/>
+              </a:rPr>
+              <a:t>(</a:t>
+            </a:r>
+            <a:r>
+              <a:rPr lang="es-AR" sz="1800" b="0" i="0" u="none" strike="noStrike" baseline="0" dirty="0">
+                <a:solidFill>
+                  <a:srgbClr val="A020F0"/>
+                </a:solidFill>
+                <a:latin typeface="Courier New" panose="02070309020205020404" pitchFamily="49" charset="0"/>
+              </a:rPr>
+              <a:t>‘x'</a:t>
+            </a:r>
+            <a:r>
+              <a:rPr lang="es-AR" sz="1800" b="0" i="0" u="none" strike="noStrike" baseline="0" dirty="0">
+                <a:solidFill>
+                  <a:srgbClr val="000000"/>
+                </a:solidFill>
+                <a:latin typeface="Courier New" panose="02070309020205020404" pitchFamily="49" charset="0"/>
+              </a:rPr>
+              <a:t>);</a:t>
+            </a:r>
+          </a:p>
+          <a:p>
+            <a:r>
+              <a:rPr lang="es-AR" sz="1800" b="0" i="0" u="none" strike="noStrike" baseline="0" dirty="0" err="1">
+                <a:solidFill>
+                  <a:srgbClr val="000000"/>
+                </a:solidFill>
+                <a:latin typeface="Courier New" panose="02070309020205020404" pitchFamily="49" charset="0"/>
+              </a:rPr>
+              <a:t>ylabel</a:t>
+            </a:r>
+            <a:r>
+              <a:rPr lang="es-AR" sz="1800" b="0" i="0" u="none" strike="noStrike" baseline="0" dirty="0">
+                <a:solidFill>
+                  <a:srgbClr val="000000"/>
+                </a:solidFill>
+                <a:latin typeface="Courier New" panose="02070309020205020404" pitchFamily="49" charset="0"/>
+              </a:rPr>
+              <a:t>(</a:t>
+            </a:r>
+            <a:r>
+              <a:rPr lang="es-AR" sz="1800" b="0" i="0" u="none" strike="noStrike" baseline="0" dirty="0">
+                <a:solidFill>
+                  <a:srgbClr val="A020F0"/>
+                </a:solidFill>
+                <a:latin typeface="Courier New" panose="02070309020205020404" pitchFamily="49" charset="0"/>
+              </a:rPr>
+              <a:t>‘f(x)'</a:t>
+            </a:r>
+            <a:r>
+              <a:rPr lang="es-AR" sz="1800" b="0" i="0" u="none" strike="noStrike" baseline="0" dirty="0">
+                <a:solidFill>
+                  <a:srgbClr val="000000"/>
+                </a:solidFill>
+                <a:latin typeface="Courier New" panose="02070309020205020404" pitchFamily="49" charset="0"/>
+              </a:rPr>
+              <a:t>);</a:t>
+            </a:r>
+          </a:p>
+          <a:p>
+            <a:r>
+              <a:rPr lang="es-AR" sz="1800" b="0" i="0" u="none" strike="noStrike" baseline="0" dirty="0">
+                <a:solidFill>
+                  <a:srgbClr val="000000"/>
+                </a:solidFill>
+                <a:latin typeface="Courier New" panose="02070309020205020404" pitchFamily="49" charset="0"/>
+              </a:rPr>
+              <a:t> </a:t>
+            </a:r>
+          </a:p>
+          <a:p>
+            <a:r>
+              <a:rPr lang="es-AR" sz="1800" b="0" i="0" u="none" strike="noStrike" baseline="0" dirty="0">
+                <a:solidFill>
+                  <a:srgbClr val="228B22"/>
+                </a:solidFill>
+                <a:latin typeface="Courier New" panose="02070309020205020404" pitchFamily="49" charset="0"/>
+              </a:rPr>
+              <a:t>% Leyenda</a:t>
+            </a:r>
+          </a:p>
+          <a:p>
+            <a:r>
+              <a:rPr lang="en-US" sz="1800" b="0" i="0" u="none" strike="noStrike" baseline="0" dirty="0">
+                <a:solidFill>
+                  <a:srgbClr val="000000"/>
+                </a:solidFill>
+                <a:latin typeface="Courier New" panose="02070309020205020404" pitchFamily="49" charset="0"/>
+              </a:rPr>
+              <a:t>legend(</a:t>
+            </a:r>
+            <a:r>
+              <a:rPr lang="en-US" sz="1800" b="0" i="0" u="none" strike="noStrike" baseline="0" dirty="0">
+                <a:solidFill>
+                  <a:srgbClr val="A020F0"/>
+                </a:solidFill>
+                <a:latin typeface="Courier New" panose="02070309020205020404" pitchFamily="49" charset="0"/>
+              </a:rPr>
+              <a:t>'y = </a:t>
+            </a:r>
+            <a:r>
+              <a:rPr lang="en-US" sz="1800" b="0" i="0" u="none" strike="noStrike" baseline="0" dirty="0" err="1">
+                <a:solidFill>
+                  <a:srgbClr val="A020F0"/>
+                </a:solidFill>
+                <a:latin typeface="Courier New" panose="02070309020205020404" pitchFamily="49" charset="0"/>
+              </a:rPr>
+              <a:t>e^x</a:t>
+            </a:r>
+            <a:r>
+              <a:rPr lang="en-US" sz="1800" b="0" i="0" u="none" strike="noStrike" baseline="0" dirty="0">
+                <a:solidFill>
+                  <a:srgbClr val="A020F0"/>
+                </a:solidFill>
+                <a:latin typeface="Courier New" panose="02070309020205020404" pitchFamily="49" charset="0"/>
+              </a:rPr>
+              <a:t>'</a:t>
+            </a:r>
+            <a:r>
+              <a:rPr lang="en-US" sz="1800" b="0" i="0" u="none" strike="noStrike" baseline="0" dirty="0">
+                <a:solidFill>
+                  <a:srgbClr val="000000"/>
+                </a:solidFill>
+                <a:latin typeface="Courier New" panose="02070309020205020404" pitchFamily="49" charset="0"/>
+              </a:rPr>
+              <a:t>, </a:t>
+            </a:r>
+            <a:r>
+              <a:rPr lang="en-US" sz="1800" b="0" i="0" u="none" strike="noStrike" baseline="0" dirty="0">
+                <a:solidFill>
+                  <a:srgbClr val="A020F0"/>
+                </a:solidFill>
+                <a:latin typeface="Courier New" panose="02070309020205020404" pitchFamily="49" charset="0"/>
+              </a:rPr>
+              <a:t>'Location'</a:t>
+            </a:r>
+            <a:r>
+              <a:rPr lang="en-US" sz="1800" b="0" i="0" u="none" strike="noStrike" baseline="0" dirty="0">
+                <a:solidFill>
+                  <a:srgbClr val="000000"/>
+                </a:solidFill>
+                <a:latin typeface="Courier New" panose="02070309020205020404" pitchFamily="49" charset="0"/>
+              </a:rPr>
+              <a:t>, </a:t>
+            </a:r>
+            <a:r>
+              <a:rPr lang="en-US" sz="1800" b="0" i="0" u="none" strike="noStrike" baseline="0" dirty="0">
+                <a:solidFill>
+                  <a:srgbClr val="A020F0"/>
+                </a:solidFill>
+                <a:latin typeface="Courier New" panose="02070309020205020404" pitchFamily="49" charset="0"/>
+              </a:rPr>
+              <a:t>'northwest'</a:t>
+            </a:r>
+            <a:r>
+              <a:rPr lang="en-US" sz="1800" b="0" i="0" u="none" strike="noStrike" baseline="0" dirty="0">
+                <a:solidFill>
+                  <a:srgbClr val="000000"/>
+                </a:solidFill>
+                <a:latin typeface="Courier New" panose="02070309020205020404" pitchFamily="49" charset="0"/>
+              </a:rPr>
+              <a:t>);</a:t>
+            </a:r>
+          </a:p>
+          <a:p>
+            <a:r>
+              <a:rPr lang="es-AR" sz="1800" b="0" i="0" u="none" strike="noStrike" baseline="0" dirty="0">
+                <a:solidFill>
+                  <a:srgbClr val="000000"/>
+                </a:solidFill>
+                <a:latin typeface="Courier New" panose="02070309020205020404" pitchFamily="49" charset="0"/>
+              </a:rPr>
+              <a:t> </a:t>
+            </a:r>
+          </a:p>
+          <a:p>
+            <a:r>
+              <a:rPr lang="es-AR" sz="1800" b="0" i="0" u="none" strike="noStrike" baseline="0" dirty="0">
+                <a:solidFill>
+                  <a:srgbClr val="228B22"/>
+                </a:solidFill>
+                <a:latin typeface="Courier New" panose="02070309020205020404" pitchFamily="49" charset="0"/>
+              </a:rPr>
+              <a:t>% Activar la grilla</a:t>
+            </a:r>
+          </a:p>
+          <a:p>
+            <a:r>
+              <a:rPr lang="es-AR" sz="1800" b="0" i="0" u="none" strike="noStrike" baseline="0" dirty="0" err="1">
+                <a:solidFill>
+                  <a:srgbClr val="000000"/>
+                </a:solidFill>
+                <a:latin typeface="Courier New" panose="02070309020205020404" pitchFamily="49" charset="0"/>
+              </a:rPr>
+              <a:t>grid</a:t>
+            </a:r>
+            <a:r>
+              <a:rPr lang="es-AR" sz="1800" b="0" i="0" u="none" strike="noStrike" baseline="0" dirty="0">
+                <a:solidFill>
+                  <a:srgbClr val="000000"/>
+                </a:solidFill>
+                <a:latin typeface="Courier New" panose="02070309020205020404" pitchFamily="49" charset="0"/>
+              </a:rPr>
+              <a:t> </a:t>
+            </a:r>
+            <a:r>
+              <a:rPr lang="es-AR" sz="1800" b="0" i="0" u="none" strike="noStrike" baseline="0" dirty="0" err="1">
+                <a:solidFill>
+                  <a:srgbClr val="A020F0"/>
+                </a:solidFill>
+                <a:latin typeface="Courier New" panose="02070309020205020404" pitchFamily="49" charset="0"/>
+              </a:rPr>
+              <a:t>on</a:t>
+            </a:r>
+            <a:r>
+              <a:rPr lang="es-AR" sz="1800" b="0" i="0" u="none" strike="noStrike" baseline="0" dirty="0">
+                <a:solidFill>
+                  <a:srgbClr val="000000"/>
+                </a:solidFill>
+                <a:latin typeface="Courier New" panose="02070309020205020404" pitchFamily="49" charset="0"/>
+              </a:rPr>
+              <a:t>;</a:t>
+            </a:r>
+          </a:p>
+        </p:txBody>
+      </p:sp>
+      <p:pic>
+        <p:nvPicPr>
+          <p:cNvPr id="13" name="Imagen 12">
+            <a:extLst>
+              <a:ext uri="{FF2B5EF4-FFF2-40B4-BE49-F238E27FC236}">
+                <a16:creationId xmlns:a16="http://schemas.microsoft.com/office/drawing/2014/main" id="{E68352BD-2BDA-8C2A-80E4-B7F1B5A6D464}"/>
+              </a:ext>
+            </a:extLst>
+          </p:cNvPr>
+          <p:cNvPicPr>
+            <a:picLocks noChangeAspect="1"/>
+          </p:cNvPicPr>
+          <p:nvPr/>
+        </p:nvPicPr>
+        <p:blipFill>
+          <a:blip r:embed="rId2">
+            <a:extLst>
+              <a:ext uri="{28A0092B-C50C-407E-A947-70E740481C1C}">
+                <a14:useLocalDpi xmlns:a14="http://schemas.microsoft.com/office/drawing/2010/main" val="0"/>
+              </a:ext>
+            </a:extLst>
+          </a:blip>
+          <a:stretch>
+            <a:fillRect/>
+          </a:stretch>
+        </p:blipFill>
+        <p:spPr>
+          <a:xfrm>
+            <a:off x="6654756" y="0"/>
+            <a:ext cx="5342857" cy="4000000"/>
+          </a:xfrm>
+          <a:prstGeom prst="rect">
+            <a:avLst/>
+          </a:prstGeom>
+        </p:spPr>
+      </p:pic>
+    </p:spTree>
+    <p:extLst>
+      <p:ext uri="{BB962C8B-B14F-4D97-AF65-F5344CB8AC3E}">
+        <p14:creationId xmlns:p14="http://schemas.microsoft.com/office/powerpoint/2010/main" val="3365330130"/>
+      </p:ext>
+    </p:extLst>
+  </p:cSld>
+  <p:clrMapOvr>
+    <a:masterClrMapping/>
+  </p:clrMapOvr>
+</p:sld>
+</file>
+
+<file path=ppt/slides/slide11.xml><?xml version="1.0" encoding="utf-8"?>
+<p:sld xmlns:a="http://schemas.openxmlformats.org/drawingml/2006/main" xmlns:r="http://schemas.openxmlformats.org/officeDocument/2006/relationships" xmlns:p="http://schemas.openxmlformats.org/presentationml/2006/main">
+  <p:cSld>
+    <p:spTree>
+      <p:nvGrpSpPr>
+        <p:cNvPr id="1" name=""/>
+        <p:cNvGrpSpPr/>
+        <p:nvPr/>
+      </p:nvGrpSpPr>
+      <p:grpSpPr>
+        <a:xfrm>
+          <a:off x="0" y="0"/>
+          <a:ext cx="0" cy="0"/>
+          <a:chOff x="0" y="0"/>
+          <a:chExt cx="0" cy="0"/>
+        </a:xfrm>
+      </p:grpSpPr>
+      <p:sp>
+        <p:nvSpPr>
           <p:cNvPr id="4" name="Rectángulo 3"/>
           <p:cNvSpPr/>
           <p:nvPr/>
@@ -3304,7 +4014,7 @@
               </a:spcAft>
             </a:pPr>
             <a:r>
-              <a:rPr lang="es-ES_tradnl" sz="2000" b="1" dirty="0" err="1" smtClean="0">
+              <a:rPr lang="es-ES_tradnl" sz="2000" b="1" dirty="0" err="1">
                 <a:latin typeface="Calibri" panose="020F0502020204030204" pitchFamily="34" charset="0"/>
                 <a:ea typeface="Calibri" panose="020F0502020204030204" pitchFamily="34" charset="0"/>
                 <a:cs typeface="TimesNewRomanPSMT"/>
@@ -3312,7 +4022,7 @@
               <a:t>Subplot</a:t>
             </a:r>
             <a:r>
-              <a:rPr lang="es-ES_tradnl" sz="2000" b="1" dirty="0" smtClean="0">
+              <a:rPr lang="es-ES_tradnl" sz="2000" b="1" dirty="0">
                 <a:latin typeface="Calibri" panose="020F0502020204030204" pitchFamily="34" charset="0"/>
                 <a:ea typeface="Calibri" panose="020F0502020204030204" pitchFamily="34" charset="0"/>
                 <a:cs typeface="TimesNewRomanPSMT"/>
@@ -3320,12 +4030,20 @@
               <a:t>:</a:t>
             </a:r>
             <a:r>
-              <a:rPr lang="es-ES_tradnl" dirty="0" smtClean="0">
+              <a:rPr lang="es-ES_tradnl" dirty="0">
                 <a:latin typeface="Calibri" panose="020F0502020204030204" pitchFamily="34" charset="0"/>
                 <a:ea typeface="Calibri" panose="020F0502020204030204" pitchFamily="34" charset="0"/>
                 <a:cs typeface="TimesNewRomanPSMT"/>
               </a:rPr>
-              <a:t> Una </a:t>
+              <a:t> Una ventana gráfica se puede dividir en </a:t>
+            </a:r>
+            <a:r>
+              <a:rPr lang="es-ES_tradnl" b="1" dirty="0">
+                <a:latin typeface="Calibri" panose="020F0502020204030204" pitchFamily="34" charset="0"/>
+                <a:ea typeface="Calibri" panose="020F0502020204030204" pitchFamily="34" charset="0"/>
+                <a:cs typeface="Times New Roman" panose="02020603050405020304" pitchFamily="18" charset="0"/>
+              </a:rPr>
+              <a:t>m </a:t>
             </a:r>
             <a:r>
               <a:rPr lang="es-ES_tradnl" dirty="0">
@@ -3333,7 +4051,7 @@
                 <a:ea typeface="Calibri" panose="020F0502020204030204" pitchFamily="34" charset="0"/>
                 <a:cs typeface="TimesNewRomanPSMT"/>
               </a:rPr>
-              <a:t>ventana gráfica se puede dividir en </a:t>
+              <a:t>particiones horizontales y </a:t>
             </a:r>
             <a:r>
               <a:rPr lang="es-ES_tradnl" b="1" dirty="0">
@@ -3341,7 +4059,7 @@
                 <a:ea typeface="Calibri" panose="020F0502020204030204" pitchFamily="34" charset="0"/>
                 <a:cs typeface="Times New Roman" panose="02020603050405020304" pitchFamily="18" charset="0"/>
               </a:rPr>
-              <a:t>m </a:t>
+              <a:t>n </a:t>
             </a:r>
             <a:r>
               <a:rPr lang="es-ES_tradnl" dirty="0">
@@ -3349,15 +4067,15 @@
                 <a:ea typeface="Calibri" panose="020F0502020204030204" pitchFamily="34" charset="0"/>
                 <a:cs typeface="TimesNewRomanPSMT"/>
               </a:rPr>
-              <a:t>particiones horizontales y </a:t>
-            </a:r>
-            <a:r>
-              <a:rPr lang="es-ES_tradnl" b="1" dirty="0">
-                <a:latin typeface="Calibri" panose="020F0502020204030204" pitchFamily="34" charset="0"/>
-                <a:ea typeface="Calibri" panose="020F0502020204030204" pitchFamily="34" charset="0"/>
-                <a:cs typeface="Times New Roman" panose="02020603050405020304" pitchFamily="18" charset="0"/>
-              </a:rPr>
-              <a:t>n </a:t>
+              <a:t>verticales, con objeto de representar múltiples gráficos en ella. Cada una de estas </a:t>
+            </a:r>
+            <a:r>
+              <a:rPr lang="es-ES_tradnl" dirty="0" err="1">
+                <a:latin typeface="Calibri" panose="020F0502020204030204" pitchFamily="34" charset="0"/>
+                <a:ea typeface="Calibri" panose="020F0502020204030204" pitchFamily="34" charset="0"/>
+                <a:cs typeface="TimesNewRomanPSMT"/>
+              </a:rPr>
+              <a:t>subventanas</a:t>
             </a:r>
             <a:r>
               <a:rPr lang="es-ES_tradnl" dirty="0">
@@ -3365,34 +4083,10 @@
                 <a:ea typeface="Calibri" panose="020F0502020204030204" pitchFamily="34" charset="0"/>
                 <a:cs typeface="TimesNewRomanPSMT"/>
               </a:rPr>
-              <a:t>verticales, con objeto de representar múltiples gráficos en ella. Cada una de estas </a:t>
-            </a:r>
-            <a:r>
-              <a:rPr lang="es-ES_tradnl" dirty="0" err="1">
-                <a:latin typeface="Calibri" panose="020F0502020204030204" pitchFamily="34" charset="0"/>
-                <a:ea typeface="Calibri" panose="020F0502020204030204" pitchFamily="34" charset="0"/>
-                <a:cs typeface="TimesNewRomanPSMT"/>
-              </a:rPr>
-              <a:t>subventanas</a:t>
-            </a:r>
-            <a:r>
-              <a:rPr lang="es-ES_tradnl" dirty="0">
-                <a:latin typeface="Calibri" panose="020F0502020204030204" pitchFamily="34" charset="0"/>
-                <a:ea typeface="Calibri" panose="020F0502020204030204" pitchFamily="34" charset="0"/>
-                <a:cs typeface="TimesNewRomanPSMT"/>
-              </a:rPr>
-              <a:t> tiene sus propios ejes, aunque otras propiedades son comunes a toda la figura. La forma general de este comando </a:t>
-            </a:r>
-            <a:r>
-              <a:rPr lang="es-ES_tradnl" dirty="0" smtClean="0">
-                <a:latin typeface="Calibri" panose="020F0502020204030204" pitchFamily="34" charset="0"/>
-                <a:ea typeface="Calibri" panose="020F0502020204030204" pitchFamily="34" charset="0"/>
-                <a:cs typeface="TimesNewRomanPSMT"/>
-              </a:rPr>
-              <a:t>es:</a:t>
-            </a:r>
-            <a:r>
-              <a:rPr lang="es-AR" dirty="0" smtClean="0">
+              <a:t> tiene sus propios ejes, aunque otras propiedades son comunes a toda la figura. La forma general de este comando es:</a:t>
+            </a:r>
+            <a:r>
+              <a:rPr lang="es-AR" dirty="0">
                 <a:latin typeface="Calibri" panose="020F0502020204030204" pitchFamily="34" charset="0"/>
                 <a:ea typeface="Calibri" panose="020F0502020204030204" pitchFamily="34" charset="0"/>
                 <a:cs typeface="Times New Roman" panose="02020603050405020304" pitchFamily="18" charset="0"/>
@@ -3400,7 +4094,7 @@
               <a:t> </a:t>
             </a:r>
             <a:r>
-              <a:rPr lang="es-ES_tradnl" b="1" dirty="0" err="1" smtClean="0">
+              <a:rPr lang="es-ES_tradnl" b="1" dirty="0" err="1">
                 <a:highlight>
                   <a:srgbClr val="FFFF00"/>
                 </a:highlight>
@@ -3411,7 +4105,7 @@
               <a:t>subplot</a:t>
             </a:r>
             <a:r>
-              <a:rPr lang="es-ES_tradnl" b="1" dirty="0" smtClean="0">
+              <a:rPr lang="es-ES_tradnl" b="1" dirty="0">
                 <a:highlight>
                   <a:srgbClr val="FFFF00"/>
                 </a:highlight>
@@ -3422,7 +4116,7 @@
               <a:t>(</a:t>
             </a:r>
             <a:r>
-              <a:rPr lang="es-ES_tradnl" b="1" dirty="0" err="1" smtClean="0">
+              <a:rPr lang="es-ES_tradnl" b="1" dirty="0" err="1">
                 <a:highlight>
                   <a:srgbClr val="FFFF00"/>
                 </a:highlight>
@@ -3433,7 +4127,7 @@
               <a:t>m,n,i</a:t>
             </a:r>
             <a:r>
-              <a:rPr lang="es-ES_tradnl" b="1" dirty="0" smtClean="0">
+              <a:rPr lang="es-ES_tradnl" b="1" dirty="0">
                 <a:highlight>
                   <a:srgbClr val="FFFF00"/>
                 </a:highlight>
@@ -3469,11 +4163,7 @@
             </a:r>
             <a:r>
               <a:rPr lang="es-ES_tradnl" dirty="0"/>
-              <a:t>es la subdivisión que se convierte en activa. Las subdivisiones se numeran consecutivamente empezando por las de la primera fila, siguiendo por las de la segunda, </a:t>
-            </a:r>
-            <a:r>
-              <a:rPr lang="es-ES_tradnl" dirty="0" smtClean="0"/>
-              <a:t>etc.</a:t>
+              <a:t>es la subdivisión que se convierte en activa. Las subdivisiones se numeran consecutivamente empezando por las de la primera fila, siguiendo por las de la segunda, etc.</a:t>
             </a:r>
             <a:endParaRPr lang="es-AR" dirty="0">
               <a:latin typeface="Calibri" panose="020F0502020204030204" pitchFamily="34" charset="0"/>
@@ -3753,7 +4443,7 @@
               </a:spcAft>
             </a:pPr>
             <a:r>
-              <a:rPr lang="es-ES_tradnl" dirty="0" smtClean="0">
+              <a:rPr lang="es-ES_tradnl" dirty="0">
                 <a:latin typeface="Calibri" panose="020F0502020204030204" pitchFamily="34" charset="0"/>
                 <a:ea typeface="Calibri" panose="020F0502020204030204" pitchFamily="34" charset="0"/>
                 <a:cs typeface="TimesNewRomanPSMT"/>
@@ -3761,7 +4451,7 @@
               <a:t>Existen otras funciones gráficas bidimensionales orientadas a generar otro tipo de gráficos distintos de los que produce la función </a:t>
             </a:r>
             <a:r>
-              <a:rPr lang="es-ES_tradnl" b="1" i="1" dirty="0" err="1" smtClean="0">
+              <a:rPr lang="es-ES_tradnl" b="1" i="1" dirty="0" err="1">
                 <a:latin typeface="Calibri" panose="020F0502020204030204" pitchFamily="34" charset="0"/>
                 <a:ea typeface="Calibri" panose="020F0502020204030204" pitchFamily="34" charset="0"/>
                 <a:cs typeface="Times New Roman" panose="02020603050405020304" pitchFamily="18" charset="0"/>
@@ -3769,7 +4459,7 @@
               <a:t>plot</a:t>
             </a:r>
             <a:r>
-              <a:rPr lang="es-ES_tradnl" b="1" i="1" dirty="0" smtClean="0">
+              <a:rPr lang="es-ES_tradnl" b="1" i="1" dirty="0">
                 <a:latin typeface="Calibri" panose="020F0502020204030204" pitchFamily="34" charset="0"/>
                 <a:ea typeface="Calibri" panose="020F0502020204030204" pitchFamily="34" charset="0"/>
                 <a:cs typeface="Times New Roman" panose="02020603050405020304" pitchFamily="18" charset="0"/>
@@ -3777,7 +4467,7 @@
               <a:t>() </a:t>
             </a:r>
             <a:r>
-              <a:rPr lang="es-ES_tradnl" dirty="0" smtClean="0">
+              <a:rPr lang="es-ES_tradnl" dirty="0">
                 <a:latin typeface="Calibri" panose="020F0502020204030204" pitchFamily="34" charset="0"/>
                 <a:ea typeface="Calibri" panose="020F0502020204030204" pitchFamily="34" charset="0"/>
                 <a:cs typeface="TimesNewRomanPSMT"/>
@@ -3785,7 +4475,7 @@
               <a:t>y sus análogas. Algunas de estas funciones son las siguientes (para más información sobre cada una de ellas en particular, utilizar </a:t>
             </a:r>
             <a:r>
-              <a:rPr lang="es-ES_tradnl" b="1" i="1" dirty="0" err="1" smtClean="0">
+              <a:rPr lang="es-ES_tradnl" b="1" i="1" dirty="0" err="1">
                 <a:latin typeface="Calibri" panose="020F0502020204030204" pitchFamily="34" charset="0"/>
                 <a:ea typeface="Calibri" panose="020F0502020204030204" pitchFamily="34" charset="0"/>
                 <a:cs typeface="Times New Roman" panose="02020603050405020304" pitchFamily="18" charset="0"/>
@@ -3793,7 +4483,7 @@
               <a:t>help</a:t>
             </a:r>
             <a:r>
-              <a:rPr lang="es-ES_tradnl" b="1" i="1" dirty="0" smtClean="0">
+              <a:rPr lang="es-ES_tradnl" b="1" i="1" dirty="0">
                 <a:latin typeface="Calibri" panose="020F0502020204030204" pitchFamily="34" charset="0"/>
                 <a:ea typeface="Calibri" panose="020F0502020204030204" pitchFamily="34" charset="0"/>
                 <a:cs typeface="Times New Roman" panose="02020603050405020304" pitchFamily="18" charset="0"/>
@@ -3801,7 +4491,7 @@
               <a:t> </a:t>
             </a:r>
             <a:r>
-              <a:rPr lang="es-ES_tradnl" b="1" i="1" dirty="0" err="1" smtClean="0">
+              <a:rPr lang="es-ES_tradnl" b="1" i="1" dirty="0" err="1">
                 <a:latin typeface="Calibri" panose="020F0502020204030204" pitchFamily="34" charset="0"/>
                 <a:ea typeface="Calibri" panose="020F0502020204030204" pitchFamily="34" charset="0"/>
                 <a:cs typeface="Times New Roman" panose="02020603050405020304" pitchFamily="18" charset="0"/>
@@ -3809,7 +4499,7 @@
               <a:t>nombre_función</a:t>
             </a:r>
             <a:r>
-              <a:rPr lang="es-ES_tradnl" dirty="0" smtClean="0">
+              <a:rPr lang="es-ES_tradnl" dirty="0">
                 <a:latin typeface="Calibri" panose="020F0502020204030204" pitchFamily="34" charset="0"/>
                 <a:ea typeface="Calibri" panose="020F0502020204030204" pitchFamily="34" charset="0"/>
                 <a:cs typeface="TimesNewRomanPSMT"/>
@@ -3837,7 +4527,7 @@
 </p:sld>
 </file>
 
-<file path=ppt/slides/slide11.xml><?xml version="1.0" encoding="utf-8"?>
+<file path=ppt/slides/slide12.xml><?xml version="1.0" encoding="utf-8"?>
 <p:sld xmlns:a="http://schemas.openxmlformats.org/drawingml/2006/main" xmlns:r="http://schemas.openxmlformats.org/officeDocument/2006/relationships" xmlns:p="http://schemas.openxmlformats.org/presentationml/2006/main">
   <p:cSld>
     <p:spTree>
@@ -3892,17 +4582,6 @@
               <a:t> </a:t>
             </a:r>
             <a:r>
-              <a:rPr lang="es-ES_tradnl" dirty="0" smtClean="0">
-                <a:highlight>
-                  <a:srgbClr val="FFFF00"/>
-                </a:highlight>
-                <a:latin typeface="Calibri" panose="020F0502020204030204" pitchFamily="34" charset="0"/>
-                <a:ea typeface="Calibri" panose="020F0502020204030204" pitchFamily="34" charset="0"/>
-                <a:cs typeface="TimesNewRomanPSMT"/>
-              </a:rPr>
-              <a:t>bar</a:t>
-            </a:r>
-            <a:r>
               <a:rPr lang="es-ES_tradnl" dirty="0">
                 <a:highlight>
                   <a:srgbClr val="FFFF00"/>
@@ -3911,7 +4590,7 @@
                 <a:ea typeface="Calibri" panose="020F0502020204030204" pitchFamily="34" charset="0"/>
                 <a:cs typeface="TimesNewRomanPSMT"/>
               </a:rPr>
-              <a:t>()</a:t>
+              <a:t>bar()</a:t>
             </a:r>
             <a:r>
               <a:rPr lang="es-ES_tradnl" dirty="0">
@@ -4544,16 +5223,15 @@
           <a:lstStyle/>
           <a:p>
             <a:r>
-              <a:rPr lang="es-AR" dirty="0" smtClean="0"/>
+              <a:rPr lang="es-AR" dirty="0"/>
               <a:t>x=[1 2 3 4];</a:t>
             </a:r>
           </a:p>
           <a:p>
             <a:r>
-              <a:rPr lang="es-AR" dirty="0" smtClean="0"/>
+              <a:rPr lang="es-AR" dirty="0"/>
               <a:t>pie(x)</a:t>
             </a:r>
-            <a:endParaRPr lang="es-AR" dirty="0"/>
           </a:p>
         </p:txBody>
       </p:sp>
@@ -4624,7 +5302,7 @@
 </p:sld>
 </file>
 
-<file path=ppt/slides/slide12.xml><?xml version="1.0" encoding="utf-8"?>
+<file path=ppt/slides/slide13.xml><?xml version="1.0" encoding="utf-8"?>
 <p:sld xmlns:a="http://schemas.openxmlformats.org/drawingml/2006/main" xmlns:r="http://schemas.openxmlformats.org/officeDocument/2006/relationships" xmlns:p="http://schemas.openxmlformats.org/presentationml/2006/main">
   <p:cSld>
     <p:spTree>
@@ -4787,34 +5465,25 @@
               </a:rPr>
               <a:t>fi=[0:pi/20:6*pi]; </a:t>
             </a:r>
-            <a:endParaRPr lang="es-ES_tradnl" sz="2000" dirty="0" smtClean="0">
-              <a:ea typeface="Calibri" panose="020F0502020204030204" pitchFamily="34" charset="0"/>
-            </a:endParaRPr>
-          </a:p>
-          <a:p>
-            <a:r>
-              <a:rPr lang="es-ES_tradnl" sz="2000" dirty="0" smtClean="0">
+          </a:p>
+          <a:p>
+            <a:r>
+              <a:rPr lang="es-ES_tradnl" sz="2000" dirty="0">
                 <a:ea typeface="Calibri" panose="020F0502020204030204" pitchFamily="34" charset="0"/>
               </a:rPr>
               <a:t>plot3(</a:t>
             </a:r>
             <a:r>
-              <a:rPr lang="es-ES_tradnl" sz="2000" dirty="0" err="1" smtClean="0">
+              <a:rPr lang="es-ES_tradnl" sz="2000" dirty="0" err="1">
                 <a:ea typeface="Calibri" panose="020F0502020204030204" pitchFamily="34" charset="0"/>
               </a:rPr>
               <a:t>cos</a:t>
             </a:r>
             <a:r>
-              <a:rPr lang="es-ES_tradnl" sz="2000" dirty="0" smtClean="0">
-                <a:ea typeface="Calibri" panose="020F0502020204030204" pitchFamily="34" charset="0"/>
-              </a:rPr>
-              <a:t>(fi</a:t>
-            </a:r>
-            <a:r>
               <a:rPr lang="es-ES_tradnl" sz="2000" dirty="0">
                 <a:ea typeface="Calibri" panose="020F0502020204030204" pitchFamily="34" charset="0"/>
               </a:rPr>
-              <a:t>),sin(fi),</a:t>
+              <a:t>(fi),sin(fi),</a:t>
             </a:r>
             <a:r>
               <a:rPr lang="es-ES_tradnl" sz="2000" dirty="0" err="1">
@@ -4897,7 +5566,7 @@
               </a:spcAft>
             </a:pPr>
             <a:r>
-              <a:rPr lang="pl-PL" sz="2000" dirty="0" smtClean="0">
+              <a:rPr lang="pl-PL" sz="2000" dirty="0">
                 <a:ea typeface="Calibri" panose="020F0502020204030204" pitchFamily="34" charset="0"/>
                 <a:cs typeface="Times New Roman" panose="02020603050405020304" pitchFamily="18" charset="0"/>
               </a:rPr>
@@ -4914,14 +5583,14 @@
               </a:spcAft>
             </a:pPr>
             <a:r>
-              <a:rPr lang="pl-PL" sz="2000" dirty="0" smtClean="0">
+              <a:rPr lang="pl-PL" sz="2000" dirty="0">
                 <a:ea typeface="Calibri" panose="020F0502020204030204" pitchFamily="34" charset="0"/>
                 <a:cs typeface="Times New Roman" panose="02020603050405020304" pitchFamily="18" charset="0"/>
               </a:rPr>
               <a:t>[U,V]=meshgrid(u,v);</a:t>
             </a:r>
             <a:r>
-              <a:rPr lang="es-AR" sz="2000" dirty="0" smtClean="0">
+              <a:rPr lang="es-AR" sz="2000" dirty="0">
                 <a:ea typeface="Calibri" panose="020F0502020204030204" pitchFamily="34" charset="0"/>
                 <a:cs typeface="Times New Roman" panose="02020603050405020304" pitchFamily="18" charset="0"/>
               </a:rPr>
@@ -4938,7 +5607,7 @@
               </a:spcAft>
             </a:pPr>
             <a:r>
-              <a:rPr lang="pl-PL" sz="2000" dirty="0" smtClean="0">
+              <a:rPr lang="pl-PL" sz="2000" dirty="0">
                 <a:ea typeface="Calibri" panose="020F0502020204030204" pitchFamily="34" charset="0"/>
                 <a:cs typeface="Times New Roman" panose="02020603050405020304" pitchFamily="18" charset="0"/>
               </a:rPr>
@@ -4955,7 +5624,7 @@
               </a:spcAft>
             </a:pPr>
             <a:r>
-              <a:rPr lang="pl-PL" sz="2000" dirty="0" smtClean="0">
+              <a:rPr lang="pl-PL" sz="2000" dirty="0">
                 <a:ea typeface="Calibri" panose="020F0502020204030204" pitchFamily="34" charset="0"/>
                 <a:cs typeface="Times New Roman" panose="02020603050405020304" pitchFamily="18" charset="0"/>
               </a:rPr>
@@ -5191,7 +5860,7 @@
               <a:buNone/>
               <a:tabLst/>
             </a:pPr>
-            <a:endParaRPr kumimoji="0" lang="es-AR" altLang="es-AR" sz="1800" b="0" i="0" u="none" strike="noStrike" cap="none" normalizeH="0" baseline="0" dirty="0" smtClean="0">
+            <a:endParaRPr kumimoji="0" lang="es-AR" altLang="es-AR" sz="1800" b="0" i="0" u="none" strike="noStrike" cap="none" normalizeH="0" baseline="0" dirty="0">
               <a:ln>
                 <a:noFill/>
               </a:ln>
@@ -5234,7 +5903,7 @@
               </a:spcAft>
             </a:pPr>
             <a:r>
-              <a:rPr lang="es-ES_tradnl" sz="2000" b="1" dirty="0" smtClean="0">
+              <a:rPr lang="es-ES_tradnl" sz="2000" b="1" dirty="0">
                 <a:latin typeface="Courier New" panose="02070309020205020404" pitchFamily="49" charset="0"/>
                 <a:ea typeface="Calibri" panose="020F0502020204030204" pitchFamily="34" charset="0"/>
                 <a:cs typeface="Times New Roman" panose="02020603050405020304" pitchFamily="18" charset="0"/>
@@ -5252,20 +5921,12 @@
               </a:spcAft>
             </a:pPr>
             <a:r>
-              <a:rPr lang="es-ES_tradnl" sz="2000" b="1" dirty="0" smtClean="0">
-                <a:latin typeface="Courier New" panose="02070309020205020404" pitchFamily="49" charset="0"/>
-                <a:ea typeface="Calibri" panose="020F0502020204030204" pitchFamily="34" charset="0"/>
-                <a:cs typeface="Times New Roman" panose="02020603050405020304" pitchFamily="18" charset="0"/>
-              </a:rPr>
-              <a:t>surf(z(U,V</a:t>
-            </a:r>
-            <a:r>
               <a:rPr lang="es-ES_tradnl" sz="2000" b="1" dirty="0">
                 <a:latin typeface="Courier New" panose="02070309020205020404" pitchFamily="49" charset="0"/>
                 <a:ea typeface="Calibri" panose="020F0502020204030204" pitchFamily="34" charset="0"/>
                 <a:cs typeface="Times New Roman" panose="02020603050405020304" pitchFamily="18" charset="0"/>
               </a:rPr>
-              <a:t>))</a:t>
+              <a:t>surf(z(U,V))</a:t>
             </a:r>
             <a:endParaRPr lang="es-AR" sz="2000" b="1" dirty="0">
               <a:latin typeface="Calibri" panose="020F0502020204030204" pitchFamily="34" charset="0"/>
@@ -5297,20 +5958,12 @@
           <a:lstStyle/>
           <a:p>
             <a:r>
-              <a:rPr lang="es-ES_tradnl" dirty="0" smtClean="0">
+              <a:rPr lang="es-ES_tradnl" dirty="0">
                 <a:latin typeface="Calibri" panose="020F0502020204030204" pitchFamily="34" charset="0"/>
                 <a:ea typeface="Calibri" panose="020F0502020204030204" pitchFamily="34" charset="0"/>
                 <a:cs typeface="TimesNewRomanPSMT"/>
               </a:rPr>
-              <a:t>Función </a:t>
-            </a:r>
-            <a:r>
-              <a:rPr lang="es-ES_tradnl" dirty="0">
-                <a:latin typeface="Calibri" panose="020F0502020204030204" pitchFamily="34" charset="0"/>
-                <a:ea typeface="Calibri" panose="020F0502020204030204" pitchFamily="34" charset="0"/>
-                <a:cs typeface="TimesNewRomanPSMT"/>
-              </a:rPr>
-              <a:t>de dos variables</a:t>
+              <a:t>Función de dos variables</a:t>
             </a:r>
             <a:endParaRPr lang="es-AR" dirty="0"/>
           </a:p>
@@ -5320,734 +5973,6 @@
     <p:extLst>
       <p:ext uri="{BB962C8B-B14F-4D97-AF65-F5344CB8AC3E}">
         <p14:creationId xmlns:p14="http://schemas.microsoft.com/office/powerpoint/2010/main" val="1663114404"/>
-      </p:ext>
-    </p:extLst>
-  </p:cSld>
-  <p:clrMapOvr>
-    <a:masterClrMapping/>
-  </p:clrMapOvr>
-</p:sld>
-</file>
-
-<file path=ppt/slides/slide13.xml><?xml version="1.0" encoding="utf-8"?>
-<p:sld xmlns:a="http://schemas.openxmlformats.org/drawingml/2006/main" xmlns:r="http://schemas.openxmlformats.org/officeDocument/2006/relationships" xmlns:p="http://schemas.openxmlformats.org/presentationml/2006/main">
-  <p:cSld>
-    <p:spTree>
-      <p:nvGrpSpPr>
-        <p:cNvPr id="1" name=""/>
-        <p:cNvGrpSpPr/>
-        <p:nvPr/>
-      </p:nvGrpSpPr>
-      <p:grpSpPr>
-        <a:xfrm>
-          <a:off x="0" y="0"/>
-          <a:ext cx="0" cy="0"/>
-          <a:chOff x="0" y="0"/>
-          <a:chExt cx="0" cy="0"/>
-        </a:xfrm>
-      </p:grpSpPr>
-      <p:sp>
-        <p:nvSpPr>
-          <p:cNvPr id="4" name="Rectángulo 3"/>
-          <p:cNvSpPr/>
-          <p:nvPr/>
-        </p:nvSpPr>
-        <p:spPr>
-          <a:xfrm>
-            <a:off x="73892" y="385357"/>
-            <a:ext cx="6096000" cy="3139321"/>
-          </a:xfrm>
-          <a:prstGeom prst="rect">
-            <a:avLst/>
-          </a:prstGeom>
-        </p:spPr>
-        <p:txBody>
-          <a:bodyPr>
-            <a:spAutoFit/>
-          </a:bodyPr>
-          <a:lstStyle/>
-          <a:p>
-            <a:r>
-              <a:rPr lang="es-AR" b="1" dirty="0" err="1" smtClean="0"/>
-              <a:t>max</a:t>
-            </a:r>
-            <a:r>
-              <a:rPr lang="es-AR" dirty="0" smtClean="0"/>
-              <a:t> máximum</a:t>
-            </a:r>
-          </a:p>
-          <a:p>
-            <a:r>
-              <a:rPr lang="es-AR" b="1" dirty="0" smtClean="0"/>
-              <a:t>min </a:t>
-            </a:r>
-            <a:r>
-              <a:rPr lang="es-AR" dirty="0" err="1" smtClean="0"/>
-              <a:t>minimum</a:t>
-            </a:r>
-            <a:r>
-              <a:rPr lang="es-AR" dirty="0" smtClean="0"/>
-              <a:t> </a:t>
-            </a:r>
-          </a:p>
-          <a:p>
-            <a:r>
-              <a:rPr lang="es-AR" b="1" dirty="0" err="1" smtClean="0"/>
-              <a:t>find</a:t>
-            </a:r>
-            <a:r>
-              <a:rPr lang="es-AR" dirty="0" smtClean="0"/>
-              <a:t> </a:t>
-            </a:r>
-            <a:r>
-              <a:rPr lang="es-AR" dirty="0" err="1" smtClean="0"/>
-              <a:t>find</a:t>
-            </a:r>
-            <a:r>
-              <a:rPr lang="es-AR" dirty="0" smtClean="0"/>
-              <a:t> </a:t>
-            </a:r>
-            <a:r>
-              <a:rPr lang="es-AR" dirty="0" err="1" smtClean="0"/>
-              <a:t>indices</a:t>
-            </a:r>
-            <a:r>
-              <a:rPr lang="es-AR" dirty="0" smtClean="0"/>
-              <a:t> of </a:t>
-            </a:r>
-            <a:r>
-              <a:rPr lang="es-AR" dirty="0" err="1" smtClean="0"/>
-              <a:t>nonzero</a:t>
-            </a:r>
-            <a:r>
-              <a:rPr lang="es-AR" dirty="0" smtClean="0"/>
-              <a:t> </a:t>
-            </a:r>
-            <a:r>
-              <a:rPr lang="es-AR" dirty="0" err="1" smtClean="0"/>
-              <a:t>elements</a:t>
-            </a:r>
-            <a:r>
-              <a:rPr lang="es-AR" dirty="0" smtClean="0"/>
-              <a:t> </a:t>
-            </a:r>
-          </a:p>
-          <a:p>
-            <a:r>
-              <a:rPr lang="es-AR" b="1" dirty="0" smtClean="0"/>
-              <a:t>mean</a:t>
-            </a:r>
-            <a:r>
-              <a:rPr lang="es-AR" dirty="0" smtClean="0"/>
-              <a:t> </a:t>
-            </a:r>
-            <a:r>
-              <a:rPr lang="es-AR" dirty="0" err="1" smtClean="0"/>
-              <a:t>average</a:t>
-            </a:r>
-            <a:r>
-              <a:rPr lang="es-AR" dirty="0" smtClean="0"/>
-              <a:t> </a:t>
-            </a:r>
-            <a:r>
-              <a:rPr lang="es-AR" dirty="0" err="1" smtClean="0"/>
-              <a:t>or</a:t>
-            </a:r>
-            <a:r>
-              <a:rPr lang="es-AR" dirty="0" smtClean="0"/>
-              <a:t> mean </a:t>
-            </a:r>
-          </a:p>
-          <a:p>
-            <a:r>
-              <a:rPr lang="es-AR" b="1" dirty="0" smtClean="0"/>
-              <a:t>median</a:t>
-            </a:r>
-            <a:r>
-              <a:rPr lang="es-AR" dirty="0" smtClean="0"/>
-              <a:t> </a:t>
-            </a:r>
-            <a:r>
-              <a:rPr lang="es-AR" dirty="0" err="1" smtClean="0"/>
-              <a:t>median</a:t>
-            </a:r>
-            <a:r>
-              <a:rPr lang="es-AR" dirty="0" smtClean="0"/>
-              <a:t> </a:t>
-            </a:r>
-          </a:p>
-          <a:p>
-            <a:r>
-              <a:rPr lang="es-AR" b="1" dirty="0" err="1" smtClean="0"/>
-              <a:t>std</a:t>
-            </a:r>
-            <a:r>
-              <a:rPr lang="es-AR" dirty="0" smtClean="0"/>
-              <a:t> standard </a:t>
-            </a:r>
-            <a:r>
-              <a:rPr lang="es-AR" dirty="0" err="1" smtClean="0"/>
-              <a:t>deviation</a:t>
-            </a:r>
-            <a:r>
-              <a:rPr lang="es-AR" dirty="0" smtClean="0"/>
-              <a:t> </a:t>
-            </a:r>
-          </a:p>
-          <a:p>
-            <a:r>
-              <a:rPr lang="es-AR" b="1" dirty="0" err="1" smtClean="0"/>
-              <a:t>sort</a:t>
-            </a:r>
-            <a:r>
-              <a:rPr lang="es-AR" dirty="0" smtClean="0"/>
-              <a:t> </a:t>
-            </a:r>
-            <a:r>
-              <a:rPr lang="es-AR" dirty="0" err="1" smtClean="0"/>
-              <a:t>sort</a:t>
-            </a:r>
-            <a:r>
-              <a:rPr lang="es-AR" dirty="0" smtClean="0"/>
-              <a:t> in </a:t>
-            </a:r>
-            <a:r>
-              <a:rPr lang="es-AR" dirty="0" err="1" smtClean="0"/>
-              <a:t>ascending</a:t>
-            </a:r>
-            <a:r>
-              <a:rPr lang="es-AR" dirty="0" smtClean="0"/>
-              <a:t> </a:t>
-            </a:r>
-            <a:r>
-              <a:rPr lang="es-AR" dirty="0" err="1" smtClean="0"/>
-              <a:t>order</a:t>
-            </a:r>
-            <a:r>
-              <a:rPr lang="es-AR" dirty="0" smtClean="0"/>
-              <a:t> </a:t>
-            </a:r>
-          </a:p>
-          <a:p>
-            <a:r>
-              <a:rPr lang="es-AR" b="1" dirty="0" err="1" smtClean="0"/>
-              <a:t>sortrows</a:t>
-            </a:r>
-            <a:r>
-              <a:rPr lang="es-AR" dirty="0" smtClean="0"/>
-              <a:t> </a:t>
-            </a:r>
-            <a:r>
-              <a:rPr lang="es-AR" dirty="0" err="1" smtClean="0"/>
-              <a:t>sort</a:t>
-            </a:r>
-            <a:r>
-              <a:rPr lang="es-AR" dirty="0" smtClean="0"/>
-              <a:t> </a:t>
-            </a:r>
-            <a:r>
-              <a:rPr lang="es-AR" dirty="0" err="1" smtClean="0"/>
-              <a:t>rows</a:t>
-            </a:r>
-            <a:r>
-              <a:rPr lang="es-AR" dirty="0" smtClean="0"/>
-              <a:t> in </a:t>
-            </a:r>
-            <a:r>
-              <a:rPr lang="es-AR" dirty="0" err="1" smtClean="0"/>
-              <a:t>ascending</a:t>
-            </a:r>
-            <a:r>
-              <a:rPr lang="es-AR" dirty="0" smtClean="0"/>
-              <a:t> </a:t>
-            </a:r>
-            <a:r>
-              <a:rPr lang="es-AR" dirty="0" err="1" smtClean="0"/>
-              <a:t>order</a:t>
-            </a:r>
-            <a:r>
-              <a:rPr lang="es-AR" dirty="0" smtClean="0"/>
-              <a:t> </a:t>
-            </a:r>
-          </a:p>
-          <a:p>
-            <a:r>
-              <a:rPr lang="es-AR" b="1" dirty="0" smtClean="0"/>
-              <a:t>sum</a:t>
-            </a:r>
-            <a:r>
-              <a:rPr lang="es-AR" dirty="0" smtClean="0"/>
-              <a:t> </a:t>
-            </a:r>
-            <a:r>
-              <a:rPr lang="es-AR" dirty="0" err="1" smtClean="0"/>
-              <a:t>sum</a:t>
-            </a:r>
-            <a:r>
-              <a:rPr lang="es-AR" dirty="0" smtClean="0"/>
-              <a:t> of </a:t>
-            </a:r>
-            <a:r>
-              <a:rPr lang="es-AR" dirty="0" err="1" smtClean="0"/>
-              <a:t>elements</a:t>
-            </a:r>
-            <a:r>
-              <a:rPr lang="es-AR" dirty="0" smtClean="0"/>
-              <a:t> </a:t>
-            </a:r>
-          </a:p>
-          <a:p>
-            <a:r>
-              <a:rPr lang="es-AR" b="1" dirty="0" err="1" smtClean="0"/>
-              <a:t>prod</a:t>
-            </a:r>
-            <a:r>
-              <a:rPr lang="es-AR" dirty="0" smtClean="0"/>
-              <a:t> </a:t>
-            </a:r>
-            <a:r>
-              <a:rPr lang="es-AR" dirty="0" err="1" smtClean="0"/>
-              <a:t>product</a:t>
-            </a:r>
-            <a:r>
-              <a:rPr lang="es-AR" dirty="0" smtClean="0"/>
-              <a:t> of </a:t>
-            </a:r>
-            <a:r>
-              <a:rPr lang="es-AR" dirty="0" err="1" smtClean="0"/>
-              <a:t>elements</a:t>
-            </a:r>
-            <a:r>
-              <a:rPr lang="es-AR" dirty="0" smtClean="0"/>
-              <a:t> </a:t>
-            </a:r>
-          </a:p>
-          <a:p>
-            <a:r>
-              <a:rPr lang="es-AR" b="1" dirty="0" err="1" smtClean="0"/>
-              <a:t>diff</a:t>
-            </a:r>
-            <a:r>
-              <a:rPr lang="es-AR" dirty="0" smtClean="0"/>
-              <a:t> </a:t>
-            </a:r>
-            <a:r>
-              <a:rPr lang="es-AR" dirty="0" err="1" smtClean="0"/>
-              <a:t>difference</a:t>
-            </a:r>
-            <a:r>
-              <a:rPr lang="es-AR" dirty="0" smtClean="0"/>
-              <a:t> </a:t>
-            </a:r>
-            <a:r>
-              <a:rPr lang="es-AR" dirty="0" err="1" smtClean="0"/>
-              <a:t>between</a:t>
-            </a:r>
-            <a:r>
-              <a:rPr lang="es-AR" dirty="0" smtClean="0"/>
-              <a:t> </a:t>
-            </a:r>
-            <a:r>
-              <a:rPr lang="es-AR" dirty="0" err="1" smtClean="0"/>
-              <a:t>elements</a:t>
-            </a:r>
-            <a:endParaRPr lang="es-AR" dirty="0"/>
-          </a:p>
-        </p:txBody>
-      </p:sp>
-      <p:sp>
-        <p:nvSpPr>
-          <p:cNvPr id="5" name="CuadroTexto 4"/>
-          <p:cNvSpPr txBox="1"/>
-          <p:nvPr/>
-        </p:nvSpPr>
-        <p:spPr>
-          <a:xfrm>
-            <a:off x="73892" y="0"/>
-            <a:ext cx="6770254" cy="461665"/>
-          </a:xfrm>
-          <a:prstGeom prst="rect">
-            <a:avLst/>
-          </a:prstGeom>
-          <a:noFill/>
-        </p:spPr>
-        <p:txBody>
-          <a:bodyPr wrap="square" rtlCol="0">
-            <a:spAutoFit/>
-          </a:bodyPr>
-          <a:lstStyle/>
-          <a:p>
-            <a:r>
-              <a:rPr lang="es-AR" sz="2400" b="1" dirty="0" smtClean="0"/>
-              <a:t>Algunas funciones para análisis de datos</a:t>
-            </a:r>
-            <a:endParaRPr lang="es-AR" sz="2400" b="1" dirty="0"/>
-          </a:p>
-        </p:txBody>
-      </p:sp>
-      <p:sp>
-        <p:nvSpPr>
-          <p:cNvPr id="6" name="Rectángulo 5"/>
-          <p:cNvSpPr/>
-          <p:nvPr/>
-        </p:nvSpPr>
-        <p:spPr>
-          <a:xfrm>
-            <a:off x="5333279" y="527691"/>
-            <a:ext cx="6794066" cy="2585323"/>
-          </a:xfrm>
-          <a:prstGeom prst="rect">
-            <a:avLst/>
-          </a:prstGeom>
-        </p:spPr>
-        <p:txBody>
-          <a:bodyPr wrap="square">
-            <a:spAutoFit/>
-          </a:bodyPr>
-          <a:lstStyle/>
-          <a:p>
-            <a:r>
-              <a:rPr lang="es-AR" dirty="0" smtClean="0"/>
-              <a:t>&lt; menor que </a:t>
-            </a:r>
-          </a:p>
-          <a:p>
-            <a:r>
-              <a:rPr lang="es-AR" dirty="0" smtClean="0"/>
-              <a:t>&lt;= menor o igual que </a:t>
-            </a:r>
-          </a:p>
-          <a:p>
-            <a:r>
-              <a:rPr lang="es-AR" dirty="0"/>
-              <a:t>&gt;</a:t>
-            </a:r>
-            <a:r>
-              <a:rPr lang="es-AR" dirty="0" smtClean="0"/>
-              <a:t>mayor que </a:t>
-            </a:r>
-          </a:p>
-          <a:p>
-            <a:r>
-              <a:rPr lang="es-AR" dirty="0" smtClean="0"/>
-              <a:t>&gt;= mayor o igual que </a:t>
-            </a:r>
-          </a:p>
-          <a:p>
-            <a:r>
-              <a:rPr lang="es-AR" dirty="0" smtClean="0"/>
-              <a:t>== igual a</a:t>
-            </a:r>
-          </a:p>
-          <a:p>
-            <a:r>
-              <a:rPr lang="es-AR" dirty="0" smtClean="0"/>
-              <a:t> ~= distinto</a:t>
-            </a:r>
-          </a:p>
-          <a:p>
-            <a:r>
-              <a:rPr lang="es-AR" dirty="0" smtClean="0"/>
-              <a:t>&amp; y </a:t>
-            </a:r>
-          </a:p>
-          <a:p>
-            <a:r>
-              <a:rPr lang="es-AR" dirty="0" smtClean="0"/>
-              <a:t>| o</a:t>
-            </a:r>
-          </a:p>
-          <a:p>
-            <a:r>
-              <a:rPr lang="es-AR" dirty="0" smtClean="0"/>
-              <a:t> ~ no  </a:t>
-            </a:r>
-          </a:p>
-        </p:txBody>
-      </p:sp>
-      <p:sp>
-        <p:nvSpPr>
-          <p:cNvPr id="7" name="Rectángulo 6"/>
-          <p:cNvSpPr/>
-          <p:nvPr/>
-        </p:nvSpPr>
-        <p:spPr>
-          <a:xfrm>
-            <a:off x="6169892" y="108235"/>
-            <a:ext cx="5337551" cy="461665"/>
-          </a:xfrm>
-          <a:prstGeom prst="rect">
-            <a:avLst/>
-          </a:prstGeom>
-        </p:spPr>
-        <p:txBody>
-          <a:bodyPr wrap="none">
-            <a:spAutoFit/>
-          </a:bodyPr>
-          <a:lstStyle/>
-          <a:p>
-            <a:r>
-              <a:rPr lang="es-AR" sz="2400" b="1" dirty="0" smtClean="0"/>
-              <a:t>Algunas operaciones y relaciones lógicas</a:t>
-            </a:r>
-            <a:endParaRPr lang="es-AR" sz="2400" b="1" dirty="0"/>
-          </a:p>
-        </p:txBody>
-      </p:sp>
-      <p:sp>
-        <p:nvSpPr>
-          <p:cNvPr id="8" name="Rectángulo 7"/>
-          <p:cNvSpPr/>
-          <p:nvPr/>
-        </p:nvSpPr>
-        <p:spPr>
-          <a:xfrm>
-            <a:off x="0" y="3617134"/>
-            <a:ext cx="1753942" cy="369332"/>
-          </a:xfrm>
-          <a:prstGeom prst="rect">
-            <a:avLst/>
-          </a:prstGeom>
-        </p:spPr>
-        <p:txBody>
-          <a:bodyPr wrap="none">
-            <a:spAutoFit/>
-          </a:bodyPr>
-          <a:lstStyle/>
-          <a:p>
-            <a:r>
-              <a:rPr lang="es-AR" b="1" dirty="0" smtClean="0"/>
-              <a:t>SENTENCIA FOR </a:t>
-            </a:r>
-            <a:endParaRPr lang="es-AR" b="1" dirty="0"/>
-          </a:p>
-        </p:txBody>
-      </p:sp>
-      <p:sp>
-        <p:nvSpPr>
-          <p:cNvPr id="9" name="Rectángulo 8"/>
-          <p:cNvSpPr/>
-          <p:nvPr/>
-        </p:nvSpPr>
-        <p:spPr>
-          <a:xfrm>
-            <a:off x="78511" y="4177253"/>
-            <a:ext cx="3043381" cy="1477328"/>
-          </a:xfrm>
-          <a:prstGeom prst="rect">
-            <a:avLst/>
-          </a:prstGeom>
-        </p:spPr>
-        <p:txBody>
-          <a:bodyPr wrap="square">
-            <a:spAutoFit/>
-          </a:bodyPr>
-          <a:lstStyle/>
-          <a:p>
-            <a:r>
-              <a:rPr lang="es-AR" dirty="0" smtClean="0"/>
-              <a:t> </a:t>
-            </a:r>
-            <a:r>
-              <a:rPr lang="es-AR" dirty="0" err="1" smtClean="0"/>
-              <a:t>for</a:t>
-            </a:r>
-            <a:r>
-              <a:rPr lang="es-AR" dirty="0" smtClean="0"/>
-              <a:t> variable = expresión      </a:t>
-            </a:r>
-          </a:p>
-          <a:p>
-            <a:r>
-              <a:rPr lang="es-AR" dirty="0"/>
-              <a:t>	</a:t>
-            </a:r>
-            <a:r>
-              <a:rPr lang="es-AR" dirty="0" smtClean="0"/>
-              <a:t> &lt;orden&gt;      </a:t>
-            </a:r>
-          </a:p>
-          <a:p>
-            <a:r>
-              <a:rPr lang="es-AR" dirty="0"/>
-              <a:t>	</a:t>
-            </a:r>
-            <a:r>
-              <a:rPr lang="es-AR" dirty="0" smtClean="0"/>
-              <a:t> &lt;orden&gt;            …    </a:t>
-            </a:r>
-          </a:p>
-          <a:p>
-            <a:r>
-              <a:rPr lang="es-AR" dirty="0" smtClean="0"/>
-              <a:t> 	 &lt;orden&gt;      	</a:t>
-            </a:r>
-          </a:p>
-          <a:p>
-            <a:r>
-              <a:rPr lang="es-AR" dirty="0" err="1" smtClean="0"/>
-              <a:t>end</a:t>
-            </a:r>
-            <a:endParaRPr lang="es-AR" dirty="0"/>
-          </a:p>
-        </p:txBody>
-      </p:sp>
-      <p:sp>
-        <p:nvSpPr>
-          <p:cNvPr id="10" name="Rectángulo 9"/>
-          <p:cNvSpPr/>
-          <p:nvPr/>
-        </p:nvSpPr>
-        <p:spPr>
-          <a:xfrm>
-            <a:off x="3121892" y="4177253"/>
-            <a:ext cx="4793672" cy="1477328"/>
-          </a:xfrm>
-          <a:prstGeom prst="rect">
-            <a:avLst/>
-          </a:prstGeom>
-        </p:spPr>
-        <p:txBody>
-          <a:bodyPr wrap="square">
-            <a:spAutoFit/>
-          </a:bodyPr>
-          <a:lstStyle/>
-          <a:p>
-            <a:r>
-              <a:rPr lang="es-AR" dirty="0" err="1" smtClean="0"/>
-              <a:t>for</a:t>
-            </a:r>
-            <a:r>
-              <a:rPr lang="es-AR" dirty="0" smtClean="0"/>
-              <a:t> x = 1:5 </a:t>
-            </a:r>
-          </a:p>
-          <a:p>
-            <a:r>
-              <a:rPr lang="es-AR" dirty="0" err="1" smtClean="0"/>
-              <a:t>disp</a:t>
-            </a:r>
-            <a:r>
-              <a:rPr lang="es-AR" dirty="0" smtClean="0"/>
-              <a:t> ('x toma el valor</a:t>
-            </a:r>
-            <a:r>
-              <a:rPr lang="es-AR" dirty="0" smtClean="0">
-                <a:solidFill>
-                  <a:schemeClr val="accent1"/>
-                </a:solidFill>
-              </a:rPr>
-              <a:t>') % escribe por pantalla el texto que se indica entre las comillas </a:t>
-            </a:r>
-          </a:p>
-          <a:p>
-            <a:r>
-              <a:rPr lang="es-AR" dirty="0" err="1" smtClean="0"/>
-              <a:t>disp</a:t>
-            </a:r>
-            <a:r>
-              <a:rPr lang="es-AR" dirty="0" smtClean="0"/>
-              <a:t> (x) </a:t>
-            </a:r>
-            <a:r>
-              <a:rPr lang="es-AR" dirty="0" smtClean="0">
-                <a:solidFill>
-                  <a:schemeClr val="accent1"/>
-                </a:solidFill>
-              </a:rPr>
-              <a:t>% escribe el valor de la variable x</a:t>
-            </a:r>
-          </a:p>
-          <a:p>
-            <a:r>
-              <a:rPr lang="es-AR" dirty="0" err="1" smtClean="0"/>
-              <a:t>end</a:t>
-            </a:r>
-            <a:endParaRPr lang="es-AR" dirty="0"/>
-          </a:p>
-        </p:txBody>
-      </p:sp>
-      <p:sp>
-        <p:nvSpPr>
-          <p:cNvPr id="11" name="Rectángulo 10"/>
-          <p:cNvSpPr/>
-          <p:nvPr/>
-        </p:nvSpPr>
-        <p:spPr>
-          <a:xfrm>
-            <a:off x="8062279" y="3801800"/>
-            <a:ext cx="3445164" cy="2585323"/>
-          </a:xfrm>
-          <a:prstGeom prst="rect">
-            <a:avLst/>
-          </a:prstGeom>
-        </p:spPr>
-        <p:txBody>
-          <a:bodyPr wrap="square">
-            <a:spAutoFit/>
-          </a:bodyPr>
-          <a:lstStyle/>
-          <a:p>
-            <a:r>
-              <a:rPr lang="es-AR" dirty="0" smtClean="0"/>
-              <a:t>x toma el valor </a:t>
-            </a:r>
-          </a:p>
-          <a:p>
-            <a:r>
-              <a:rPr lang="es-AR" dirty="0" smtClean="0"/>
-              <a:t>1</a:t>
-            </a:r>
-          </a:p>
-          <a:p>
-            <a:r>
-              <a:rPr lang="es-AR" dirty="0" smtClean="0"/>
-              <a:t> x toma el valor      </a:t>
-            </a:r>
-          </a:p>
-          <a:p>
-            <a:r>
-              <a:rPr lang="es-AR" dirty="0" smtClean="0"/>
-              <a:t>2</a:t>
-            </a:r>
-          </a:p>
-          <a:p>
-            <a:r>
-              <a:rPr lang="es-AR" dirty="0" smtClean="0"/>
-              <a:t>x toma el valor      </a:t>
-            </a:r>
-          </a:p>
-          <a:p>
-            <a:r>
-              <a:rPr lang="es-AR" dirty="0" smtClean="0"/>
-              <a:t>3 </a:t>
-            </a:r>
-          </a:p>
-          <a:p>
-            <a:r>
-              <a:rPr lang="es-AR" dirty="0" smtClean="0"/>
-              <a:t>x toma el valor      </a:t>
-            </a:r>
-          </a:p>
-          <a:p>
-            <a:r>
-              <a:rPr lang="es-AR" dirty="0" smtClean="0"/>
-              <a:t>4 </a:t>
-            </a:r>
-          </a:p>
-          <a:p>
-            <a:r>
-              <a:rPr lang="es-AR" dirty="0" smtClean="0"/>
-              <a:t>x toma el valor      5 </a:t>
-            </a:r>
-            <a:endParaRPr lang="es-AR" dirty="0"/>
-          </a:p>
-        </p:txBody>
-      </p:sp>
-    </p:spTree>
-    <p:extLst>
-      <p:ext uri="{BB962C8B-B14F-4D97-AF65-F5344CB8AC3E}">
-        <p14:creationId xmlns:p14="http://schemas.microsoft.com/office/powerpoint/2010/main" val="438687760"/>
       </p:ext>
     </p:extLst>
   </p:cSld>
@@ -6082,36 +6007,302 @@
         </p:nvSpPr>
         <p:spPr>
           <a:xfrm>
-            <a:off x="92364" y="0"/>
-            <a:ext cx="12007272" cy="646331"/>
+            <a:off x="73892" y="385357"/>
+            <a:ext cx="6096000" cy="3139321"/>
           </a:xfrm>
           <a:prstGeom prst="rect">
             <a:avLst/>
           </a:prstGeom>
         </p:spPr>
         <p:txBody>
-          <a:bodyPr wrap="square">
+          <a:bodyPr>
             <a:spAutoFit/>
           </a:bodyPr>
           <a:lstStyle/>
           <a:p>
             <a:r>
-              <a:rPr lang="es-AR" b="1" dirty="0" smtClean="0"/>
-              <a:t>SENTENCIA WHILE </a:t>
-            </a:r>
-          </a:p>
-          <a:p>
-            <a:r>
-              <a:rPr lang="es-AR" dirty="0" smtClean="0"/>
-              <a:t> Un bloque </a:t>
-            </a:r>
-            <a:r>
-              <a:rPr lang="es-AR" dirty="0" err="1" smtClean="0"/>
-              <a:t>while</a:t>
-            </a:r>
-            <a:r>
-              <a:rPr lang="es-AR" dirty="0" smtClean="0"/>
-              <a:t> ejecuta las órdenes mientras todos los elementos de la expresión sean verdaderos.</a:t>
+              <a:rPr lang="es-AR" b="1" dirty="0" err="1"/>
+              <a:t>max</a:t>
+            </a:r>
+            <a:r>
+              <a:rPr lang="es-AR" dirty="0"/>
+              <a:t> máximum</a:t>
+            </a:r>
+          </a:p>
+          <a:p>
+            <a:r>
+              <a:rPr lang="es-AR" b="1" dirty="0"/>
+              <a:t>min </a:t>
+            </a:r>
+            <a:r>
+              <a:rPr lang="es-AR" dirty="0" err="1"/>
+              <a:t>minimum</a:t>
+            </a:r>
+            <a:r>
+              <a:rPr lang="es-AR" dirty="0"/>
+              <a:t> </a:t>
+            </a:r>
+          </a:p>
+          <a:p>
+            <a:r>
+              <a:rPr lang="es-AR" b="1" dirty="0" err="1"/>
+              <a:t>find</a:t>
+            </a:r>
+            <a:r>
+              <a:rPr lang="es-AR" dirty="0"/>
+              <a:t> </a:t>
+            </a:r>
+            <a:r>
+              <a:rPr lang="es-AR" dirty="0" err="1"/>
+              <a:t>find</a:t>
+            </a:r>
+            <a:r>
+              <a:rPr lang="es-AR" dirty="0"/>
+              <a:t> </a:t>
+            </a:r>
+            <a:r>
+              <a:rPr lang="es-AR" dirty="0" err="1"/>
+              <a:t>indices</a:t>
+            </a:r>
+            <a:r>
+              <a:rPr lang="es-AR" dirty="0"/>
+              <a:t> of </a:t>
+            </a:r>
+            <a:r>
+              <a:rPr lang="es-AR" dirty="0" err="1"/>
+              <a:t>nonzero</a:t>
+            </a:r>
+            <a:r>
+              <a:rPr lang="es-AR" dirty="0"/>
+              <a:t> </a:t>
+            </a:r>
+            <a:r>
+              <a:rPr lang="es-AR" dirty="0" err="1"/>
+              <a:t>elements</a:t>
+            </a:r>
+            <a:r>
+              <a:rPr lang="es-AR" dirty="0"/>
+              <a:t> </a:t>
+            </a:r>
+          </a:p>
+          <a:p>
+            <a:r>
+              <a:rPr lang="es-AR" b="1" dirty="0"/>
+              <a:t>mean</a:t>
+            </a:r>
+            <a:r>
+              <a:rPr lang="es-AR" dirty="0"/>
+              <a:t> </a:t>
+            </a:r>
+            <a:r>
+              <a:rPr lang="es-AR" dirty="0" err="1"/>
+              <a:t>average</a:t>
+            </a:r>
+            <a:r>
+              <a:rPr lang="es-AR" dirty="0"/>
+              <a:t> </a:t>
+            </a:r>
+            <a:r>
+              <a:rPr lang="es-AR" dirty="0" err="1"/>
+              <a:t>or</a:t>
+            </a:r>
+            <a:r>
+              <a:rPr lang="es-AR" dirty="0"/>
+              <a:t> mean </a:t>
+            </a:r>
+          </a:p>
+          <a:p>
+            <a:r>
+              <a:rPr lang="es-AR" b="1" dirty="0"/>
+              <a:t>median</a:t>
+            </a:r>
+            <a:r>
+              <a:rPr lang="es-AR" dirty="0"/>
+              <a:t> </a:t>
+            </a:r>
+            <a:r>
+              <a:rPr lang="es-AR" dirty="0" err="1"/>
+              <a:t>median</a:t>
+            </a:r>
+            <a:r>
+              <a:rPr lang="es-AR" dirty="0"/>
+              <a:t> </a:t>
+            </a:r>
+          </a:p>
+          <a:p>
+            <a:r>
+              <a:rPr lang="es-AR" b="1" dirty="0" err="1"/>
+              <a:t>std</a:t>
+            </a:r>
+            <a:r>
+              <a:rPr lang="es-AR" dirty="0"/>
+              <a:t> standard </a:t>
+            </a:r>
+            <a:r>
+              <a:rPr lang="es-AR" dirty="0" err="1"/>
+              <a:t>deviation</a:t>
+            </a:r>
+            <a:r>
+              <a:rPr lang="es-AR" dirty="0"/>
+              <a:t> </a:t>
+            </a:r>
+          </a:p>
+          <a:p>
+            <a:r>
+              <a:rPr lang="es-AR" b="1" dirty="0" err="1"/>
+              <a:t>sort</a:t>
+            </a:r>
+            <a:r>
+              <a:rPr lang="es-AR" dirty="0"/>
+              <a:t> </a:t>
+            </a:r>
+            <a:r>
+              <a:rPr lang="es-AR" dirty="0" err="1"/>
+              <a:t>sort</a:t>
+            </a:r>
+            <a:r>
+              <a:rPr lang="es-AR" dirty="0"/>
+              <a:t> in </a:t>
+            </a:r>
+            <a:r>
+              <a:rPr lang="es-AR" dirty="0" err="1"/>
+              <a:t>ascending</a:t>
+            </a:r>
+            <a:r>
+              <a:rPr lang="es-AR" dirty="0"/>
+              <a:t> </a:t>
+            </a:r>
+            <a:r>
+              <a:rPr lang="es-AR" dirty="0" err="1"/>
+              <a:t>order</a:t>
+            </a:r>
+            <a:r>
+              <a:rPr lang="es-AR" dirty="0"/>
+              <a:t> </a:t>
+            </a:r>
+          </a:p>
+          <a:p>
+            <a:r>
+              <a:rPr lang="es-AR" b="1" dirty="0" err="1"/>
+              <a:t>sortrows</a:t>
+            </a:r>
+            <a:r>
+              <a:rPr lang="es-AR" dirty="0"/>
+              <a:t> </a:t>
+            </a:r>
+            <a:r>
+              <a:rPr lang="es-AR" dirty="0" err="1"/>
+              <a:t>sort</a:t>
+            </a:r>
+            <a:r>
+              <a:rPr lang="es-AR" dirty="0"/>
+              <a:t> </a:t>
+            </a:r>
+            <a:r>
+              <a:rPr lang="es-AR" dirty="0" err="1"/>
+              <a:t>rows</a:t>
+            </a:r>
+            <a:r>
+              <a:rPr lang="es-AR" dirty="0"/>
+              <a:t> in </a:t>
+            </a:r>
+            <a:r>
+              <a:rPr lang="es-AR" dirty="0" err="1"/>
+              <a:t>ascending</a:t>
+            </a:r>
+            <a:r>
+              <a:rPr lang="es-AR" dirty="0"/>
+              <a:t> </a:t>
+            </a:r>
+            <a:r>
+              <a:rPr lang="es-AR" dirty="0" err="1"/>
+              <a:t>order</a:t>
+            </a:r>
+            <a:r>
+              <a:rPr lang="es-AR" dirty="0"/>
+              <a:t> </a:t>
+            </a:r>
+          </a:p>
+          <a:p>
+            <a:r>
+              <a:rPr lang="es-AR" b="1" dirty="0"/>
+              <a:t>sum</a:t>
+            </a:r>
+            <a:r>
+              <a:rPr lang="es-AR" dirty="0"/>
+              <a:t> </a:t>
+            </a:r>
+            <a:r>
+              <a:rPr lang="es-AR" dirty="0" err="1"/>
+              <a:t>sum</a:t>
+            </a:r>
+            <a:r>
+              <a:rPr lang="es-AR" dirty="0"/>
+              <a:t> of </a:t>
+            </a:r>
+            <a:r>
+              <a:rPr lang="es-AR" dirty="0" err="1"/>
+              <a:t>elements</a:t>
+            </a:r>
+            <a:r>
+              <a:rPr lang="es-AR" dirty="0"/>
+              <a:t> </a:t>
+            </a:r>
+          </a:p>
+          <a:p>
+            <a:r>
+              <a:rPr lang="es-AR" b="1" dirty="0" err="1"/>
+              <a:t>prod</a:t>
+            </a:r>
+            <a:r>
+              <a:rPr lang="es-AR" dirty="0"/>
+              <a:t> </a:t>
+            </a:r>
+            <a:r>
+              <a:rPr lang="es-AR" dirty="0" err="1"/>
+              <a:t>product</a:t>
+            </a:r>
+            <a:r>
+              <a:rPr lang="es-AR" dirty="0"/>
+              <a:t> of </a:t>
+            </a:r>
+            <a:r>
+              <a:rPr lang="es-AR" dirty="0" err="1"/>
+              <a:t>elements</a:t>
+            </a:r>
+            <a:r>
+              <a:rPr lang="es-AR" dirty="0"/>
+              <a:t> </a:t>
+            </a:r>
+          </a:p>
+          <a:p>
+            <a:r>
+              <a:rPr lang="es-AR" b="1" dirty="0" err="1"/>
+              <a:t>diff</a:t>
+            </a:r>
+            <a:r>
+              <a:rPr lang="es-AR" dirty="0"/>
+              <a:t> </a:t>
+            </a:r>
+            <a:r>
+              <a:rPr lang="es-AR" dirty="0" err="1"/>
+              <a:t>difference</a:t>
+            </a:r>
+            <a:r>
+              <a:rPr lang="es-AR" dirty="0"/>
+              <a:t> </a:t>
+            </a:r>
+            <a:r>
+              <a:rPr lang="es-AR" dirty="0" err="1"/>
+              <a:t>between</a:t>
+            </a:r>
+            <a:r>
+              <a:rPr lang="es-AR" dirty="0"/>
+              <a:t> </a:t>
+            </a:r>
+            <a:r>
+              <a:rPr lang="es-AR" dirty="0" err="1"/>
+              <a:t>elements</a:t>
             </a:r>
             <a:endParaRPr lang="es-AR" dirty="0"/>
           </a:p>
@@ -6119,14 +6310,43 @@
       </p:sp>
       <p:sp>
         <p:nvSpPr>
-          <p:cNvPr id="5" name="Rectángulo 4"/>
+          <p:cNvPr id="5" name="CuadroTexto 4"/>
+          <p:cNvSpPr txBox="1"/>
+          <p:nvPr/>
+        </p:nvSpPr>
+        <p:spPr>
+          <a:xfrm>
+            <a:off x="73892" y="0"/>
+            <a:ext cx="6770254" cy="461665"/>
+          </a:xfrm>
+          <a:prstGeom prst="rect">
+            <a:avLst/>
+          </a:prstGeom>
+          <a:noFill/>
+        </p:spPr>
+        <p:txBody>
+          <a:bodyPr wrap="square" rtlCol="0">
+            <a:spAutoFit/>
+          </a:bodyPr>
+          <a:lstStyle/>
+          <a:p>
+            <a:r>
+              <a:rPr lang="es-AR" sz="2400" b="1" dirty="0"/>
+              <a:t>Algunas funciones para análisis de datos</a:t>
+            </a:r>
+          </a:p>
+        </p:txBody>
+      </p:sp>
+      <p:sp>
+        <p:nvSpPr>
+          <p:cNvPr id="6" name="Rectángulo 5"/>
           <p:cNvSpPr/>
           <p:nvPr/>
         </p:nvSpPr>
         <p:spPr>
           <a:xfrm>
-            <a:off x="92364" y="664589"/>
-            <a:ext cx="2281381" cy="1754326"/>
+            <a:off x="5333279" y="527691"/>
+            <a:ext cx="6794066" cy="2585323"/>
           </a:xfrm>
           <a:prstGeom prst="rect">
             <a:avLst/>
@@ -6139,211 +6359,187 @@
           <a:lstStyle/>
           <a:p>
             <a:r>
-              <a:rPr lang="es-AR" dirty="0" smtClean="0"/>
-              <a:t> </a:t>
-            </a:r>
-            <a:r>
-              <a:rPr lang="es-AR" dirty="0" err="1" smtClean="0"/>
-              <a:t>while</a:t>
-            </a:r>
-            <a:r>
-              <a:rPr lang="es-AR" dirty="0" smtClean="0"/>
-              <a:t> &lt;expresión&gt;       </a:t>
-            </a:r>
-          </a:p>
-          <a:p>
-            <a:r>
-              <a:rPr lang="es-AR" dirty="0" smtClean="0"/>
-              <a:t>&lt;orden&gt;      </a:t>
-            </a:r>
-          </a:p>
-          <a:p>
-            <a:r>
-              <a:rPr lang="es-AR" dirty="0" smtClean="0"/>
-              <a:t> &lt;orden&gt;            </a:t>
-            </a:r>
-          </a:p>
-          <a:p>
-            <a:r>
-              <a:rPr lang="es-AR" dirty="0" smtClean="0"/>
-              <a:t>…    </a:t>
-            </a:r>
-          </a:p>
-          <a:p>
-            <a:r>
-              <a:rPr lang="es-AR" dirty="0" smtClean="0"/>
-              <a:t>  &lt;orden&gt;      </a:t>
-            </a:r>
-          </a:p>
-          <a:p>
-            <a:r>
-              <a:rPr lang="es-AR" dirty="0" err="1" smtClean="0"/>
-              <a:t>end</a:t>
-            </a:r>
-            <a:endParaRPr lang="es-AR" dirty="0"/>
-          </a:p>
-        </p:txBody>
-      </p:sp>
-      <p:sp>
-        <p:nvSpPr>
-          <p:cNvPr id="6" name="Rectángulo 5"/>
+              <a:rPr lang="es-AR" dirty="0"/>
+              <a:t>&lt; menor que </a:t>
+            </a:r>
+          </a:p>
+          <a:p>
+            <a:r>
+              <a:rPr lang="es-AR" dirty="0"/>
+              <a:t>&lt;= menor o igual que </a:t>
+            </a:r>
+          </a:p>
+          <a:p>
+            <a:r>
+              <a:rPr lang="es-AR" dirty="0"/>
+              <a:t>&gt;mayor que </a:t>
+            </a:r>
+          </a:p>
+          <a:p>
+            <a:r>
+              <a:rPr lang="es-AR" dirty="0"/>
+              <a:t>&gt;= mayor o igual que </a:t>
+            </a:r>
+          </a:p>
+          <a:p>
+            <a:r>
+              <a:rPr lang="es-AR" dirty="0"/>
+              <a:t>== igual a</a:t>
+            </a:r>
+          </a:p>
+          <a:p>
+            <a:r>
+              <a:rPr lang="es-AR" dirty="0"/>
+              <a:t> ~= distinto</a:t>
+            </a:r>
+          </a:p>
+          <a:p>
+            <a:r>
+              <a:rPr lang="es-AR" dirty="0"/>
+              <a:t>&amp; y </a:t>
+            </a:r>
+          </a:p>
+          <a:p>
+            <a:r>
+              <a:rPr lang="es-AR" dirty="0"/>
+              <a:t>| o</a:t>
+            </a:r>
+          </a:p>
+          <a:p>
+            <a:r>
+              <a:rPr lang="es-AR" dirty="0"/>
+              <a:t> ~ no  </a:t>
+            </a:r>
+          </a:p>
+        </p:txBody>
+      </p:sp>
+      <p:sp>
+        <p:nvSpPr>
+          <p:cNvPr id="7" name="Rectángulo 6"/>
           <p:cNvSpPr/>
           <p:nvPr/>
         </p:nvSpPr>
         <p:spPr>
           <a:xfrm>
-            <a:off x="2216727" y="646331"/>
-            <a:ext cx="4137891" cy="1938992"/>
+            <a:off x="6169892" y="108235"/>
+            <a:ext cx="5337551" cy="461665"/>
           </a:xfrm>
           <a:prstGeom prst="rect">
             <a:avLst/>
           </a:prstGeom>
         </p:spPr>
         <p:txBody>
-          <a:bodyPr wrap="square">
+          <a:bodyPr wrap="none">
             <a:spAutoFit/>
           </a:bodyPr>
           <a:lstStyle/>
           <a:p>
             <a:r>
-              <a:rPr lang="es-AR" sz="2000" dirty="0" smtClean="0"/>
-              <a:t>a=3;</a:t>
-            </a:r>
-          </a:p>
-          <a:p>
-            <a:r>
-              <a:rPr lang="es-AR" sz="2000" dirty="0" err="1" smtClean="0"/>
-              <a:t>while</a:t>
-            </a:r>
-            <a:r>
-              <a:rPr lang="es-AR" sz="2000" dirty="0" smtClean="0"/>
-              <a:t> a &lt; 5</a:t>
-            </a:r>
-          </a:p>
-          <a:p>
-            <a:r>
-              <a:rPr lang="es-AR" sz="2000" dirty="0" err="1" smtClean="0"/>
-              <a:t>disp</a:t>
-            </a:r>
-            <a:r>
-              <a:rPr lang="es-AR" sz="2000" dirty="0" smtClean="0"/>
-              <a:t> ('a es menor que 5 ya que vale')</a:t>
-            </a:r>
-          </a:p>
-          <a:p>
-            <a:r>
-              <a:rPr lang="es-AR" sz="2000" dirty="0" err="1" smtClean="0"/>
-              <a:t>disp</a:t>
-            </a:r>
-            <a:r>
-              <a:rPr lang="es-AR" sz="2000" dirty="0" smtClean="0"/>
-              <a:t> (a);</a:t>
-            </a:r>
-          </a:p>
-          <a:p>
-            <a:r>
-              <a:rPr lang="es-AR" sz="2000" dirty="0" smtClean="0"/>
-              <a:t>a = a + 1;</a:t>
-            </a:r>
-          </a:p>
-          <a:p>
-            <a:r>
-              <a:rPr lang="es-AR" sz="2000" dirty="0" err="1" smtClean="0"/>
-              <a:t>end</a:t>
-            </a:r>
-            <a:endParaRPr lang="es-AR" sz="2000" dirty="0"/>
-          </a:p>
-        </p:txBody>
-      </p:sp>
-      <p:sp>
-        <p:nvSpPr>
-          <p:cNvPr id="7" name="Rectángulo 6"/>
+              <a:rPr lang="es-AR" sz="2400" b="1" dirty="0"/>
+              <a:t>Algunas operaciones y relaciones lógicas</a:t>
+            </a:r>
+          </a:p>
+        </p:txBody>
+      </p:sp>
+      <p:sp>
+        <p:nvSpPr>
+          <p:cNvPr id="8" name="Rectángulo 7"/>
           <p:cNvSpPr/>
           <p:nvPr/>
         </p:nvSpPr>
         <p:spPr>
           <a:xfrm>
-            <a:off x="6354618" y="877163"/>
-            <a:ext cx="6096000" cy="1477328"/>
+            <a:off x="0" y="3617134"/>
+            <a:ext cx="1753942" cy="369332"/>
           </a:xfrm>
           <a:prstGeom prst="rect">
             <a:avLst/>
           </a:prstGeom>
         </p:spPr>
         <p:txBody>
-          <a:bodyPr>
+          <a:bodyPr wrap="none">
             <a:spAutoFit/>
           </a:bodyPr>
           <a:lstStyle/>
           <a:p>
             <a:r>
-              <a:rPr lang="es-AR" dirty="0" smtClean="0"/>
-              <a:t>a es menor que 5 ya que vale</a:t>
-            </a:r>
-          </a:p>
-          <a:p>
-            <a:r>
-              <a:rPr lang="es-AR" dirty="0" smtClean="0"/>
-              <a:t>     3</a:t>
-            </a:r>
-          </a:p>
-          <a:p>
-            <a:endParaRPr lang="es-AR" dirty="0" smtClean="0"/>
-          </a:p>
-          <a:p>
-            <a:r>
-              <a:rPr lang="es-AR" dirty="0" smtClean="0"/>
-              <a:t>a es menor que 5 ya que vale</a:t>
-            </a:r>
-          </a:p>
-          <a:p>
-            <a:r>
-              <a:rPr lang="es-AR" dirty="0" smtClean="0"/>
-              <a:t>     4</a:t>
-            </a:r>
-            <a:endParaRPr lang="es-AR" dirty="0"/>
-          </a:p>
-        </p:txBody>
-      </p:sp>
-      <p:sp>
-        <p:nvSpPr>
-          <p:cNvPr id="8" name="Rectángulo 7"/>
+              <a:rPr lang="es-AR" b="1" dirty="0"/>
+              <a:t>SENTENCIA FOR </a:t>
+            </a:r>
+          </a:p>
+        </p:txBody>
+      </p:sp>
+      <p:sp>
+        <p:nvSpPr>
+          <p:cNvPr id="9" name="Rectángulo 8"/>
           <p:cNvSpPr/>
           <p:nvPr/>
         </p:nvSpPr>
         <p:spPr>
           <a:xfrm>
-            <a:off x="0" y="2585323"/>
-            <a:ext cx="1478290" cy="369332"/>
+            <a:off x="78511" y="4177253"/>
+            <a:ext cx="3043381" cy="1477328"/>
           </a:xfrm>
           <a:prstGeom prst="rect">
             <a:avLst/>
           </a:prstGeom>
         </p:spPr>
         <p:txBody>
-          <a:bodyPr wrap="none">
+          <a:bodyPr wrap="square">
             <a:spAutoFit/>
           </a:bodyPr>
           <a:lstStyle/>
           <a:p>
             <a:r>
-              <a:rPr lang="es-AR" b="1" dirty="0" smtClean="0"/>
-              <a:t>SENTENCIA IF</a:t>
-            </a:r>
-            <a:endParaRPr lang="es-AR" b="1" dirty="0"/>
-          </a:p>
-        </p:txBody>
-      </p:sp>
-      <p:sp>
-        <p:nvSpPr>
-          <p:cNvPr id="9" name="Rectángulo 8"/>
+              <a:rPr lang="es-AR" dirty="0"/>
+              <a:t> </a:t>
+            </a:r>
+            <a:r>
+              <a:rPr lang="es-AR" dirty="0" err="1"/>
+              <a:t>for</a:t>
+            </a:r>
+            <a:r>
+              <a:rPr lang="es-AR" dirty="0"/>
+              <a:t> variable = expresión      </a:t>
+            </a:r>
+          </a:p>
+          <a:p>
+            <a:r>
+              <a:rPr lang="es-AR" dirty="0"/>
+              <a:t>	 &lt;orden&gt;      </a:t>
+            </a:r>
+          </a:p>
+          <a:p>
+            <a:r>
+              <a:rPr lang="es-AR" dirty="0"/>
+              <a:t>	 &lt;orden&gt;            …    </a:t>
+            </a:r>
+          </a:p>
+          <a:p>
+            <a:r>
+              <a:rPr lang="es-AR" dirty="0"/>
+              <a:t> 	 &lt;orden&gt;      	</a:t>
+            </a:r>
+          </a:p>
+          <a:p>
+            <a:r>
+              <a:rPr lang="es-AR" dirty="0" err="1"/>
+              <a:t>end</a:t>
+            </a:r>
+            <a:endParaRPr lang="es-AR" dirty="0"/>
+          </a:p>
+        </p:txBody>
+      </p:sp>
+      <p:sp>
+        <p:nvSpPr>
+          <p:cNvPr id="10" name="Rectángulo 9"/>
           <p:cNvSpPr/>
           <p:nvPr/>
         </p:nvSpPr>
         <p:spPr>
           <a:xfrm>
-            <a:off x="0" y="2954655"/>
-            <a:ext cx="4876800" cy="923330"/>
+            <a:off x="3121892" y="4177253"/>
+            <a:ext cx="4793672" cy="1477328"/>
           </a:xfrm>
           <a:prstGeom prst="rect">
             <a:avLst/>
@@ -6356,23 +6552,53 @@
           <a:lstStyle/>
           <a:p>
             <a:r>
-              <a:rPr lang="es-AR" dirty="0" err="1" smtClean="0"/>
-              <a:t>if</a:t>
-            </a:r>
-            <a:r>
-              <a:rPr lang="es-AR" dirty="0" smtClean="0"/>
-              <a:t> &lt;expresión&gt;     </a:t>
-            </a:r>
-          </a:p>
-          <a:p>
-            <a:r>
-              <a:rPr lang="es-AR" dirty="0" smtClean="0"/>
-              <a:t> &lt;órdenes evaluadas si la expresión es verdadera&gt;    </a:t>
-            </a:r>
-          </a:p>
-          <a:p>
-            <a:r>
-              <a:rPr lang="es-AR" dirty="0" err="1" smtClean="0"/>
+              <a:rPr lang="es-AR" dirty="0" err="1"/>
+              <a:t>for</a:t>
+            </a:r>
+            <a:r>
+              <a:rPr lang="es-AR" dirty="0"/>
+              <a:t> x = 1:5 </a:t>
+            </a:r>
+          </a:p>
+          <a:p>
+            <a:r>
+              <a:rPr lang="es-AR" dirty="0" err="1"/>
+              <a:t>disp</a:t>
+            </a:r>
+            <a:r>
+              <a:rPr lang="es-AR" dirty="0"/>
+              <a:t> ('x toma el valor</a:t>
+            </a:r>
+            <a:r>
+              <a:rPr lang="es-AR" dirty="0">
+                <a:solidFill>
+                  <a:schemeClr val="accent1"/>
+                </a:solidFill>
+              </a:rPr>
+              <a:t>') % escribe por pantalla el texto que se indica entre las comillas </a:t>
+            </a:r>
+          </a:p>
+          <a:p>
+            <a:r>
+              <a:rPr lang="es-AR" dirty="0" err="1"/>
+              <a:t>disp</a:t>
+            </a:r>
+            <a:r>
+              <a:rPr lang="es-AR" dirty="0"/>
+              <a:t> (x) </a:t>
+            </a:r>
+            <a:r>
+              <a:rPr lang="es-AR" dirty="0">
+                <a:solidFill>
+                  <a:schemeClr val="accent1"/>
+                </a:solidFill>
+              </a:rPr>
+              <a:t>% escribe el valor de la variable x</a:t>
+            </a:r>
+          </a:p>
+          <a:p>
+            <a:r>
+              <a:rPr lang="es-AR" dirty="0" err="1"/>
               <a:t>end</a:t>
             </a:r>
             <a:endParaRPr lang="es-AR" dirty="0"/>
@@ -6381,168 +6607,84 @@
       </p:sp>
       <p:sp>
         <p:nvSpPr>
-          <p:cNvPr id="10" name="Rectángulo 9"/>
+          <p:cNvPr id="11" name="Rectángulo 10"/>
           <p:cNvSpPr/>
           <p:nvPr/>
         </p:nvSpPr>
         <p:spPr>
           <a:xfrm>
-            <a:off x="5163127" y="2815174"/>
-            <a:ext cx="6096000" cy="1477328"/>
+            <a:off x="8062279" y="3801800"/>
+            <a:ext cx="3445164" cy="2585323"/>
           </a:xfrm>
           <a:prstGeom prst="rect">
             <a:avLst/>
           </a:prstGeom>
         </p:spPr>
         <p:txBody>
-          <a:bodyPr>
+          <a:bodyPr wrap="square">
             <a:spAutoFit/>
           </a:bodyPr>
           <a:lstStyle/>
           <a:p>
             <a:r>
-              <a:rPr lang="es-AR" dirty="0" err="1" smtClean="0"/>
-              <a:t>if</a:t>
-            </a:r>
-            <a:r>
-              <a:rPr lang="es-AR" dirty="0" smtClean="0"/>
-              <a:t> &lt;expresión&gt;     </a:t>
-            </a:r>
-          </a:p>
-          <a:p>
-            <a:r>
-              <a:rPr lang="es-AR" dirty="0" smtClean="0"/>
-              <a:t> &lt;órdenes evaluadas si la expresión es verdadera&gt;     </a:t>
-            </a:r>
-          </a:p>
-          <a:p>
-            <a:r>
-              <a:rPr lang="es-AR" dirty="0" err="1" smtClean="0"/>
-              <a:t>else</a:t>
-            </a:r>
-            <a:r>
-              <a:rPr lang="es-AR" dirty="0" smtClean="0"/>
-              <a:t>      </a:t>
-            </a:r>
-          </a:p>
-          <a:p>
-            <a:r>
-              <a:rPr lang="es-AR" dirty="0" smtClean="0"/>
-              <a:t>&lt;órdenes evaluadas si la expresión es falsa&gt;     </a:t>
-            </a:r>
-          </a:p>
-          <a:p>
-            <a:r>
-              <a:rPr lang="es-AR" dirty="0" err="1" smtClean="0"/>
-              <a:t>end</a:t>
-            </a:r>
-            <a:endParaRPr lang="es-AR" dirty="0"/>
-          </a:p>
-        </p:txBody>
-      </p:sp>
-      <p:sp>
-        <p:nvSpPr>
-          <p:cNvPr id="11" name="Rectángulo 10"/>
-          <p:cNvSpPr/>
-          <p:nvPr/>
-        </p:nvSpPr>
-        <p:spPr>
-          <a:xfrm>
-            <a:off x="-73891" y="4244941"/>
-            <a:ext cx="6096000" cy="2585323"/>
-          </a:xfrm>
-          <a:prstGeom prst="rect">
-            <a:avLst/>
-          </a:prstGeom>
-        </p:spPr>
-        <p:txBody>
-          <a:bodyPr>
-            <a:spAutoFit/>
-          </a:bodyPr>
-          <a:lstStyle/>
-          <a:p>
-            <a:r>
-              <a:rPr lang="es-AR" dirty="0" smtClean="0"/>
-              <a:t> </a:t>
-            </a:r>
-            <a:r>
-              <a:rPr lang="es-AR" dirty="0" err="1" smtClean="0"/>
-              <a:t>if</a:t>
-            </a:r>
-            <a:r>
-              <a:rPr lang="es-AR" dirty="0" smtClean="0"/>
-              <a:t> &lt;expresión1&gt;      </a:t>
-            </a:r>
-          </a:p>
-          <a:p>
-            <a:r>
-              <a:rPr lang="es-AR" dirty="0" smtClean="0"/>
-              <a:t>&lt;órdenes evaluadas si la expresión1 es verdadera&gt;     </a:t>
-            </a:r>
-          </a:p>
-          <a:p>
-            <a:r>
-              <a:rPr lang="es-AR" dirty="0" err="1" smtClean="0"/>
-              <a:t>elseif</a:t>
-            </a:r>
-            <a:r>
-              <a:rPr lang="es-AR" dirty="0" smtClean="0"/>
-              <a:t> &lt;expresión2&gt;      </a:t>
-            </a:r>
-          </a:p>
-          <a:p>
-            <a:r>
-              <a:rPr lang="es-AR" dirty="0" smtClean="0"/>
-              <a:t>&lt;órdenes evaluadas si la expresión2 es verdadera&gt;   </a:t>
-            </a:r>
-          </a:p>
-          <a:p>
-            <a:r>
-              <a:rPr lang="es-AR" dirty="0" smtClean="0"/>
-              <a:t>…….  </a:t>
-            </a:r>
-          </a:p>
-          <a:p>
-            <a:r>
-              <a:rPr lang="es-AR" dirty="0" err="1" smtClean="0"/>
-              <a:t>elseif</a:t>
-            </a:r>
-            <a:r>
-              <a:rPr lang="es-AR" dirty="0" smtClean="0"/>
-              <a:t>         …      </a:t>
-            </a:r>
-          </a:p>
-          <a:p>
-            <a:r>
-              <a:rPr lang="es-AR" dirty="0" smtClean="0"/>
-              <a:t> </a:t>
-            </a:r>
-            <a:r>
-              <a:rPr lang="es-AR" dirty="0" err="1" smtClean="0"/>
-              <a:t>else</a:t>
-            </a:r>
-            <a:r>
-              <a:rPr lang="es-AR" dirty="0" smtClean="0"/>
-              <a:t>     </a:t>
-            </a:r>
-          </a:p>
-          <a:p>
-            <a:r>
-              <a:rPr lang="es-AR" dirty="0" smtClean="0"/>
-              <a:t> &lt;órdenes evaluadas si ninguna otra expresión es verdadera&gt;     </a:t>
-            </a:r>
-            <a:r>
-              <a:rPr lang="es-AR" dirty="0" err="1" smtClean="0"/>
-              <a:t>end</a:t>
-            </a:r>
-            <a:endParaRPr lang="es-AR" dirty="0"/>
+              <a:rPr lang="es-AR" dirty="0"/>
+              <a:t>x toma el valor </a:t>
+            </a:r>
+          </a:p>
+          <a:p>
+            <a:r>
+              <a:rPr lang="es-AR" dirty="0"/>
+              <a:t>1</a:t>
+            </a:r>
+          </a:p>
+          <a:p>
+            <a:r>
+              <a:rPr lang="es-AR" dirty="0"/>
+              <a:t> x toma el valor      </a:t>
+            </a:r>
+          </a:p>
+          <a:p>
+            <a:r>
+              <a:rPr lang="es-AR" dirty="0"/>
+              <a:t>2</a:t>
+            </a:r>
+          </a:p>
+          <a:p>
+            <a:r>
+              <a:rPr lang="es-AR" dirty="0"/>
+              <a:t>x toma el valor      </a:t>
+            </a:r>
+          </a:p>
+          <a:p>
+            <a:r>
+              <a:rPr lang="es-AR" dirty="0"/>
+              <a:t>3 </a:t>
+            </a:r>
+          </a:p>
+          <a:p>
+            <a:r>
+              <a:rPr lang="es-AR" dirty="0"/>
+              <a:t>x toma el valor      </a:t>
+            </a:r>
+          </a:p>
+          <a:p>
+            <a:r>
+              <a:rPr lang="es-AR" dirty="0"/>
+              <a:t>4 </a:t>
+            </a:r>
+          </a:p>
+          <a:p>
+            <a:r>
+              <a:rPr lang="es-AR" dirty="0"/>
+              <a:t>x toma el valor      5 </a:t>
+            </a:r>
           </a:p>
         </p:txBody>
       </p:sp>
     </p:spTree>
     <p:extLst>
       <p:ext uri="{BB962C8B-B14F-4D97-AF65-F5344CB8AC3E}">
-        <p14:creationId xmlns:p14="http://schemas.microsoft.com/office/powerpoint/2010/main" val="2140957394"/>
+        <p14:creationId xmlns:p14="http://schemas.microsoft.com/office/powerpoint/2010/main" val="438687760"/>
       </p:ext>
     </p:extLst>
   </p:cSld>
@@ -6577,6 +6719,498 @@
         </p:nvSpPr>
         <p:spPr>
           <a:xfrm>
+            <a:off x="92364" y="0"/>
+            <a:ext cx="12007272" cy="646331"/>
+          </a:xfrm>
+          <a:prstGeom prst="rect">
+            <a:avLst/>
+          </a:prstGeom>
+        </p:spPr>
+        <p:txBody>
+          <a:bodyPr wrap="square">
+            <a:spAutoFit/>
+          </a:bodyPr>
+          <a:lstStyle/>
+          <a:p>
+            <a:r>
+              <a:rPr lang="es-AR" b="1" dirty="0"/>
+              <a:t>SENTENCIA WHILE </a:t>
+            </a:r>
+          </a:p>
+          <a:p>
+            <a:r>
+              <a:rPr lang="es-AR" dirty="0"/>
+              <a:t> Un bloque </a:t>
+            </a:r>
+            <a:r>
+              <a:rPr lang="es-AR" dirty="0" err="1"/>
+              <a:t>while</a:t>
+            </a:r>
+            <a:r>
+              <a:rPr lang="es-AR" dirty="0"/>
+              <a:t> ejecuta las órdenes mientras todos los elementos de la expresión sean verdaderos.</a:t>
+            </a:r>
+          </a:p>
+        </p:txBody>
+      </p:sp>
+      <p:sp>
+        <p:nvSpPr>
+          <p:cNvPr id="5" name="Rectángulo 4"/>
+          <p:cNvSpPr/>
+          <p:nvPr/>
+        </p:nvSpPr>
+        <p:spPr>
+          <a:xfrm>
+            <a:off x="92364" y="664589"/>
+            <a:ext cx="2281381" cy="1754326"/>
+          </a:xfrm>
+          <a:prstGeom prst="rect">
+            <a:avLst/>
+          </a:prstGeom>
+        </p:spPr>
+        <p:txBody>
+          <a:bodyPr wrap="square">
+            <a:spAutoFit/>
+          </a:bodyPr>
+          <a:lstStyle/>
+          <a:p>
+            <a:r>
+              <a:rPr lang="es-AR" dirty="0"/>
+              <a:t> </a:t>
+            </a:r>
+            <a:r>
+              <a:rPr lang="es-AR" dirty="0" err="1"/>
+              <a:t>while</a:t>
+            </a:r>
+            <a:r>
+              <a:rPr lang="es-AR" dirty="0"/>
+              <a:t> &lt;expresión&gt;       </a:t>
+            </a:r>
+          </a:p>
+          <a:p>
+            <a:r>
+              <a:rPr lang="es-AR" dirty="0"/>
+              <a:t>&lt;orden&gt;      </a:t>
+            </a:r>
+          </a:p>
+          <a:p>
+            <a:r>
+              <a:rPr lang="es-AR" dirty="0"/>
+              <a:t> &lt;orden&gt;            </a:t>
+            </a:r>
+          </a:p>
+          <a:p>
+            <a:r>
+              <a:rPr lang="es-AR" dirty="0"/>
+              <a:t>…    </a:t>
+            </a:r>
+          </a:p>
+          <a:p>
+            <a:r>
+              <a:rPr lang="es-AR" dirty="0"/>
+              <a:t>  &lt;orden&gt;      </a:t>
+            </a:r>
+          </a:p>
+          <a:p>
+            <a:r>
+              <a:rPr lang="es-AR" dirty="0" err="1"/>
+              <a:t>end</a:t>
+            </a:r>
+            <a:endParaRPr lang="es-AR" dirty="0"/>
+          </a:p>
+        </p:txBody>
+      </p:sp>
+      <p:sp>
+        <p:nvSpPr>
+          <p:cNvPr id="6" name="Rectángulo 5"/>
+          <p:cNvSpPr/>
+          <p:nvPr/>
+        </p:nvSpPr>
+        <p:spPr>
+          <a:xfrm>
+            <a:off x="2216727" y="646331"/>
+            <a:ext cx="4137891" cy="1938992"/>
+          </a:xfrm>
+          <a:prstGeom prst="rect">
+            <a:avLst/>
+          </a:prstGeom>
+        </p:spPr>
+        <p:txBody>
+          <a:bodyPr wrap="square">
+            <a:spAutoFit/>
+          </a:bodyPr>
+          <a:lstStyle/>
+          <a:p>
+            <a:r>
+              <a:rPr lang="es-AR" sz="2000" dirty="0"/>
+              <a:t>a=3;</a:t>
+            </a:r>
+          </a:p>
+          <a:p>
+            <a:r>
+              <a:rPr lang="es-AR" sz="2000" dirty="0" err="1"/>
+              <a:t>while</a:t>
+            </a:r>
+            <a:r>
+              <a:rPr lang="es-AR" sz="2000" dirty="0"/>
+              <a:t> a &lt; 5</a:t>
+            </a:r>
+          </a:p>
+          <a:p>
+            <a:r>
+              <a:rPr lang="es-AR" sz="2000" dirty="0" err="1"/>
+              <a:t>disp</a:t>
+            </a:r>
+            <a:r>
+              <a:rPr lang="es-AR" sz="2000" dirty="0"/>
+              <a:t> ('a es menor que 5 ya que vale')</a:t>
+            </a:r>
+          </a:p>
+          <a:p>
+            <a:r>
+              <a:rPr lang="es-AR" sz="2000" dirty="0" err="1"/>
+              <a:t>disp</a:t>
+            </a:r>
+            <a:r>
+              <a:rPr lang="es-AR" sz="2000" dirty="0"/>
+              <a:t> (a);</a:t>
+            </a:r>
+          </a:p>
+          <a:p>
+            <a:r>
+              <a:rPr lang="es-AR" sz="2000" dirty="0"/>
+              <a:t>a = a + 1;</a:t>
+            </a:r>
+          </a:p>
+          <a:p>
+            <a:r>
+              <a:rPr lang="es-AR" sz="2000" dirty="0" err="1"/>
+              <a:t>end</a:t>
+            </a:r>
+            <a:endParaRPr lang="es-AR" sz="2000" dirty="0"/>
+          </a:p>
+        </p:txBody>
+      </p:sp>
+      <p:sp>
+        <p:nvSpPr>
+          <p:cNvPr id="7" name="Rectángulo 6"/>
+          <p:cNvSpPr/>
+          <p:nvPr/>
+        </p:nvSpPr>
+        <p:spPr>
+          <a:xfrm>
+            <a:off x="6354618" y="877163"/>
+            <a:ext cx="6096000" cy="1477328"/>
+          </a:xfrm>
+          <a:prstGeom prst="rect">
+            <a:avLst/>
+          </a:prstGeom>
+        </p:spPr>
+        <p:txBody>
+          <a:bodyPr>
+            <a:spAutoFit/>
+          </a:bodyPr>
+          <a:lstStyle/>
+          <a:p>
+            <a:r>
+              <a:rPr lang="es-AR" dirty="0"/>
+              <a:t>a es menor que 5 ya que vale</a:t>
+            </a:r>
+          </a:p>
+          <a:p>
+            <a:r>
+              <a:rPr lang="es-AR" dirty="0"/>
+              <a:t>     3</a:t>
+            </a:r>
+          </a:p>
+          <a:p>
+            <a:endParaRPr lang="es-AR" dirty="0"/>
+          </a:p>
+          <a:p>
+            <a:r>
+              <a:rPr lang="es-AR" dirty="0"/>
+              <a:t>a es menor que 5 ya que vale</a:t>
+            </a:r>
+          </a:p>
+          <a:p>
+            <a:r>
+              <a:rPr lang="es-AR" dirty="0"/>
+              <a:t>     4</a:t>
+            </a:r>
+          </a:p>
+        </p:txBody>
+      </p:sp>
+      <p:sp>
+        <p:nvSpPr>
+          <p:cNvPr id="8" name="Rectángulo 7"/>
+          <p:cNvSpPr/>
+          <p:nvPr/>
+        </p:nvSpPr>
+        <p:spPr>
+          <a:xfrm>
+            <a:off x="0" y="2585323"/>
+            <a:ext cx="1478290" cy="369332"/>
+          </a:xfrm>
+          <a:prstGeom prst="rect">
+            <a:avLst/>
+          </a:prstGeom>
+        </p:spPr>
+        <p:txBody>
+          <a:bodyPr wrap="none">
+            <a:spAutoFit/>
+          </a:bodyPr>
+          <a:lstStyle/>
+          <a:p>
+            <a:r>
+              <a:rPr lang="es-AR" b="1" dirty="0"/>
+              <a:t>SENTENCIA IF</a:t>
+            </a:r>
+          </a:p>
+        </p:txBody>
+      </p:sp>
+      <p:sp>
+        <p:nvSpPr>
+          <p:cNvPr id="9" name="Rectángulo 8"/>
+          <p:cNvSpPr/>
+          <p:nvPr/>
+        </p:nvSpPr>
+        <p:spPr>
+          <a:xfrm>
+            <a:off x="0" y="2954655"/>
+            <a:ext cx="4876800" cy="923330"/>
+          </a:xfrm>
+          <a:prstGeom prst="rect">
+            <a:avLst/>
+          </a:prstGeom>
+        </p:spPr>
+        <p:txBody>
+          <a:bodyPr wrap="square">
+            <a:spAutoFit/>
+          </a:bodyPr>
+          <a:lstStyle/>
+          <a:p>
+            <a:r>
+              <a:rPr lang="es-AR" dirty="0" err="1"/>
+              <a:t>if</a:t>
+            </a:r>
+            <a:r>
+              <a:rPr lang="es-AR" dirty="0"/>
+              <a:t> &lt;expresión&gt;     </a:t>
+            </a:r>
+          </a:p>
+          <a:p>
+            <a:r>
+              <a:rPr lang="es-AR" dirty="0"/>
+              <a:t> &lt;órdenes evaluadas si la expresión es verdadera&gt;    </a:t>
+            </a:r>
+          </a:p>
+          <a:p>
+            <a:r>
+              <a:rPr lang="es-AR" dirty="0" err="1"/>
+              <a:t>end</a:t>
+            </a:r>
+            <a:endParaRPr lang="es-AR" dirty="0"/>
+          </a:p>
+        </p:txBody>
+      </p:sp>
+      <p:sp>
+        <p:nvSpPr>
+          <p:cNvPr id="10" name="Rectángulo 9"/>
+          <p:cNvSpPr/>
+          <p:nvPr/>
+        </p:nvSpPr>
+        <p:spPr>
+          <a:xfrm>
+            <a:off x="5163127" y="2815174"/>
+            <a:ext cx="6096000" cy="1477328"/>
+          </a:xfrm>
+          <a:prstGeom prst="rect">
+            <a:avLst/>
+          </a:prstGeom>
+        </p:spPr>
+        <p:txBody>
+          <a:bodyPr>
+            <a:spAutoFit/>
+          </a:bodyPr>
+          <a:lstStyle/>
+          <a:p>
+            <a:r>
+              <a:rPr lang="es-AR" dirty="0" err="1"/>
+              <a:t>if</a:t>
+            </a:r>
+            <a:r>
+              <a:rPr lang="es-AR" dirty="0"/>
+              <a:t> &lt;expresión&gt;     </a:t>
+            </a:r>
+          </a:p>
+          <a:p>
+            <a:r>
+              <a:rPr lang="es-AR" dirty="0"/>
+              <a:t> &lt;órdenes evaluadas si la expresión es verdadera&gt;     </a:t>
+            </a:r>
+          </a:p>
+          <a:p>
+            <a:r>
+              <a:rPr lang="es-AR" dirty="0" err="1"/>
+              <a:t>else</a:t>
+            </a:r>
+            <a:r>
+              <a:rPr lang="es-AR" dirty="0"/>
+              <a:t>      </a:t>
+            </a:r>
+          </a:p>
+          <a:p>
+            <a:r>
+              <a:rPr lang="es-AR" dirty="0"/>
+              <a:t>&lt;órdenes evaluadas si la expresión es falsa&gt;     </a:t>
+            </a:r>
+          </a:p>
+          <a:p>
+            <a:r>
+              <a:rPr lang="es-AR" dirty="0" err="1"/>
+              <a:t>end</a:t>
+            </a:r>
+            <a:endParaRPr lang="es-AR" dirty="0"/>
+          </a:p>
+        </p:txBody>
+      </p:sp>
+      <p:sp>
+        <p:nvSpPr>
+          <p:cNvPr id="11" name="Rectángulo 10"/>
+          <p:cNvSpPr/>
+          <p:nvPr/>
+        </p:nvSpPr>
+        <p:spPr>
+          <a:xfrm>
+            <a:off x="-73891" y="4244941"/>
+            <a:ext cx="6096000" cy="2585323"/>
+          </a:xfrm>
+          <a:prstGeom prst="rect">
+            <a:avLst/>
+          </a:prstGeom>
+        </p:spPr>
+        <p:txBody>
+          <a:bodyPr>
+            <a:spAutoFit/>
+          </a:bodyPr>
+          <a:lstStyle/>
+          <a:p>
+            <a:r>
+              <a:rPr lang="es-AR" dirty="0"/>
+              <a:t> </a:t>
+            </a:r>
+            <a:r>
+              <a:rPr lang="es-AR" dirty="0" err="1"/>
+              <a:t>if</a:t>
+            </a:r>
+            <a:r>
+              <a:rPr lang="es-AR" dirty="0"/>
+              <a:t> &lt;expresión1&gt;      </a:t>
+            </a:r>
+          </a:p>
+          <a:p>
+            <a:r>
+              <a:rPr lang="es-AR" dirty="0"/>
+              <a:t>&lt;órdenes evaluadas si la expresión1 es verdadera&gt;     </a:t>
+            </a:r>
+          </a:p>
+          <a:p>
+            <a:r>
+              <a:rPr lang="es-AR" dirty="0" err="1"/>
+              <a:t>elseif</a:t>
+            </a:r>
+            <a:r>
+              <a:rPr lang="es-AR" dirty="0"/>
+              <a:t> &lt;expresión2&gt;      </a:t>
+            </a:r>
+          </a:p>
+          <a:p>
+            <a:r>
+              <a:rPr lang="es-AR" dirty="0"/>
+              <a:t>&lt;órdenes evaluadas si la expresión2 es verdadera&gt;   </a:t>
+            </a:r>
+          </a:p>
+          <a:p>
+            <a:r>
+              <a:rPr lang="es-AR" dirty="0"/>
+              <a:t>…….  </a:t>
+            </a:r>
+          </a:p>
+          <a:p>
+            <a:r>
+              <a:rPr lang="es-AR" dirty="0" err="1"/>
+              <a:t>elseif</a:t>
+            </a:r>
+            <a:r>
+              <a:rPr lang="es-AR" dirty="0"/>
+              <a:t>         …      </a:t>
+            </a:r>
+          </a:p>
+          <a:p>
+            <a:r>
+              <a:rPr lang="es-AR" dirty="0"/>
+              <a:t> </a:t>
+            </a:r>
+            <a:r>
+              <a:rPr lang="es-AR" dirty="0" err="1"/>
+              <a:t>else</a:t>
+            </a:r>
+            <a:r>
+              <a:rPr lang="es-AR" dirty="0"/>
+              <a:t>     </a:t>
+            </a:r>
+          </a:p>
+          <a:p>
+            <a:r>
+              <a:rPr lang="es-AR" dirty="0"/>
+              <a:t> &lt;órdenes evaluadas si ninguna otra expresión es verdadera&gt;     </a:t>
+            </a:r>
+            <a:r>
+              <a:rPr lang="es-AR" dirty="0" err="1"/>
+              <a:t>end</a:t>
+            </a:r>
+            <a:endParaRPr lang="es-AR" dirty="0"/>
+          </a:p>
+        </p:txBody>
+      </p:sp>
+    </p:spTree>
+    <p:extLst>
+      <p:ext uri="{BB962C8B-B14F-4D97-AF65-F5344CB8AC3E}">
+        <p14:creationId xmlns:p14="http://schemas.microsoft.com/office/powerpoint/2010/main" val="2140957394"/>
+      </p:ext>
+    </p:extLst>
+  </p:cSld>
+  <p:clrMapOvr>
+    <a:masterClrMapping/>
+  </p:clrMapOvr>
+</p:sld>
+</file>
+
+<file path=ppt/slides/slide16.xml><?xml version="1.0" encoding="utf-8"?>
+<p:sld xmlns:a="http://schemas.openxmlformats.org/drawingml/2006/main" xmlns:r="http://schemas.openxmlformats.org/officeDocument/2006/relationships" xmlns:p="http://schemas.openxmlformats.org/presentationml/2006/main">
+  <p:cSld>
+    <p:spTree>
+      <p:nvGrpSpPr>
+        <p:cNvPr id="1" name=""/>
+        <p:cNvGrpSpPr/>
+        <p:nvPr/>
+      </p:nvGrpSpPr>
+      <p:grpSpPr>
+        <a:xfrm>
+          <a:off x="0" y="0"/>
+          <a:ext cx="0" cy="0"/>
+          <a:chOff x="0" y="0"/>
+          <a:chExt cx="0" cy="0"/>
+        </a:xfrm>
+      </p:grpSpPr>
+      <p:sp>
+        <p:nvSpPr>
+          <p:cNvPr id="4" name="Rectángulo 3"/>
+          <p:cNvSpPr/>
+          <p:nvPr/>
+        </p:nvSpPr>
+        <p:spPr>
+          <a:xfrm>
             <a:off x="212435" y="0"/>
             <a:ext cx="8636001" cy="3693319"/>
           </a:xfrm>
@@ -6591,35 +7225,35 @@
           <a:lstStyle/>
           <a:p>
             <a:r>
-              <a:rPr lang="es-AR" dirty="0" smtClean="0"/>
+              <a:rPr lang="es-AR" dirty="0"/>
               <a:t> b = 2; </a:t>
             </a:r>
           </a:p>
           <a:p>
             <a:r>
-              <a:rPr lang="es-AR" dirty="0" smtClean="0"/>
+              <a:rPr lang="es-AR" dirty="0"/>
               <a:t> 	</a:t>
             </a:r>
             <a:r>
-              <a:rPr lang="es-AR" dirty="0" err="1" smtClean="0"/>
+              <a:rPr lang="es-AR" dirty="0" err="1"/>
               <a:t>if</a:t>
             </a:r>
             <a:r>
-              <a:rPr lang="es-AR" dirty="0" smtClean="0"/>
+              <a:rPr lang="es-AR" dirty="0"/>
               <a:t> b == 0 % ponemos == porque no es una asignación sino una expresión lógica </a:t>
             </a:r>
           </a:p>
           <a:p>
             <a:r>
-              <a:rPr lang="es-AR" dirty="0" smtClean="0"/>
+              <a:rPr lang="es-AR" dirty="0"/>
               <a:t> 		</a:t>
             </a:r>
             <a:r>
-              <a:rPr lang="es-AR" dirty="0" err="1" smtClean="0"/>
+              <a:rPr lang="es-AR" dirty="0" err="1"/>
               <a:t>disp</a:t>
             </a:r>
             <a:r>
-              <a:rPr lang="es-AR" dirty="0" smtClean="0"/>
+              <a:rPr lang="es-AR" dirty="0"/>
               <a:t> ('b vale 0')  </a:t>
             </a:r>
           </a:p>
@@ -6629,12 +7263,26 @@
               <a:t>	</a:t>
             </a:r>
             <a:r>
-              <a:rPr lang="es-AR" dirty="0" err="1" smtClean="0"/>
+              <a:rPr lang="es-AR" dirty="0" err="1"/>
               <a:t>elseif</a:t>
             </a:r>
             <a:r>
-              <a:rPr lang="es-AR" dirty="0" smtClean="0"/>
+              <a:rPr lang="es-AR" dirty="0"/>
               <a:t> b == 1    </a:t>
+            </a:r>
+          </a:p>
+          <a:p>
+            <a:r>
+              <a:rPr lang="es-AR" dirty="0"/>
+              <a:t>		</a:t>
+            </a:r>
+            <a:r>
+              <a:rPr lang="es-AR" dirty="0" err="1"/>
+              <a:t>disp</a:t>
+            </a:r>
+            <a:r>
+              <a:rPr lang="es-AR" dirty="0"/>
+              <a:t> ('b vale 1')  </a:t>
             </a:r>
           </a:p>
           <a:p>
@@ -6643,16 +7291,26 @@
               <a:t>	</a:t>
             </a:r>
             <a:r>
-              <a:rPr lang="es-AR" dirty="0" smtClean="0"/>
-              <a:t>	</a:t>
-            </a:r>
-            <a:r>
-              <a:rPr lang="es-AR" dirty="0" err="1" smtClean="0"/>
+              <a:rPr lang="es-AR" dirty="0" err="1"/>
+              <a:t>elseif</a:t>
+            </a:r>
+            <a:r>
+              <a:rPr lang="es-AR" dirty="0"/>
+              <a:t> b == 2   </a:t>
+            </a:r>
+          </a:p>
+          <a:p>
+            <a:r>
+              <a:rPr lang="es-AR" dirty="0"/>
+              <a:t>		</a:t>
+            </a:r>
+            <a:r>
+              <a:rPr lang="es-AR" dirty="0" err="1"/>
               <a:t>disp</a:t>
             </a:r>
             <a:r>
-              <a:rPr lang="es-AR" dirty="0" smtClean="0"/>
-              <a:t> ('b vale 1')  </a:t>
+              <a:rPr lang="es-AR" dirty="0"/>
+              <a:t> ('b vale 2')  </a:t>
             </a:r>
           </a:p>
           <a:p>
@@ -6661,12 +7319,26 @@
               <a:t>	</a:t>
             </a:r>
             <a:r>
-              <a:rPr lang="es-AR" dirty="0" err="1" smtClean="0"/>
+              <a:rPr lang="es-AR" dirty="0" err="1"/>
               <a:t>elseif</a:t>
             </a:r>
             <a:r>
-              <a:rPr lang="es-AR" dirty="0" smtClean="0"/>
-              <a:t> b == 2   </a:t>
+              <a:rPr lang="es-AR" dirty="0"/>
+              <a:t> b == 3   </a:t>
+            </a:r>
+          </a:p>
+          <a:p>
+            <a:r>
+              <a:rPr lang="es-AR" dirty="0"/>
+              <a:t>		</a:t>
+            </a:r>
+            <a:r>
+              <a:rPr lang="es-AR" dirty="0" err="1"/>
+              <a:t>disp</a:t>
+            </a:r>
+            <a:r>
+              <a:rPr lang="es-AR" dirty="0"/>
+              <a:t> ('b vale 3')  </a:t>
             </a:r>
           </a:p>
           <a:p>
@@ -6675,104 +7347,49 @@
               <a:t>	</a:t>
             </a:r>
             <a:r>
-              <a:rPr lang="es-AR" dirty="0" smtClean="0"/>
-              <a:t>	</a:t>
-            </a:r>
-            <a:r>
-              <a:rPr lang="es-AR" dirty="0" err="1" smtClean="0"/>
+              <a:rPr lang="es-AR" dirty="0" err="1"/>
+              <a:t>else</a:t>
+            </a:r>
+            <a:r>
+              <a:rPr lang="es-AR" dirty="0"/>
+              <a:t>   </a:t>
+            </a:r>
+          </a:p>
+          <a:p>
+            <a:r>
+              <a:rPr lang="es-AR" dirty="0"/>
+              <a:t>		</a:t>
+            </a:r>
+            <a:r>
+              <a:rPr lang="es-AR" dirty="0" err="1"/>
               <a:t>disp</a:t>
             </a:r>
             <a:r>
-              <a:rPr lang="es-AR" dirty="0" smtClean="0"/>
-              <a:t> ('b vale 2')  </a:t>
-            </a:r>
-          </a:p>
-          <a:p>
-            <a:r>
               <a:rPr lang="es-AR" dirty="0"/>
-              <a:t>	</a:t>
-            </a:r>
-            <a:r>
-              <a:rPr lang="es-AR" dirty="0" err="1" smtClean="0"/>
-              <a:t>elseif</a:t>
-            </a:r>
-            <a:r>
-              <a:rPr lang="es-AR" dirty="0" smtClean="0"/>
-              <a:t> b == 3   </a:t>
-            </a:r>
-          </a:p>
-          <a:p>
+              <a:t> ('b no vale ni 0 ni 1 ni 2 ni 3')  </a:t>
+            </a:r>
+          </a:p>
+          <a:p>
+            <a:r>
+              <a:rPr lang="es-AR" dirty="0" err="1"/>
+              <a:t>end</a:t>
+            </a:r>
             <a:r>
               <a:rPr lang="es-AR" dirty="0"/>
-              <a:t>	</a:t>
-            </a:r>
-            <a:r>
-              <a:rPr lang="es-AR" dirty="0" smtClean="0"/>
-              <a:t>	</a:t>
-            </a:r>
-            <a:r>
-              <a:rPr lang="es-AR" dirty="0" err="1" smtClean="0"/>
-              <a:t>disp</a:t>
-            </a:r>
-            <a:r>
-              <a:rPr lang="es-AR" dirty="0" smtClean="0"/>
-              <a:t> ('b vale 3')  </a:t>
-            </a:r>
-          </a:p>
-          <a:p>
+              <a:t>  </a:t>
+            </a:r>
+          </a:p>
+          <a:p>
+            <a:r>
+              <a:rPr lang="es-AR" dirty="0">
+                <a:sym typeface="Wingdings" panose="05000000000000000000" pitchFamily="2" charset="2"/>
+              </a:rPr>
+              <a:t></a:t>
+            </a:r>
             <a:r>
               <a:rPr lang="es-AR" dirty="0"/>
-              <a:t>	</a:t>
-            </a:r>
-            <a:r>
-              <a:rPr lang="es-AR" dirty="0" err="1" smtClean="0"/>
-              <a:t>else</a:t>
-            </a:r>
-            <a:r>
-              <a:rPr lang="es-AR" dirty="0" smtClean="0"/>
-              <a:t>   </a:t>
-            </a:r>
-          </a:p>
-          <a:p>
-            <a:r>
-              <a:rPr lang="es-AR" dirty="0"/>
-              <a:t>	</a:t>
-            </a:r>
-            <a:r>
-              <a:rPr lang="es-AR" dirty="0" smtClean="0"/>
-              <a:t>	</a:t>
-            </a:r>
-            <a:r>
-              <a:rPr lang="es-AR" dirty="0" err="1" smtClean="0"/>
-              <a:t>disp</a:t>
-            </a:r>
-            <a:r>
-              <a:rPr lang="es-AR" dirty="0" smtClean="0"/>
-              <a:t> ('b no vale ni 0 ni 1 ni 2 ni 3')  </a:t>
-            </a:r>
-          </a:p>
-          <a:p>
-            <a:r>
-              <a:rPr lang="es-AR" dirty="0" err="1" smtClean="0"/>
-              <a:t>end</a:t>
-            </a:r>
-            <a:r>
-              <a:rPr lang="es-AR" dirty="0" smtClean="0"/>
-              <a:t>  </a:t>
-            </a:r>
-          </a:p>
-          <a:p>
-            <a:r>
-              <a:rPr lang="es-AR" dirty="0" smtClean="0">
-                <a:sym typeface="Wingdings" panose="05000000000000000000" pitchFamily="2" charset="2"/>
-              </a:rPr>
-              <a:t></a:t>
-            </a:r>
-            <a:r>
-              <a:rPr lang="es-AR" dirty="0" smtClean="0"/>
               <a:t>b vale 2  % es lo que devuelve por pantalla</a:t>
             </a:r>
-            <a:endParaRPr lang="es-AR" dirty="0"/>
           </a:p>
         </p:txBody>
       </p:sp>
@@ -6798,30 +7415,29 @@
           <a:lstStyle/>
           <a:p>
             <a:r>
-              <a:rPr lang="es-AR" b="1" dirty="0" smtClean="0"/>
+              <a:rPr lang="es-AR" b="1" dirty="0"/>
               <a:t>SENTENCIA BREAK: </a:t>
             </a:r>
             <a:r>
-              <a:rPr lang="es-AR" dirty="0" smtClean="0"/>
+              <a:rPr lang="es-AR" dirty="0"/>
               <a:t>Si queremos que en un momento dado termine la ejecución de un bucle </a:t>
             </a:r>
             <a:r>
-              <a:rPr lang="es-AR" dirty="0" err="1" smtClean="0"/>
+              <a:rPr lang="es-AR" dirty="0" err="1"/>
               <a:t>for</a:t>
             </a:r>
             <a:r>
-              <a:rPr lang="es-AR" dirty="0" smtClean="0"/>
+              <a:rPr lang="es-AR" dirty="0"/>
               <a:t> o un bucle </a:t>
             </a:r>
             <a:r>
-              <a:rPr lang="es-AR" dirty="0" err="1" smtClean="0"/>
+              <a:rPr lang="es-AR" dirty="0" err="1"/>
               <a:t>while</a:t>
             </a:r>
             <a:r>
-              <a:rPr lang="es-AR" dirty="0" smtClean="0"/>
+              <a:rPr lang="es-AR" dirty="0"/>
               <a:t> usaremos break.</a:t>
             </a:r>
-            <a:endParaRPr lang="es-AR" dirty="0"/>
           </a:p>
         </p:txBody>
       </p:sp>
@@ -6878,37 +7494,37 @@
           <a:lstStyle/>
           <a:p>
             <a:r>
-              <a:rPr lang="es-AR" sz="2400" b="1" dirty="0" smtClean="0"/>
+              <a:rPr lang="es-AR" sz="2400" b="1" dirty="0"/>
               <a:t>Matrices</a:t>
             </a:r>
           </a:p>
           <a:p>
             <a:r>
-              <a:rPr lang="pt-BR" sz="2000" dirty="0" smtClean="0"/>
+              <a:rPr lang="pt-BR" sz="2000" dirty="0"/>
               <a:t>a = [1 2 3;4 5 6;7 8 9]</a:t>
             </a:r>
           </a:p>
           <a:p>
             <a:r>
-              <a:rPr lang="pt-BR" sz="2000" dirty="0" smtClean="0"/>
+              <a:rPr lang="pt-BR" sz="2000" dirty="0"/>
               <a:t>a =</a:t>
             </a:r>
           </a:p>
           <a:p>
             <a:r>
-              <a:rPr lang="pt-BR" sz="2000" dirty="0" smtClean="0"/>
+              <a:rPr lang="pt-BR" sz="2000" dirty="0"/>
               <a:t>     1     2     3</a:t>
             </a:r>
           </a:p>
           <a:p>
             <a:r>
-              <a:rPr lang="pt-BR" sz="2000" dirty="0" smtClean="0"/>
+              <a:rPr lang="pt-BR" sz="2000" dirty="0"/>
               <a:t>     4     5     6</a:t>
             </a:r>
           </a:p>
           <a:p>
             <a:r>
-              <a:rPr lang="pt-BR" sz="2000" dirty="0" smtClean="0"/>
+              <a:rPr lang="pt-BR" sz="2000" dirty="0"/>
               <a:t>     7     8     9</a:t>
             </a:r>
             <a:endParaRPr lang="es-AR" sz="2000" dirty="0"/>
@@ -6937,7 +7553,7 @@
           <a:lstStyle/>
           <a:p>
             <a:r>
-              <a:rPr lang="pt-BR" sz="2000" dirty="0" smtClean="0"/>
+              <a:rPr lang="pt-BR" sz="2000" dirty="0"/>
               <a:t>b = [a 10*a;-a [1 0 0;0 1 0;0 0 1]]</a:t>
             </a:r>
             <a:endParaRPr lang="es-AR" sz="2000" dirty="0"/>
@@ -6967,10 +7583,9 @@
           <a:lstStyle/>
           <a:p>
             <a:r>
-              <a:rPr lang="es-AR" dirty="0" smtClean="0"/>
+              <a:rPr lang="es-AR" dirty="0"/>
               <a:t>También se pueden crear matrices a través de sub matrices</a:t>
             </a:r>
-            <a:endParaRPr lang="es-AR" dirty="0"/>
           </a:p>
         </p:txBody>
       </p:sp>
@@ -6996,18 +7611,17 @@
           <a:lstStyle/>
           <a:p>
             <a:r>
-              <a:rPr lang="es-AR" dirty="0" smtClean="0"/>
+              <a:rPr lang="es-AR" dirty="0"/>
               <a:t>La función </a:t>
             </a:r>
             <a:r>
-              <a:rPr lang="es-AR" b="1" dirty="0" err="1" smtClean="0"/>
+              <a:rPr lang="es-AR" b="1" dirty="0" err="1"/>
               <a:t>repmat</a:t>
             </a:r>
             <a:r>
-              <a:rPr lang="es-AR" dirty="0" smtClean="0"/>
+              <a:rPr lang="es-AR" dirty="0"/>
               <a:t> se puede utilizar para replicar una matriz:</a:t>
             </a:r>
-            <a:endParaRPr lang="es-AR" dirty="0"/>
           </a:p>
         </p:txBody>
       </p:sp>
@@ -7033,7 +7647,7 @@
           <a:lstStyle/>
           <a:p>
             <a:r>
-              <a:rPr lang="pt-BR" smtClean="0"/>
+              <a:rPr lang="pt-BR"/>
               <a:t>a = [1 2; 3 4]</a:t>
             </a:r>
             <a:endParaRPr lang="es-AR" dirty="0"/>
@@ -7062,14 +7676,13 @@
           <a:lstStyle/>
           <a:p>
             <a:r>
-              <a:rPr lang="es-AR" dirty="0" err="1" smtClean="0"/>
+              <a:rPr lang="es-AR" dirty="0" err="1"/>
               <a:t>repmat</a:t>
             </a:r>
             <a:r>
-              <a:rPr lang="es-AR" dirty="0" smtClean="0"/>
+              <a:rPr lang="es-AR" dirty="0"/>
               <a:t>(a,2,3) </a:t>
             </a:r>
-            <a:endParaRPr lang="es-AR" dirty="0"/>
           </a:p>
         </p:txBody>
       </p:sp>
@@ -7096,103 +7709,98 @@
           <a:p>
             <a:r>
               <a:rPr lang="es-AR" sz="2000" dirty="0" err="1"/>
-              <a:t>z</a:t>
-            </a:r>
-            <a:r>
-              <a:rPr lang="es-AR" sz="2000" dirty="0" err="1" smtClean="0"/>
-              <a:t>eros</a:t>
-            </a:r>
-            <a:r>
-              <a:rPr lang="es-AR" sz="2000" dirty="0" smtClean="0"/>
+              <a:t>zeros</a:t>
+            </a:r>
+            <a:r>
+              <a:rPr lang="es-AR" sz="2000" dirty="0"/>
               <a:t>: una matriz llena de ceros</a:t>
             </a:r>
           </a:p>
           <a:p>
             <a:r>
-              <a:rPr lang="es-AR" sz="2000" dirty="0" err="1" smtClean="0"/>
+              <a:rPr lang="es-AR" sz="2000" dirty="0" err="1"/>
               <a:t>zeros</a:t>
             </a:r>
             <a:r>
-              <a:rPr lang="es-AR" sz="2000" dirty="0" smtClean="0"/>
+              <a:rPr lang="es-AR" sz="2000" dirty="0"/>
               <a:t>(2,3) </a:t>
             </a:r>
           </a:p>
           <a:p>
             <a:r>
-              <a:rPr lang="es-AR" sz="2000" dirty="0" err="1" smtClean="0"/>
+              <a:rPr lang="es-AR" sz="2000" dirty="0" err="1"/>
               <a:t>ones</a:t>
             </a:r>
             <a:r>
-              <a:rPr lang="es-AR" sz="2000" dirty="0" smtClean="0"/>
+              <a:rPr lang="es-AR" sz="2000" dirty="0"/>
               <a:t>: una matriz llena de unos</a:t>
             </a:r>
           </a:p>
           <a:p>
             <a:r>
-              <a:rPr lang="es-AR" sz="2000" dirty="0" err="1" smtClean="0"/>
+              <a:rPr lang="es-AR" sz="2000" dirty="0" err="1"/>
               <a:t>ones</a:t>
             </a:r>
             <a:r>
-              <a:rPr lang="es-AR" sz="2000" dirty="0" smtClean="0"/>
+              <a:rPr lang="es-AR" sz="2000" dirty="0"/>
               <a:t>(2,2)/2</a:t>
             </a:r>
           </a:p>
           <a:p>
             <a:r>
-              <a:rPr lang="es-AR" sz="2000" dirty="0" smtClean="0"/>
+              <a:rPr lang="es-AR" sz="2000" dirty="0"/>
               <a:t>rand: una matriz con elementos aleatorios uniformemente distribuidos</a:t>
             </a:r>
           </a:p>
           <a:p>
             <a:r>
-              <a:rPr lang="es-AR" sz="2000" dirty="0" smtClean="0"/>
+              <a:rPr lang="es-AR" sz="2000" dirty="0"/>
               <a:t>u = rand(1,5) </a:t>
             </a:r>
           </a:p>
           <a:p>
             <a:r>
-              <a:rPr lang="es-AR" sz="2000" dirty="0" err="1" smtClean="0"/>
+              <a:rPr lang="es-AR" sz="2000" dirty="0" err="1"/>
               <a:t>randn</a:t>
             </a:r>
             <a:r>
-              <a:rPr lang="es-AR" sz="2000" dirty="0" smtClean="0"/>
+              <a:rPr lang="es-AR" sz="2000" dirty="0"/>
               <a:t>: una matriz con elementos aleatorios normalmente distribuidos</a:t>
             </a:r>
           </a:p>
           <a:p>
             <a:r>
-              <a:rPr lang="es-AR" sz="2000" dirty="0" smtClean="0"/>
+              <a:rPr lang="es-AR" sz="2000" dirty="0"/>
               <a:t>n = </a:t>
             </a:r>
             <a:r>
-              <a:rPr lang="es-AR" sz="2000" dirty="0" err="1" smtClean="0"/>
+              <a:rPr lang="es-AR" sz="2000" dirty="0" err="1"/>
               <a:t>randn</a:t>
             </a:r>
             <a:r>
-              <a:rPr lang="es-AR" sz="2000" dirty="0" smtClean="0"/>
+              <a:rPr lang="es-AR" sz="2000" dirty="0"/>
               <a:t>(5,5) </a:t>
             </a:r>
           </a:p>
           <a:p>
             <a:r>
-              <a:rPr lang="es-AR" sz="2000" dirty="0" err="1" smtClean="0"/>
+              <a:rPr lang="es-AR" sz="2000" dirty="0" err="1"/>
               <a:t>eye</a:t>
             </a:r>
             <a:r>
-              <a:rPr lang="es-AR" sz="2000" dirty="0" smtClean="0"/>
+              <a:rPr lang="es-AR" sz="2000" dirty="0"/>
               <a:t>: matriz de identidad</a:t>
             </a:r>
           </a:p>
           <a:p>
             <a:r>
-              <a:rPr lang="es-AR" sz="2000" dirty="0" err="1" smtClean="0"/>
+              <a:rPr lang="es-AR" sz="2000" dirty="0" err="1"/>
               <a:t>eye</a:t>
             </a:r>
             <a:r>
-              <a:rPr lang="es-AR" sz="2000" dirty="0" smtClean="0"/>
+              <a:rPr lang="es-AR" sz="2000" dirty="0"/>
               <a:t>(3) </a:t>
             </a:r>
-            <a:endParaRPr lang="es-AR" sz="2000" dirty="0"/>
           </a:p>
         </p:txBody>
       </p:sp>
@@ -7219,22 +7827,21 @@
           <a:lstStyle/>
           <a:p>
             <a:r>
-              <a:rPr lang="es-AR" sz="2000" dirty="0" smtClean="0"/>
+              <a:rPr lang="es-AR" sz="2000" dirty="0"/>
               <a:t>Se puede trasponer una matriz </a:t>
             </a:r>
             <a:r>
-              <a:rPr lang="es-AR" sz="2000" b="1" dirty="0" smtClean="0"/>
+              <a:rPr lang="es-AR" sz="2000" b="1" dirty="0"/>
               <a:t>a</a:t>
             </a:r>
             <a:r>
-              <a:rPr lang="es-AR" sz="2000" dirty="0" smtClean="0"/>
+              <a:rPr lang="es-AR" sz="2000" dirty="0"/>
               <a:t> usando </a:t>
             </a:r>
             <a:r>
-              <a:rPr lang="es-AR" sz="2000" b="1" dirty="0" smtClean="0"/>
+              <a:rPr lang="es-AR" sz="2000" b="1" dirty="0"/>
               <a:t>a’</a:t>
             </a:r>
-            <a:endParaRPr lang="es-AR" sz="2000" b="1" dirty="0"/>
           </a:p>
         </p:txBody>
       </p:sp>
@@ -7320,17 +7927,17 @@
           <a:lstStyle/>
           <a:p>
             <a:r>
-              <a:rPr lang="es-AR" sz="2200" dirty="0" smtClean="0"/>
+              <a:rPr lang="es-AR" sz="2200" dirty="0"/>
               <a:t>Formas de graficar: </a:t>
             </a:r>
           </a:p>
           <a:p>
             <a:r>
-              <a:rPr lang="es-ES_tradnl" dirty="0" err="1" smtClean="0"/>
+              <a:rPr lang="es-ES_tradnl" dirty="0" err="1"/>
               <a:t>Ezplot</a:t>
             </a:r>
             <a:r>
-              <a:rPr lang="es-ES_tradnl" dirty="0" smtClean="0"/>
+              <a:rPr lang="es-ES_tradnl" dirty="0"/>
               <a:t>: Función </a:t>
             </a:r>
             <a:r>
@@ -7364,16 +7971,12 @@
               <a:t>fun</a:t>
             </a:r>
             <a:r>
-              <a:rPr lang="es-ES_tradnl" i="1" dirty="0" smtClean="0"/>
+              <a:rPr lang="es-ES_tradnl" i="1" dirty="0"/>
               <a:t>)</a:t>
             </a:r>
             <a:r>
-              <a:rPr lang="es-ES_tradnl" dirty="0" smtClean="0"/>
-              <a:t>) </a:t>
-            </a:r>
-            <a:r>
               <a:rPr lang="es-ES_tradnl" dirty="0"/>
-              <a:t>grafica la expresión </a:t>
+              <a:t>) grafica la expresión </a:t>
             </a:r>
             <a:r>
               <a:rPr lang="es-ES_tradnl" i="1" dirty="0" err="1"/>
@@ -7411,7 +8014,7 @@
               <a:t>min,max</a:t>
             </a:r>
             <a:r>
-              <a:rPr lang="es-ES_tradnl" i="1" dirty="0" smtClean="0"/>
+              <a:rPr lang="es-ES_tradnl" i="1" dirty="0"/>
               <a:t>]) </a:t>
             </a:r>
             <a:r>
@@ -7443,11 +8046,7 @@
             </a:r>
             <a:r>
               <a:rPr lang="es-ES_tradnl" i="1" dirty="0"/>
-              <a:t>(fun2</a:t>
-            </a:r>
-            <a:r>
-              <a:rPr lang="es-ES_tradnl" i="1" dirty="0" smtClean="0"/>
-              <a:t>) </a:t>
+              <a:t>(fun2) </a:t>
             </a:r>
             <a:r>
               <a:rPr lang="es-ES_tradnl" dirty="0"/>
@@ -7477,7 +8076,7 @@
               <a:t>xmin,xmax,ymin,ymax</a:t>
             </a:r>
             <a:r>
-              <a:rPr lang="es-ES_tradnl" i="1" dirty="0" smtClean="0"/>
+              <a:rPr lang="es-ES_tradnl" i="1" dirty="0"/>
               <a:t>]) </a:t>
             </a:r>
             <a:r>
@@ -7559,7 +8158,7 @@
               <a:t>funx,funy</a:t>
             </a:r>
             <a:r>
-              <a:rPr lang="es-ES_tradnl" i="1" dirty="0" smtClean="0"/>
+              <a:rPr lang="es-ES_tradnl" i="1" dirty="0"/>
               <a:t>) </a:t>
             </a:r>
             <a:r>
@@ -7622,7 +8221,7 @@
               <a:t>tmin,tmax</a:t>
             </a:r>
             <a:r>
-              <a:rPr lang="es-ES_tradnl" i="1" dirty="0" smtClean="0"/>
+              <a:rPr lang="es-ES_tradnl" i="1" dirty="0"/>
               <a:t>]) </a:t>
             </a:r>
             <a:r>
@@ -7661,10 +8260,9 @@
           </a:p>
           <a:p>
             <a:r>
-              <a:rPr lang="es-AR" sz="2000" dirty="0" smtClean="0"/>
+              <a:rPr lang="es-AR" sz="2000" dirty="0"/>
               <a:t>-------------------------------------------</a:t>
             </a:r>
-            <a:endParaRPr lang="es-AR" sz="2000" dirty="0"/>
           </a:p>
           <a:p>
             <a:r>
@@ -7678,10 +8276,10 @@
             <a:endParaRPr lang="es-AR" sz="2000" dirty="0"/>
           </a:p>
           <a:p>
-            <a:endParaRPr lang="es-AR" sz="2000" dirty="0" smtClean="0"/>
-          </a:p>
-          <a:p>
-            <a:endParaRPr lang="es-AR" sz="2000" dirty="0" smtClean="0"/>
+            <a:endParaRPr lang="es-AR" sz="2000" dirty="0"/>
+          </a:p>
+          <a:p>
+            <a:endParaRPr lang="es-AR" sz="2000" dirty="0"/>
           </a:p>
         </p:txBody>
       </p:sp>
@@ -7792,21 +8390,7 @@
                 <a:ea typeface="Calibri" panose="020F0502020204030204" pitchFamily="34" charset="0"/>
                 <a:cs typeface="Times New Roman" panose="02020603050405020304" pitchFamily="18" charset="0"/>
               </a:rPr>
-              <a:t>('(x^2)/4+(y^2)/9-1',[-3,3</a:t>
-            </a:r>
-            <a:r>
-              <a:rPr lang="es-ES_tradnl" sz="2000" dirty="0" smtClean="0">
-                <a:ea typeface="Calibri" panose="020F0502020204030204" pitchFamily="34" charset="0"/>
-                <a:cs typeface="Times New Roman" panose="02020603050405020304" pitchFamily="18" charset="0"/>
-              </a:rPr>
-              <a:t>],[-</a:t>
-            </a:r>
-            <a:r>
-              <a:rPr lang="es-ES_tradnl" sz="2000" dirty="0">
-                <a:ea typeface="Calibri" panose="020F0502020204030204" pitchFamily="34" charset="0"/>
-                <a:cs typeface="Times New Roman" panose="02020603050405020304" pitchFamily="18" charset="0"/>
-              </a:rPr>
-              <a:t>3,3])</a:t>
+              <a:t>('(x^2)/4+(y^2)/9-1',[-3,3],[-3,3])</a:t>
             </a:r>
             <a:endParaRPr lang="es-AR" sz="2000" dirty="0">
               <a:ea typeface="Calibri" panose="020F0502020204030204" pitchFamily="34" charset="0"/>
@@ -8436,15 +9020,7 @@
                 <a:ea typeface="Calibri" panose="020F0502020204030204" pitchFamily="34" charset="0"/>
                 <a:cs typeface="Courier New" panose="02070309020205020404" pitchFamily="49" charset="0"/>
               </a:rPr>
-              <a:t>PLOT(Y) grafica las columnas de Y versus su índice</a:t>
-            </a:r>
-            <a:r>
-              <a:rPr lang="es-ES_tradnl" dirty="0" smtClean="0">
-                <a:latin typeface="Calibri" panose="020F0502020204030204" pitchFamily="34" charset="0"/>
-                <a:ea typeface="Calibri" panose="020F0502020204030204" pitchFamily="34" charset="0"/>
-                <a:cs typeface="Courier New" panose="02070309020205020404" pitchFamily="49" charset="0"/>
-              </a:rPr>
-              <a:t>.</a:t>
+              <a:t>PLOT(Y) grafica las columnas de Y versus su índice.</a:t>
             </a:r>
             <a:endParaRPr lang="es-AR" dirty="0">
               <a:latin typeface="Calibri" panose="020F0502020204030204" pitchFamily="34" charset="0"/>
@@ -8611,15 +9187,7 @@
                 <a:ea typeface="Calibri" panose="020F0502020204030204" pitchFamily="34" charset="0"/>
                 <a:cs typeface="Courier New" panose="02070309020205020404" pitchFamily="49" charset="0"/>
               </a:rPr>
-              <a:t>En todos los otros usos de PLOT, la parte imaginaria es ignorada</a:t>
-            </a:r>
-            <a:r>
-              <a:rPr lang="es-ES_tradnl" dirty="0" smtClean="0">
-                <a:latin typeface="Calibri" panose="020F0502020204030204" pitchFamily="34" charset="0"/>
-                <a:ea typeface="Calibri" panose="020F0502020204030204" pitchFamily="34" charset="0"/>
-                <a:cs typeface="Courier New" panose="02070309020205020404" pitchFamily="49" charset="0"/>
-              </a:rPr>
-              <a:t>.</a:t>
+              <a:t>En todos los otros usos de PLOT, la parte imaginaria es ignorada.</a:t>
             </a:r>
           </a:p>
           <a:p>
@@ -8638,19 +9206,19 @@
           </a:p>
           <a:p>
             <a:r>
-              <a:rPr lang="es-ES_tradnl" dirty="0" err="1" smtClean="0"/>
+              <a:rPr lang="es-ES_tradnl" dirty="0" err="1"/>
               <a:t>plot</a:t>
             </a:r>
             <a:r>
-              <a:rPr lang="es-ES_tradnl" dirty="0" smtClean="0"/>
+              <a:rPr lang="es-ES_tradnl" dirty="0"/>
               <a:t>(</a:t>
             </a:r>
             <a:r>
-              <a:rPr lang="es-ES_tradnl" dirty="0" err="1" smtClean="0"/>
+              <a:rPr lang="es-ES_tradnl" dirty="0" err="1"/>
               <a:t>x,y</a:t>
             </a:r>
             <a:r>
-              <a:rPr lang="es-ES_tradnl" dirty="0" smtClean="0"/>
+              <a:rPr lang="es-ES_tradnl" dirty="0"/>
               <a:t>)</a:t>
             </a:r>
             <a:endParaRPr lang="es-AR" dirty="0">
@@ -8721,7 +9289,7 @@
               </a:spcAft>
             </a:pPr>
             <a:r>
-              <a:rPr lang="es-ES_tradnl" sz="2400" dirty="0" smtClean="0">
+              <a:rPr lang="es-ES_tradnl" sz="2400" dirty="0">
                 <a:effectLst/>
                 <a:latin typeface="Calibri" panose="020F0502020204030204" pitchFamily="34" charset="0"/>
                 <a:ea typeface="Calibri" panose="020F0502020204030204" pitchFamily="34" charset="0"/>
@@ -8730,7 +9298,7 @@
               <a:t>Se pueden obtener varios tipos de líneas, símbolos y colores con  </a:t>
             </a:r>
             <a:r>
-              <a:rPr lang="es-ES_tradnl" sz="2400" i="1" dirty="0" smtClean="0">
+              <a:rPr lang="es-ES_tradnl" sz="2400" i="1" dirty="0">
                 <a:effectLst/>
                 <a:latin typeface="Calibri" panose="020F0502020204030204" pitchFamily="34" charset="0"/>
                 <a:ea typeface="Calibri" panose="020F0502020204030204" pitchFamily="34" charset="0"/>
@@ -8739,7 +9307,7 @@
               <a:t>PLOT(X,Y,S)</a:t>
             </a:r>
             <a:r>
-              <a:rPr lang="es-ES_tradnl" sz="2400" dirty="0" smtClean="0">
+              <a:rPr lang="es-ES_tradnl" sz="2400" dirty="0">
                 <a:effectLst/>
                 <a:latin typeface="Calibri" panose="020F0502020204030204" pitchFamily="34" charset="0"/>
                 <a:ea typeface="Calibri" panose="020F0502020204030204" pitchFamily="34" charset="0"/>
@@ -8748,7 +9316,7 @@
               <a:t> donde </a:t>
             </a:r>
             <a:r>
-              <a:rPr lang="es-ES_tradnl" sz="2400" i="1" dirty="0" smtClean="0">
+              <a:rPr lang="es-ES_tradnl" sz="2400" i="1" dirty="0">
                 <a:effectLst/>
                 <a:latin typeface="Calibri" panose="020F0502020204030204" pitchFamily="34" charset="0"/>
                 <a:ea typeface="Calibri" panose="020F0502020204030204" pitchFamily="34" charset="0"/>
@@ -8757,7 +9325,7 @@
               <a:t>S</a:t>
             </a:r>
             <a:r>
-              <a:rPr lang="es-ES_tradnl" sz="2400" dirty="0" smtClean="0">
+              <a:rPr lang="es-ES_tradnl" sz="2400" dirty="0">
                 <a:effectLst/>
                 <a:latin typeface="Calibri" panose="020F0502020204030204" pitchFamily="34" charset="0"/>
                 <a:ea typeface="Calibri" panose="020F0502020204030204" pitchFamily="34" charset="0"/>
@@ -8765,7 +9333,7 @@
               </a:rPr>
               <a:t> es una cadena de caracteres hecha desde un elemento desde las siguientes 3 columnas:</a:t>
             </a:r>
-            <a:endParaRPr lang="es-AR" sz="2400" dirty="0" smtClean="0">
+            <a:endParaRPr lang="es-AR" sz="2400" dirty="0">
               <a:effectLst/>
               <a:latin typeface="Calibri" panose="020F0502020204030204" pitchFamily="34" charset="0"/>
               <a:ea typeface="Calibri" panose="020F0502020204030204" pitchFamily="34" charset="0"/>
@@ -8782,7 +9350,7 @@
               </a:spcAft>
             </a:pPr>
             <a:r>
-              <a:rPr lang="es-ES_tradnl" sz="2800" dirty="0" smtClean="0">
+              <a:rPr lang="es-ES_tradnl" sz="2800" dirty="0">
                 <a:effectLst/>
                 <a:latin typeface="Calibri" panose="020F0502020204030204" pitchFamily="34" charset="0"/>
                 <a:ea typeface="Calibri" panose="020F0502020204030204" pitchFamily="34" charset="0"/>
@@ -8790,7 +9358,7 @@
               </a:rPr>
               <a:t> </a:t>
             </a:r>
-            <a:endParaRPr lang="es-AR" sz="2800" dirty="0" smtClean="0">
+            <a:endParaRPr lang="es-AR" sz="2800" dirty="0">
               <a:effectLst/>
               <a:latin typeface="Calibri" panose="020F0502020204030204" pitchFamily="34" charset="0"/>
               <a:ea typeface="Calibri" panose="020F0502020204030204" pitchFamily="34" charset="0"/>
@@ -8822,7 +9390,7 @@
               </a:rPr>
               <a:t>b     blue          .     point              -     solid</a:t>
             </a:r>
-            <a:endParaRPr lang="es-AR" sz="2800" dirty="0" smtClean="0">
+            <a:endParaRPr lang="es-AR" sz="2800" dirty="0">
               <a:effectLst/>
               <a:latin typeface="Calibri" panose="020F0502020204030204" pitchFamily="34" charset="0"/>
               <a:ea typeface="Calibri" panose="020F0502020204030204" pitchFamily="34" charset="0"/>
@@ -8846,7 +9414,7 @@
               </a:rPr>
               <a:t>           g     green         o     circle             :     dotted</a:t>
             </a:r>
-            <a:endParaRPr lang="es-AR" sz="2800" dirty="0" smtClean="0">
+            <a:endParaRPr lang="es-AR" sz="2800" dirty="0">
               <a:effectLst/>
               <a:latin typeface="Calibri" panose="020F0502020204030204" pitchFamily="34" charset="0"/>
               <a:ea typeface="Calibri" panose="020F0502020204030204" pitchFamily="34" charset="0"/>
@@ -8886,7 +9454,7 @@
               </a:rPr>
               <a:t> </a:t>
             </a:r>
-            <a:endParaRPr lang="es-AR" sz="2800" dirty="0" smtClean="0">
+            <a:endParaRPr lang="es-AR" sz="2800" dirty="0">
               <a:effectLst/>
               <a:latin typeface="Calibri" panose="020F0502020204030204" pitchFamily="34" charset="0"/>
               <a:ea typeface="Calibri" panose="020F0502020204030204" pitchFamily="34" charset="0"/>
@@ -8910,7 +9478,7 @@
               </a:rPr>
               <a:t>           c     cyan          +     plus               --    dashed   </a:t>
             </a:r>
-            <a:endParaRPr lang="es-AR" sz="2800" dirty="0" smtClean="0">
+            <a:endParaRPr lang="es-AR" sz="2800" dirty="0">
               <a:effectLst/>
               <a:latin typeface="Calibri" panose="020F0502020204030204" pitchFamily="34" charset="0"/>
               <a:ea typeface="Calibri" panose="020F0502020204030204" pitchFamily="34" charset="0"/>
@@ -8934,7 +9502,7 @@
               </a:rPr>
               <a:t>           m     magenta       *     star             (none)  no line</a:t>
             </a:r>
-            <a:endParaRPr lang="es-AR" sz="2800" dirty="0" smtClean="0">
+            <a:endParaRPr lang="es-AR" sz="2800" dirty="0">
               <a:effectLst/>
               <a:latin typeface="Calibri" panose="020F0502020204030204" pitchFamily="34" charset="0"/>
               <a:ea typeface="Calibri" panose="020F0502020204030204" pitchFamily="34" charset="0"/>
@@ -8958,7 +9526,7 @@
               </a:rPr>
               <a:t>           y     yellow        s     square</a:t>
             </a:r>
-            <a:endParaRPr lang="es-AR" sz="2800" dirty="0" smtClean="0">
+            <a:endParaRPr lang="es-AR" sz="2800" dirty="0">
               <a:effectLst/>
               <a:latin typeface="Calibri" panose="020F0502020204030204" pitchFamily="34" charset="0"/>
               <a:ea typeface="Calibri" panose="020F0502020204030204" pitchFamily="34" charset="0"/>
@@ -8982,7 +9550,7 @@
               </a:rPr>
               <a:t>           k     black         d     diamond</a:t>
             </a:r>
-            <a:endParaRPr lang="es-AR" sz="2800" dirty="0" smtClean="0">
+            <a:endParaRPr lang="es-AR" sz="2800" dirty="0">
               <a:effectLst/>
               <a:latin typeface="Calibri" panose="020F0502020204030204" pitchFamily="34" charset="0"/>
               <a:ea typeface="Calibri" panose="020F0502020204030204" pitchFamily="34" charset="0"/>
@@ -9006,7 +9574,7 @@
               </a:rPr>
               <a:t>           w     white         v     triangle (down)</a:t>
             </a:r>
-            <a:endParaRPr lang="es-AR" sz="2800" dirty="0" smtClean="0">
+            <a:endParaRPr lang="es-AR" sz="2800" dirty="0">
               <a:effectLst/>
               <a:latin typeface="Calibri" panose="020F0502020204030204" pitchFamily="34" charset="0"/>
               <a:ea typeface="Calibri" panose="020F0502020204030204" pitchFamily="34" charset="0"/>
@@ -9030,7 +9598,7 @@
               </a:rPr>
               <a:t>                               ^     triangle (up)</a:t>
             </a:r>
-            <a:endParaRPr lang="es-AR" sz="2800" dirty="0" smtClean="0">
+            <a:endParaRPr lang="es-AR" sz="2800" dirty="0">
               <a:effectLst/>
               <a:latin typeface="Calibri" panose="020F0502020204030204" pitchFamily="34" charset="0"/>
               <a:ea typeface="Calibri" panose="020F0502020204030204" pitchFamily="34" charset="0"/>
@@ -9054,7 +9622,7 @@
               </a:rPr>
               <a:t>                               &lt;     triangle (left)</a:t>
             </a:r>
-            <a:endParaRPr lang="es-AR" sz="2800" dirty="0" smtClean="0">
+            <a:endParaRPr lang="es-AR" sz="2800" dirty="0">
               <a:effectLst/>
               <a:latin typeface="Calibri" panose="020F0502020204030204" pitchFamily="34" charset="0"/>
               <a:ea typeface="Calibri" panose="020F0502020204030204" pitchFamily="34" charset="0"/>
@@ -9291,23 +9859,7 @@
                 <a:ea typeface="Calibri" panose="020F0502020204030204" pitchFamily="34" charset="0"/>
                 <a:cs typeface="Courier New" panose="02070309020205020404" pitchFamily="49" charset="0"/>
               </a:rPr>
-              <a:t>Grafica una línea de puntos (:) azul (b) con un signo </a:t>
-            </a:r>
-            <a:r>
-              <a:rPr lang="es-ES_tradnl" dirty="0" smtClean="0">
-                <a:latin typeface="Calibri" panose="020F0502020204030204" pitchFamily="34" charset="0"/>
-                <a:ea typeface="Calibri" panose="020F0502020204030204" pitchFamily="34" charset="0"/>
-                <a:cs typeface="Courier New" panose="02070309020205020404" pitchFamily="49" charset="0"/>
-              </a:rPr>
-              <a:t>más </a:t>
-            </a:r>
-            <a:r>
-              <a:rPr lang="es-ES_tradnl" dirty="0">
-                <a:latin typeface="Calibri" panose="020F0502020204030204" pitchFamily="34" charset="0"/>
-                <a:ea typeface="Calibri" panose="020F0502020204030204" pitchFamily="34" charset="0"/>
-                <a:cs typeface="Courier New" panose="02070309020205020404" pitchFamily="49" charset="0"/>
-              </a:rPr>
-              <a:t>(+) en cada punto dato.</a:t>
+              <a:t>Grafica una línea de puntos (:) azul (b) con un signo más (+) en cada punto dato.</a:t>
             </a:r>
             <a:endParaRPr lang="es-AR" dirty="0">
               <a:latin typeface="Calibri" panose="020F0502020204030204" pitchFamily="34" charset="0"/>
@@ -9799,42 +10351,21 @@
                 <a:ea typeface="Calibri" panose="020F0502020204030204" pitchFamily="34" charset="0"/>
                 <a:cs typeface="Times New Roman" panose="02020603050405020304" pitchFamily="18" charset="0"/>
               </a:rPr>
-              <a:t>,'--rs','LineWidth',2</a:t>
-            </a:r>
-            <a:r>
-              <a:rPr lang="en-US" dirty="0" smtClean="0">
-                <a:ea typeface="Calibri" panose="020F0502020204030204" pitchFamily="34" charset="0"/>
-                <a:cs typeface="Times New Roman" panose="02020603050405020304" pitchFamily="18" charset="0"/>
-              </a:rPr>
-              <a:t>,...                       </a:t>
+              <a:t>,'--rs','LineWidth',2,...                       '</a:t>
+            </a:r>
+            <a:r>
+              <a:rPr lang="en-US" dirty="0" err="1">
+                <a:ea typeface="Calibri" panose="020F0502020204030204" pitchFamily="34" charset="0"/>
+                <a:cs typeface="Times New Roman" panose="02020603050405020304" pitchFamily="18" charset="0"/>
+              </a:rPr>
+              <a:t>MarkerEdgeColor</a:t>
             </a:r>
             <a:r>
               <a:rPr lang="en-US" dirty="0">
                 <a:ea typeface="Calibri" panose="020F0502020204030204" pitchFamily="34" charset="0"/>
                 <a:cs typeface="Times New Roman" panose="02020603050405020304" pitchFamily="18" charset="0"/>
               </a:rPr>
-              <a:t>'</a:t>
-            </a:r>
-            <a:r>
-              <a:rPr lang="en-US" dirty="0" err="1">
-                <a:ea typeface="Calibri" panose="020F0502020204030204" pitchFamily="34" charset="0"/>
-                <a:cs typeface="Times New Roman" panose="02020603050405020304" pitchFamily="18" charset="0"/>
-              </a:rPr>
-              <a:t>MarkerEdgeColor</a:t>
-            </a:r>
-            <a:r>
-              <a:rPr lang="en-US" dirty="0">
-                <a:ea typeface="Calibri" panose="020F0502020204030204" pitchFamily="34" charset="0"/>
-                <a:cs typeface="Times New Roman" panose="02020603050405020304" pitchFamily="18" charset="0"/>
-              </a:rPr>
-              <a:t>','k</a:t>
-            </a:r>
-            <a:r>
-              <a:rPr lang="en-US" dirty="0" smtClean="0">
-                <a:ea typeface="Calibri" panose="020F0502020204030204" pitchFamily="34" charset="0"/>
-                <a:cs typeface="Times New Roman" panose="02020603050405020304" pitchFamily="18" charset="0"/>
-              </a:rPr>
-              <a:t>',...                       </a:t>
+              <a:t>','k',...                       </a:t>
             </a:r>
           </a:p>
           <a:p>
@@ -9847,14 +10378,14 @@
               </a:spcAft>
             </a:pPr>
             <a:r>
-              <a:rPr lang="en-US" dirty="0" smtClean="0">
+              <a:rPr lang="en-US" dirty="0">
                 <a:ea typeface="Calibri" panose="020F0502020204030204" pitchFamily="34" charset="0"/>
                 <a:cs typeface="Times New Roman" panose="02020603050405020304" pitchFamily="18" charset="0"/>
               </a:rPr>
               <a:t>'</a:t>
             </a:r>
             <a:r>
-              <a:rPr lang="en-US" dirty="0" err="1" smtClean="0">
+              <a:rPr lang="en-US" dirty="0" err="1">
                 <a:ea typeface="Calibri" panose="020F0502020204030204" pitchFamily="34" charset="0"/>
                 <a:cs typeface="Times New Roman" panose="02020603050405020304" pitchFamily="18" charset="0"/>
               </a:rPr>
